--- a/memo/Procedural Physically based BRDF for Real-Time Rendering of.pptx
+++ b/memo/Procedural Physically based BRDF for Real-Time Rendering of.pptx
@@ -5,7 +5,7 @@
     <p:sldMasterId id="2147483660" r:id="rId1"/>
   </p:sldMasterIdLst>
   <p:notesMasterIdLst>
-    <p:notesMasterId r:id="rId15"/>
+    <p:notesMasterId r:id="rId18"/>
   </p:notesMasterIdLst>
   <p:sldIdLst>
     <p:sldId id="256" r:id="rId2"/>
@@ -21,6 +21,9 @@
     <p:sldId id="266" r:id="rId12"/>
     <p:sldId id="267" r:id="rId13"/>
     <p:sldId id="268" r:id="rId14"/>
+    <p:sldId id="269" r:id="rId15"/>
+    <p:sldId id="270" r:id="rId16"/>
+    <p:sldId id="271" r:id="rId17"/>
   </p:sldIdLst>
   <p:sldSz cx="12192000" cy="6858000"/>
   <p:notesSz cx="6858000" cy="9144000"/>
@@ -119,6 +122,11 @@
       </a:defRPr>
     </a:lvl9pPr>
   </p:defaultTextStyle>
+  <p:extLst>
+    <p:ext uri="{EFAFB233-063F-42B5-8137-9DF3F51BA10A}">
+      <p15:sldGuideLst xmlns:p15="http://schemas.microsoft.com/office/powerpoint/2012/main"/>
+    </p:ext>
+  </p:extLst>
 </p:presentation>
 </file>
 
@@ -204,7 +212,7 @@
           <a:p>
             <a:fld id="{83687C97-18DD-46AD-B79F-22424EBB7FF1}" type="datetimeFigureOut">
               <a:rPr kumimoji="1" lang="ja-JP" altLang="en-US" smtClean="0"/>
-              <a:t>2025/6/14</a:t>
+              <a:t>2025/6/28</a:t>
             </a:fld>
             <a:endParaRPr kumimoji="1" lang="ja-JP" altLang="en-US"/>
           </a:p>
@@ -718,7 +726,7 @@
           <a:p>
             <a:fld id="{73FA4CDC-7D36-4B4A-B488-116582B3A61D}" type="datetimeFigureOut">
               <a:rPr kumimoji="1" lang="ja-JP" altLang="en-US" smtClean="0"/>
-              <a:t>2025/5/23</a:t>
+              <a:t>2025/6/28</a:t>
             </a:fld>
             <a:endParaRPr kumimoji="1" lang="ja-JP" altLang="en-US"/>
           </a:p>
@@ -920,7 +928,7 @@
           <a:p>
             <a:fld id="{73FA4CDC-7D36-4B4A-B488-116582B3A61D}" type="datetimeFigureOut">
               <a:rPr kumimoji="1" lang="ja-JP" altLang="en-US" smtClean="0"/>
-              <a:t>2025/5/23</a:t>
+              <a:t>2025/6/28</a:t>
             </a:fld>
             <a:endParaRPr kumimoji="1" lang="ja-JP" altLang="en-US"/>
           </a:p>
@@ -1132,7 +1140,7 @@
           <a:p>
             <a:fld id="{73FA4CDC-7D36-4B4A-B488-116582B3A61D}" type="datetimeFigureOut">
               <a:rPr kumimoji="1" lang="ja-JP" altLang="en-US" smtClean="0"/>
-              <a:t>2025/5/23</a:t>
+              <a:t>2025/6/28</a:t>
             </a:fld>
             <a:endParaRPr kumimoji="1" lang="ja-JP" altLang="en-US"/>
           </a:p>
@@ -1334,7 +1342,7 @@
           <a:p>
             <a:fld id="{73FA4CDC-7D36-4B4A-B488-116582B3A61D}" type="datetimeFigureOut">
               <a:rPr kumimoji="1" lang="ja-JP" altLang="en-US" smtClean="0"/>
-              <a:t>2025/5/23</a:t>
+              <a:t>2025/6/28</a:t>
             </a:fld>
             <a:endParaRPr kumimoji="1" lang="ja-JP" altLang="en-US"/>
           </a:p>
@@ -1580,7 +1588,7 @@
           <a:p>
             <a:fld id="{73FA4CDC-7D36-4B4A-B488-116582B3A61D}" type="datetimeFigureOut">
               <a:rPr kumimoji="1" lang="ja-JP" altLang="en-US" smtClean="0"/>
-              <a:t>2025/5/23</a:t>
+              <a:t>2025/6/28</a:t>
             </a:fld>
             <a:endParaRPr kumimoji="1" lang="ja-JP" altLang="en-US"/>
           </a:p>
@@ -1876,7 +1884,7 @@
           <a:p>
             <a:fld id="{73FA4CDC-7D36-4B4A-B488-116582B3A61D}" type="datetimeFigureOut">
               <a:rPr kumimoji="1" lang="ja-JP" altLang="en-US" smtClean="0"/>
-              <a:t>2025/5/23</a:t>
+              <a:t>2025/6/28</a:t>
             </a:fld>
             <a:endParaRPr kumimoji="1" lang="ja-JP" altLang="en-US"/>
           </a:p>
@@ -2307,7 +2315,7 @@
           <a:p>
             <a:fld id="{73FA4CDC-7D36-4B4A-B488-116582B3A61D}" type="datetimeFigureOut">
               <a:rPr kumimoji="1" lang="ja-JP" altLang="en-US" smtClean="0"/>
-              <a:t>2025/5/23</a:t>
+              <a:t>2025/6/28</a:t>
             </a:fld>
             <a:endParaRPr kumimoji="1" lang="ja-JP" altLang="en-US"/>
           </a:p>
@@ -2425,7 +2433,7 @@
           <a:p>
             <a:fld id="{73FA4CDC-7D36-4B4A-B488-116582B3A61D}" type="datetimeFigureOut">
               <a:rPr kumimoji="1" lang="ja-JP" altLang="en-US" smtClean="0"/>
-              <a:t>2025/5/23</a:t>
+              <a:t>2025/6/28</a:t>
             </a:fld>
             <a:endParaRPr kumimoji="1" lang="ja-JP" altLang="en-US"/>
           </a:p>
@@ -2520,7 +2528,7 @@
           <a:p>
             <a:fld id="{73FA4CDC-7D36-4B4A-B488-116582B3A61D}" type="datetimeFigureOut">
               <a:rPr kumimoji="1" lang="ja-JP" altLang="en-US" smtClean="0"/>
-              <a:t>2025/5/23</a:t>
+              <a:t>2025/6/28</a:t>
             </a:fld>
             <a:endParaRPr kumimoji="1" lang="ja-JP" altLang="en-US"/>
           </a:p>
@@ -2829,7 +2837,7 @@
           <a:p>
             <a:fld id="{73FA4CDC-7D36-4B4A-B488-116582B3A61D}" type="datetimeFigureOut">
               <a:rPr kumimoji="1" lang="ja-JP" altLang="en-US" smtClean="0"/>
-              <a:t>2025/5/23</a:t>
+              <a:t>2025/6/28</a:t>
             </a:fld>
             <a:endParaRPr kumimoji="1" lang="ja-JP" altLang="en-US"/>
           </a:p>
@@ -3086,7 +3094,7 @@
           <a:p>
             <a:fld id="{73FA4CDC-7D36-4B4A-B488-116582B3A61D}" type="datetimeFigureOut">
               <a:rPr kumimoji="1" lang="ja-JP" altLang="en-US" smtClean="0"/>
-              <a:t>2025/5/23</a:t>
+              <a:t>2025/6/28</a:t>
             </a:fld>
             <a:endParaRPr kumimoji="1" lang="ja-JP" altLang="en-US"/>
           </a:p>
@@ -3331,7 +3339,7 @@
           <a:p>
             <a:fld id="{73FA4CDC-7D36-4B4A-B488-116582B3A61D}" type="datetimeFigureOut">
               <a:rPr kumimoji="1" lang="ja-JP" altLang="en-US" smtClean="0"/>
-              <a:t>2025/5/23</a:t>
+              <a:t>2025/6/28</a:t>
             </a:fld>
             <a:endParaRPr kumimoji="1" lang="ja-JP" altLang="en-US"/>
           </a:p>
@@ -3831,8 +3839,8 @@
           </a:p>
         </p:txBody>
       </p:sp>
-      <mc:AlternateContent xmlns:mc="http://schemas.openxmlformats.org/markup-compatibility/2006">
-        <mc:Choice xmlns:a14="http://schemas.microsoft.com/office/drawing/2010/main" Requires="a14">
+      <mc:AlternateContent xmlns:mc="http://schemas.openxmlformats.org/markup-compatibility/2006" xmlns:a14="http://schemas.microsoft.com/office/drawing/2010/main">
+        <mc:Choice Requires="a14">
           <p:sp>
             <p:nvSpPr>
               <p:cNvPr id="3" name="コンテンツ プレースホルダー 2">
@@ -5123,7 +5131,7 @@
             </p:txBody>
           </p:sp>
         </mc:Choice>
-        <mc:Fallback>
+        <mc:Fallback xmlns="">
           <p:sp>
             <p:nvSpPr>
               <p:cNvPr id="3" name="コンテンツ プレースホルダー 2">
@@ -5221,8 +5229,8 @@
           </a:p>
         </p:txBody>
       </p:sp>
-      <mc:AlternateContent xmlns:mc="http://schemas.openxmlformats.org/markup-compatibility/2006">
-        <mc:Choice xmlns:a14="http://schemas.microsoft.com/office/drawing/2010/main" Requires="a14">
+      <mc:AlternateContent xmlns:mc="http://schemas.openxmlformats.org/markup-compatibility/2006" xmlns:a14="http://schemas.microsoft.com/office/drawing/2010/main">
+        <mc:Choice Requires="a14">
           <p:sp>
             <p:nvSpPr>
               <p:cNvPr id="3" name="コンテンツ プレースホルダー 2">
@@ -6343,7 +6351,7 @@
                     <m:d>
                       <m:dPr>
                         <m:ctrlPr>
-                          <a:rPr lang="en-US" altLang="ja-JP" b="0" i="0" smtClean="0">
+                          <a:rPr lang="en-US" altLang="ja-JP" b="0" i="1" smtClean="0">
                             <a:latin typeface="Cambria Math" panose="02040503050406030204" pitchFamily="18" charset="0"/>
                           </a:rPr>
                         </m:ctrlPr>
@@ -6698,7 +6706,7 @@
             </p:txBody>
           </p:sp>
         </mc:Choice>
-        <mc:Fallback>
+        <mc:Fallback xmlns="">
           <p:sp>
             <p:nvSpPr>
               <p:cNvPr id="3" name="コンテンツ プレースホルダー 2">
@@ -6772,8 +6780,8 @@
           <a:chExt cx="0" cy="0"/>
         </a:xfrm>
       </p:grpSpPr>
-      <mc:AlternateContent xmlns:mc="http://schemas.openxmlformats.org/markup-compatibility/2006">
-        <mc:Choice xmlns:a14="http://schemas.microsoft.com/office/drawing/2010/main" Requires="a14">
+      <mc:AlternateContent xmlns:mc="http://schemas.openxmlformats.org/markup-compatibility/2006" xmlns:a14="http://schemas.microsoft.com/office/drawing/2010/main">
+        <mc:Choice Requires="a14">
           <p:sp>
             <p:nvSpPr>
               <p:cNvPr id="8" name="テキスト ボックス 7">
@@ -6802,6 +6810,7 @@
               </a:bodyPr>
               <a:lstStyle/>
               <a:p>
+                <a:pPr/>
                 <a14:m>
                   <m:oMathPara xmlns:m="http://schemas.openxmlformats.org/officeDocument/2006/math">
                     <m:oMathParaPr>
@@ -8686,7 +8695,7 @@
                       <m:sSup>
                         <m:sSupPr>
                           <m:ctrlPr>
-                            <a:rPr kumimoji="1" lang="en-US" altLang="ja-JP" sz="1600" b="0" i="0" smtClean="0">
+                            <a:rPr kumimoji="1" lang="en-US" altLang="ja-JP" sz="1600" b="0" i="1" smtClean="0">
                               <a:latin typeface="Cambria Math" panose="02040503050406030204" pitchFamily="18" charset="0"/>
                             </a:rPr>
                           </m:ctrlPr>
@@ -8986,7 +8995,7 @@
             </p:txBody>
           </p:sp>
         </mc:Choice>
-        <mc:Fallback>
+        <mc:Fallback xmlns="">
           <p:sp>
             <p:nvSpPr>
               <p:cNvPr id="8" name="テキスト ボックス 7">
@@ -9179,8 +9188,8 @@
           </a:fontRef>
         </p:style>
       </p:cxnSp>
-      <mc:AlternateContent xmlns:mc="http://schemas.openxmlformats.org/markup-compatibility/2006">
-        <mc:Choice xmlns:a14="http://schemas.microsoft.com/office/drawing/2010/main" Requires="a14">
+      <mc:AlternateContent xmlns:mc="http://schemas.openxmlformats.org/markup-compatibility/2006" xmlns:a14="http://schemas.microsoft.com/office/drawing/2010/main">
+        <mc:Choice Requires="a14">
           <p:sp>
             <p:nvSpPr>
               <p:cNvPr id="38" name="テキスト ボックス 37">
@@ -9209,6 +9218,7 @@
               </a:bodyPr>
               <a:lstStyle/>
               <a:p>
+                <a:pPr/>
                 <a14:m>
                   <m:oMathPara xmlns:m="http://schemas.openxmlformats.org/officeDocument/2006/math">
                     <m:oMathParaPr>
@@ -9260,7 +9270,7 @@
             </p:txBody>
           </p:sp>
         </mc:Choice>
-        <mc:Fallback>
+        <mc:Fallback xmlns="">
           <p:sp>
             <p:nvSpPr>
               <p:cNvPr id="38" name="テキスト ボックス 37">
@@ -10089,6 +10099,3530 @@
 </p:sld>
 </file>
 
+<file path=ppt/slides/slide14.xml><?xml version="1.0" encoding="utf-8"?>
+<p:sld xmlns:a="http://schemas.openxmlformats.org/drawingml/2006/main" xmlns:r="http://schemas.openxmlformats.org/officeDocument/2006/relationships" xmlns:p="http://schemas.openxmlformats.org/presentationml/2006/main">
+  <p:cSld>
+    <p:spTree>
+      <p:nvGrpSpPr>
+        <p:cNvPr id="1" name=""/>
+        <p:cNvGrpSpPr/>
+        <p:nvPr/>
+      </p:nvGrpSpPr>
+      <p:grpSpPr>
+        <a:xfrm>
+          <a:off x="0" y="0"/>
+          <a:ext cx="0" cy="0"/>
+          <a:chOff x="0" y="0"/>
+          <a:chExt cx="0" cy="0"/>
+        </a:xfrm>
+      </p:grpSpPr>
+      <p:sp>
+        <p:nvSpPr>
+          <p:cNvPr id="2" name="タイトル 1">
+            <a:extLst>
+              <a:ext uri="{FF2B5EF4-FFF2-40B4-BE49-F238E27FC236}">
+                <a16:creationId xmlns:a16="http://schemas.microsoft.com/office/drawing/2014/main" id="{F96713DA-F735-E75E-8BDD-1E59223EEB94}"/>
+              </a:ext>
+            </a:extLst>
+          </p:cNvPr>
+          <p:cNvSpPr>
+            <a:spLocks noGrp="1"/>
+          </p:cNvSpPr>
+          <p:nvPr>
+            <p:ph type="title"/>
+          </p:nvPr>
+        </p:nvSpPr>
+        <p:spPr/>
+        <p:txBody>
+          <a:bodyPr/>
+          <a:lstStyle/>
+          <a:p>
+            <a:endParaRPr kumimoji="1" lang="ja-JP" altLang="en-US"/>
+          </a:p>
+        </p:txBody>
+      </p:sp>
+      <p:sp>
+        <p:nvSpPr>
+          <p:cNvPr id="3" name="コンテンツ プレースホルダー 2">
+            <a:extLst>
+              <a:ext uri="{FF2B5EF4-FFF2-40B4-BE49-F238E27FC236}">
+                <a16:creationId xmlns:a16="http://schemas.microsoft.com/office/drawing/2014/main" id="{65CB5940-8902-8C2E-AF4F-F4E943B728D1}"/>
+              </a:ext>
+            </a:extLst>
+          </p:cNvPr>
+          <p:cNvSpPr>
+            <a:spLocks noGrp="1"/>
+          </p:cNvSpPr>
+          <p:nvPr>
+            <p:ph idx="1"/>
+          </p:nvPr>
+        </p:nvSpPr>
+        <p:spPr/>
+        <p:txBody>
+          <a:bodyPr/>
+          <a:lstStyle/>
+          <a:p>
+            <a:endParaRPr kumimoji="1" lang="ja-JP" altLang="en-US"/>
+          </a:p>
+        </p:txBody>
+      </p:sp>
+    </p:spTree>
+    <p:extLst>
+      <p:ext uri="{BB962C8B-B14F-4D97-AF65-F5344CB8AC3E}">
+        <p14:creationId xmlns:p14="http://schemas.microsoft.com/office/powerpoint/2010/main" val="828041881"/>
+      </p:ext>
+    </p:extLst>
+  </p:cSld>
+  <p:clrMapOvr>
+    <a:masterClrMapping/>
+  </p:clrMapOvr>
+</p:sld>
+</file>
+
+<file path=ppt/slides/slide15.xml><?xml version="1.0" encoding="utf-8"?>
+<p:sld xmlns:a="http://schemas.openxmlformats.org/drawingml/2006/main" xmlns:r="http://schemas.openxmlformats.org/officeDocument/2006/relationships" xmlns:p="http://schemas.openxmlformats.org/presentationml/2006/main">
+  <p:cSld>
+    <p:spTree>
+      <p:nvGrpSpPr>
+        <p:cNvPr id="1" name=""/>
+        <p:cNvGrpSpPr/>
+        <p:nvPr/>
+      </p:nvGrpSpPr>
+      <p:grpSpPr>
+        <a:xfrm>
+          <a:off x="0" y="0"/>
+          <a:ext cx="0" cy="0"/>
+          <a:chOff x="0" y="0"/>
+          <a:chExt cx="0" cy="0"/>
+        </a:xfrm>
+      </p:grpSpPr>
+      <p:sp>
+        <p:nvSpPr>
+          <p:cNvPr id="2" name="タイトル 1">
+            <a:extLst>
+              <a:ext uri="{FF2B5EF4-FFF2-40B4-BE49-F238E27FC236}">
+                <a16:creationId xmlns:a16="http://schemas.microsoft.com/office/drawing/2014/main" id="{B4853CF9-0C48-86E2-6AA5-722E3F8E1F15}"/>
+              </a:ext>
+            </a:extLst>
+          </p:cNvPr>
+          <p:cNvSpPr>
+            <a:spLocks noGrp="1"/>
+          </p:cNvSpPr>
+          <p:nvPr>
+            <p:ph type="title"/>
+          </p:nvPr>
+        </p:nvSpPr>
+        <p:spPr/>
+        <p:txBody>
+          <a:bodyPr/>
+          <a:lstStyle/>
+          <a:p>
+            <a:r>
+              <a:rPr kumimoji="1" lang="ja-JP" altLang="en-US"/>
+              <a:t>重点的サンプリング</a:t>
+            </a:r>
+          </a:p>
+        </p:txBody>
+      </p:sp>
+      <mc:AlternateContent xmlns:mc="http://schemas.openxmlformats.org/markup-compatibility/2006">
+        <mc:Choice xmlns:a14="http://schemas.microsoft.com/office/drawing/2010/main" Requires="a14">
+          <p:sp>
+            <p:nvSpPr>
+              <p:cNvPr id="3" name="コンテンツ プレースホルダー 2">
+                <a:extLst>
+                  <a:ext uri="{FF2B5EF4-FFF2-40B4-BE49-F238E27FC236}">
+                    <a16:creationId xmlns:a16="http://schemas.microsoft.com/office/drawing/2014/main" id="{810751A4-F67C-03E1-C6F4-111881BA70B3}"/>
+                  </a:ext>
+                </a:extLst>
+              </p:cNvPr>
+              <p:cNvSpPr>
+                <a:spLocks noGrp="1"/>
+              </p:cNvSpPr>
+              <p:nvPr>
+                <p:ph idx="1"/>
+              </p:nvPr>
+            </p:nvSpPr>
+            <p:spPr>
+              <a:xfrm>
+                <a:off x="838200" y="1825625"/>
+                <a:ext cx="7627164" cy="4351338"/>
+              </a:xfrm>
+            </p:spPr>
+            <p:txBody>
+              <a:bodyPr>
+                <a:normAutofit fontScale="92500" lnSpcReduction="10000"/>
+              </a:bodyPr>
+              <a:lstStyle/>
+              <a:p>
+                <a:r>
+                  <a:rPr kumimoji="1" lang="en-US" altLang="ja-JP" sz="2400"/>
+                  <a:t>SDF</a:t>
+                </a:r>
+                <a:r>
+                  <a:rPr kumimoji="1" lang="ja-JP" altLang="en-US" sz="2400"/>
+                  <a:t>テーブルはバイリニア補間</a:t>
+                </a:r>
+                <a:r>
+                  <a:rPr lang="ja-JP" altLang="en-US" sz="2400"/>
+                  <a:t>（端はクランプ）</a:t>
+                </a:r>
+                <a:endParaRPr lang="en-US" altLang="ja-JP" sz="2400"/>
+              </a:p>
+              <a:p>
+                <a:r>
+                  <a:rPr kumimoji="1" lang="ja-JP" altLang="en-US" sz="2400"/>
+                  <a:t>区間をサンプリング⇒区間内をサンプリング</a:t>
+                </a:r>
+                <a:endParaRPr kumimoji="1" lang="en-US" altLang="ja-JP" sz="2400"/>
+              </a:p>
+              <a:p>
+                <a:pPr lvl="1"/>
+                <a:r>
+                  <a:rPr lang="ja-JP" altLang="en-US" sz="2000"/>
+                  <a:t>区間数はテーブル解像度＋１</a:t>
+                </a:r>
+                <a:endParaRPr kumimoji="1" lang="en-US" altLang="ja-JP" sz="2000"/>
+              </a:p>
+              <a:p>
+                <a:r>
+                  <a:rPr lang="ja-JP" altLang="en-US" sz="2400"/>
+                  <a:t>各区間の重みは積分値 </a:t>
+                </a:r>
+                <a14:m>
+                  <m:oMath xmlns:m="http://schemas.openxmlformats.org/officeDocument/2006/math">
+                    <m:r>
+                      <a:rPr lang="en-US" altLang="ja-JP" sz="2400" b="0" i="1" smtClean="0">
+                        <a:latin typeface="Cambria Math" panose="02040503050406030204" pitchFamily="18" charset="0"/>
+                      </a:rPr>
+                      <m:t>𝑤</m:t>
+                    </m:r>
+                    <m:r>
+                      <a:rPr lang="en-US" altLang="ja-JP" sz="2400" b="0" i="1" smtClean="0">
+                        <a:latin typeface="Cambria Math" panose="02040503050406030204" pitchFamily="18" charset="0"/>
+                      </a:rPr>
+                      <m:t>=</m:t>
+                    </m:r>
+                    <m:f>
+                      <m:fPr>
+                        <m:ctrlPr>
+                          <a:rPr lang="en-US" altLang="ja-JP" sz="2400" b="0" i="1" smtClean="0">
+                            <a:latin typeface="Cambria Math" panose="02040503050406030204" pitchFamily="18" charset="0"/>
+                          </a:rPr>
+                        </m:ctrlPr>
+                      </m:fPr>
+                      <m:num>
+                        <m:sSub>
+                          <m:sSubPr>
+                            <m:ctrlPr>
+                              <a:rPr lang="en-US" altLang="ja-JP" sz="2400" i="1">
+                                <a:latin typeface="Cambria Math" panose="02040503050406030204" pitchFamily="18" charset="0"/>
+                              </a:rPr>
+                            </m:ctrlPr>
+                          </m:sSubPr>
+                          <m:e>
+                            <m:r>
+                              <a:rPr lang="en-US" altLang="ja-JP" sz="2400" i="1">
+                                <a:latin typeface="Cambria Math" panose="02040503050406030204" pitchFamily="18" charset="0"/>
+                              </a:rPr>
+                              <m:t>𝑦</m:t>
+                            </m:r>
+                          </m:e>
+                          <m:sub>
+                            <m:r>
+                              <a:rPr lang="en-US" altLang="ja-JP" sz="2400" i="1">
+                                <a:latin typeface="Cambria Math" panose="02040503050406030204" pitchFamily="18" charset="0"/>
+                              </a:rPr>
+                              <m:t>𝑖</m:t>
+                            </m:r>
+                          </m:sub>
+                        </m:sSub>
+                        <m:r>
+                          <a:rPr lang="en-US" altLang="ja-JP" sz="2400" b="0" i="1" smtClean="0">
+                            <a:latin typeface="Cambria Math" panose="02040503050406030204" pitchFamily="18" charset="0"/>
+                          </a:rPr>
+                          <m:t>+</m:t>
+                        </m:r>
+                        <m:sSub>
+                          <m:sSubPr>
+                            <m:ctrlPr>
+                              <a:rPr lang="en-US" altLang="ja-JP" sz="2400" i="1">
+                                <a:latin typeface="Cambria Math" panose="02040503050406030204" pitchFamily="18" charset="0"/>
+                              </a:rPr>
+                            </m:ctrlPr>
+                          </m:sSubPr>
+                          <m:e>
+                            <m:r>
+                              <a:rPr lang="en-US" altLang="ja-JP" sz="2400" i="1">
+                                <a:latin typeface="Cambria Math" panose="02040503050406030204" pitchFamily="18" charset="0"/>
+                              </a:rPr>
+                              <m:t>𝑦</m:t>
+                            </m:r>
+                          </m:e>
+                          <m:sub>
+                            <m:r>
+                              <a:rPr lang="en-US" altLang="ja-JP" sz="2400" i="1">
+                                <a:latin typeface="Cambria Math" panose="02040503050406030204" pitchFamily="18" charset="0"/>
+                              </a:rPr>
+                              <m:t>𝑖</m:t>
+                            </m:r>
+                            <m:r>
+                              <a:rPr lang="en-US" altLang="ja-JP" sz="2400" i="1">
+                                <a:latin typeface="Cambria Math" panose="02040503050406030204" pitchFamily="18" charset="0"/>
+                              </a:rPr>
+                              <m:t>−1</m:t>
+                            </m:r>
+                          </m:sub>
+                        </m:sSub>
+                      </m:num>
+                      <m:den>
+                        <m:r>
+                          <a:rPr lang="en-US" altLang="ja-JP" sz="2400" b="0" i="1" smtClean="0">
+                            <a:latin typeface="Cambria Math" panose="02040503050406030204" pitchFamily="18" charset="0"/>
+                          </a:rPr>
+                          <m:t>2</m:t>
+                        </m:r>
+                      </m:den>
+                    </m:f>
+                    <m:d>
+                      <m:dPr>
+                        <m:ctrlPr>
+                          <a:rPr lang="en-US" altLang="ja-JP" sz="2400" b="0" i="1" smtClean="0">
+                            <a:latin typeface="Cambria Math" panose="02040503050406030204" pitchFamily="18" charset="0"/>
+                          </a:rPr>
+                        </m:ctrlPr>
+                      </m:dPr>
+                      <m:e>
+                        <m:sSub>
+                          <m:sSubPr>
+                            <m:ctrlPr>
+                              <a:rPr lang="en-US" altLang="ja-JP" sz="2400" b="0" i="1" smtClean="0">
+                                <a:latin typeface="Cambria Math" panose="02040503050406030204" pitchFamily="18" charset="0"/>
+                              </a:rPr>
+                            </m:ctrlPr>
+                          </m:sSubPr>
+                          <m:e>
+                            <m:r>
+                              <a:rPr lang="en-US" altLang="ja-JP" sz="2400" b="0" i="1" smtClean="0">
+                                <a:latin typeface="Cambria Math" panose="02040503050406030204" pitchFamily="18" charset="0"/>
+                              </a:rPr>
+                              <m:t>𝑥</m:t>
+                            </m:r>
+                          </m:e>
+                          <m:sub>
+                            <m:r>
+                              <a:rPr lang="en-US" altLang="ja-JP" sz="2400" b="0" i="1" smtClean="0">
+                                <a:latin typeface="Cambria Math" panose="02040503050406030204" pitchFamily="18" charset="0"/>
+                              </a:rPr>
+                              <m:t>𝑖</m:t>
+                            </m:r>
+                          </m:sub>
+                        </m:sSub>
+                        <m:r>
+                          <a:rPr lang="en-US" altLang="ja-JP" sz="2400" b="0" i="1" smtClean="0">
+                            <a:latin typeface="Cambria Math" panose="02040503050406030204" pitchFamily="18" charset="0"/>
+                          </a:rPr>
+                          <m:t>−</m:t>
+                        </m:r>
+                        <m:sSub>
+                          <m:sSubPr>
+                            <m:ctrlPr>
+                              <a:rPr lang="en-US" altLang="ja-JP" sz="2400" b="0" i="1" smtClean="0">
+                                <a:latin typeface="Cambria Math" panose="02040503050406030204" pitchFamily="18" charset="0"/>
+                              </a:rPr>
+                            </m:ctrlPr>
+                          </m:sSubPr>
+                          <m:e>
+                            <m:r>
+                              <a:rPr lang="en-US" altLang="ja-JP" sz="2400" b="0" i="1" smtClean="0">
+                                <a:latin typeface="Cambria Math" panose="02040503050406030204" pitchFamily="18" charset="0"/>
+                              </a:rPr>
+                              <m:t>𝑥</m:t>
+                            </m:r>
+                          </m:e>
+                          <m:sub>
+                            <m:r>
+                              <a:rPr lang="en-US" altLang="ja-JP" sz="2400" b="0" i="1" smtClean="0">
+                                <a:latin typeface="Cambria Math" panose="02040503050406030204" pitchFamily="18" charset="0"/>
+                              </a:rPr>
+                              <m:t>𝑖</m:t>
+                            </m:r>
+                            <m:r>
+                              <a:rPr lang="en-US" altLang="ja-JP" sz="2400" b="0" i="1" smtClean="0">
+                                <a:latin typeface="Cambria Math" panose="02040503050406030204" pitchFamily="18" charset="0"/>
+                              </a:rPr>
+                              <m:t>−1</m:t>
+                            </m:r>
+                          </m:sub>
+                        </m:sSub>
+                      </m:e>
+                    </m:d>
+                  </m:oMath>
+                </a14:m>
+                <a:endParaRPr lang="en-US" altLang="ja-JP" sz="2400" i="1"/>
+              </a:p>
+              <a:p>
+                <a:pPr lvl="1"/>
+                <a:r>
+                  <a:rPr lang="ja-JP" altLang="en-US" sz="2000"/>
+                  <a:t>区間端は区間幅が半分なのに注意</a:t>
+                </a:r>
+                <a:endParaRPr lang="en-US" altLang="ja-JP" sz="2000"/>
+              </a:p>
+              <a:p>
+                <a:r>
+                  <a:rPr lang="ja-JP" altLang="en-US" sz="2400"/>
+                  <a:t>区間内のサンプリング</a:t>
+                </a:r>
+                <a:endParaRPr lang="en-US" altLang="ja-JP" sz="2400"/>
+              </a:p>
+              <a:p>
+                <a:endParaRPr lang="en-US" altLang="ja-JP" sz="2400"/>
+              </a:p>
+              <a:p>
+                <a:pPr marL="0" indent="0">
+                  <a:buNone/>
+                </a:pPr>
+                <a14:m>
+                  <m:oMathPara xmlns:m="http://schemas.openxmlformats.org/officeDocument/2006/math">
+                    <m:oMathParaPr>
+                      <m:jc m:val="centerGroup"/>
+                    </m:oMathParaPr>
+                    <m:oMath xmlns:m="http://schemas.openxmlformats.org/officeDocument/2006/math">
+                      <m:r>
+                        <a:rPr lang="en-US" altLang="ja-JP" sz="2400" b="0" i="1" smtClean="0">
+                          <a:latin typeface="Cambria Math" panose="02040503050406030204" pitchFamily="18" charset="0"/>
+                        </a:rPr>
+                        <m:t>𝑡</m:t>
+                      </m:r>
+                      <m:r>
+                        <a:rPr lang="en-US" altLang="ja-JP" sz="2400" b="0" i="1" smtClean="0">
+                          <a:latin typeface="Cambria Math" panose="02040503050406030204" pitchFamily="18" charset="0"/>
+                        </a:rPr>
+                        <m:t>=</m:t>
+                      </m:r>
+                      <m:f>
+                        <m:fPr>
+                          <m:ctrlPr>
+                            <a:rPr lang="en-US" altLang="ja-JP" sz="2400" i="1">
+                              <a:latin typeface="Cambria Math" panose="02040503050406030204" pitchFamily="18" charset="0"/>
+                            </a:rPr>
+                          </m:ctrlPr>
+                        </m:fPr>
+                        <m:num>
+                          <m:r>
+                            <a:rPr lang="en-US" altLang="ja-JP" sz="2400" i="1">
+                              <a:latin typeface="Cambria Math" panose="02040503050406030204" pitchFamily="18" charset="0"/>
+                            </a:rPr>
+                            <m:t>−</m:t>
+                          </m:r>
+                          <m:sSub>
+                            <m:sSubPr>
+                              <m:ctrlPr>
+                                <a:rPr lang="en-US" altLang="ja-JP" sz="2400" i="1">
+                                  <a:latin typeface="Cambria Math" panose="02040503050406030204" pitchFamily="18" charset="0"/>
+                                </a:rPr>
+                              </m:ctrlPr>
+                            </m:sSubPr>
+                            <m:e>
+                              <m:r>
+                                <a:rPr lang="en-US" altLang="ja-JP" sz="2400" i="1">
+                                  <a:latin typeface="Cambria Math" panose="02040503050406030204" pitchFamily="18" charset="0"/>
+                                </a:rPr>
+                                <m:t>𝑦</m:t>
+                              </m:r>
+                            </m:e>
+                            <m:sub>
+                              <m:r>
+                                <a:rPr lang="en-US" altLang="ja-JP" sz="2400" i="1">
+                                  <a:latin typeface="Cambria Math" panose="02040503050406030204" pitchFamily="18" charset="0"/>
+                                </a:rPr>
+                                <m:t>𝑖</m:t>
+                              </m:r>
+                              <m:r>
+                                <a:rPr lang="en-US" altLang="ja-JP" sz="2400" i="1">
+                                  <a:latin typeface="Cambria Math" panose="02040503050406030204" pitchFamily="18" charset="0"/>
+                                </a:rPr>
+                                <m:t>−1</m:t>
+                              </m:r>
+                            </m:sub>
+                          </m:sSub>
+                          <m:r>
+                            <a:rPr lang="en-US" altLang="ja-JP" sz="2400" i="1">
+                              <a:latin typeface="Cambria Math" panose="02040503050406030204" pitchFamily="18" charset="0"/>
+                            </a:rPr>
+                            <m:t>+</m:t>
+                          </m:r>
+                          <m:rad>
+                            <m:radPr>
+                              <m:degHide m:val="on"/>
+                              <m:ctrlPr>
+                                <a:rPr lang="en-US" altLang="ja-JP" sz="2400" i="1">
+                                  <a:latin typeface="Cambria Math" panose="02040503050406030204" pitchFamily="18" charset="0"/>
+                                </a:rPr>
+                              </m:ctrlPr>
+                            </m:radPr>
+                            <m:deg/>
+                            <m:e>
+                              <m:sSubSup>
+                                <m:sSubSupPr>
+                                  <m:ctrlPr>
+                                    <a:rPr lang="en-US" altLang="ja-JP" sz="2400" i="1">
+                                      <a:latin typeface="Cambria Math" panose="02040503050406030204" pitchFamily="18" charset="0"/>
+                                    </a:rPr>
+                                  </m:ctrlPr>
+                                </m:sSubSupPr>
+                                <m:e>
+                                  <m:r>
+                                    <a:rPr lang="en-US" altLang="ja-JP" sz="2400" i="1">
+                                      <a:latin typeface="Cambria Math" panose="02040503050406030204" pitchFamily="18" charset="0"/>
+                                    </a:rPr>
+                                    <m:t>𝑦</m:t>
+                                  </m:r>
+                                </m:e>
+                                <m:sub>
+                                  <m:r>
+                                    <a:rPr lang="en-US" altLang="ja-JP" sz="2400" i="1">
+                                      <a:latin typeface="Cambria Math" panose="02040503050406030204" pitchFamily="18" charset="0"/>
+                                    </a:rPr>
+                                    <m:t>𝑖</m:t>
+                                  </m:r>
+                                  <m:r>
+                                    <a:rPr lang="en-US" altLang="ja-JP" sz="2400" i="1">
+                                      <a:latin typeface="Cambria Math" panose="02040503050406030204" pitchFamily="18" charset="0"/>
+                                    </a:rPr>
+                                    <m:t>−1</m:t>
+                                  </m:r>
+                                </m:sub>
+                                <m:sup>
+                                  <m:r>
+                                    <a:rPr lang="en-US" altLang="ja-JP" sz="2400" i="1">
+                                      <a:latin typeface="Cambria Math" panose="02040503050406030204" pitchFamily="18" charset="0"/>
+                                    </a:rPr>
+                                    <m:t>2</m:t>
+                                  </m:r>
+                                </m:sup>
+                              </m:sSubSup>
+                              <m:r>
+                                <a:rPr lang="en-US" altLang="ja-JP" sz="2400" i="1">
+                                  <a:latin typeface="Cambria Math" panose="02040503050406030204" pitchFamily="18" charset="0"/>
+                                </a:rPr>
+                                <m:t>−</m:t>
+                              </m:r>
+                              <m:f>
+                                <m:fPr>
+                                  <m:ctrlPr>
+                                    <a:rPr lang="en-US" altLang="ja-JP" sz="2400" b="0" i="1" smtClean="0">
+                                      <a:latin typeface="Cambria Math" panose="02040503050406030204" pitchFamily="18" charset="0"/>
+                                    </a:rPr>
+                                  </m:ctrlPr>
+                                </m:fPr>
+                                <m:num>
+                                  <m:sSubSup>
+                                    <m:sSubSupPr>
+                                      <m:ctrlPr>
+                                        <a:rPr lang="en-US" altLang="ja-JP" sz="2400" i="1">
+                                          <a:latin typeface="Cambria Math" panose="02040503050406030204" pitchFamily="18" charset="0"/>
+                                        </a:rPr>
+                                      </m:ctrlPr>
+                                    </m:sSubSupPr>
+                                    <m:e>
+                                      <m:r>
+                                        <a:rPr lang="en-US" altLang="ja-JP" sz="2400" i="1">
+                                          <a:latin typeface="Cambria Math" panose="02040503050406030204" pitchFamily="18" charset="0"/>
+                                        </a:rPr>
+                                        <m:t>𝑦</m:t>
+                                      </m:r>
+                                    </m:e>
+                                    <m:sub>
+                                      <m:r>
+                                        <a:rPr lang="en-US" altLang="ja-JP" sz="2400" i="1">
+                                          <a:latin typeface="Cambria Math" panose="02040503050406030204" pitchFamily="18" charset="0"/>
+                                        </a:rPr>
+                                        <m:t>𝑖</m:t>
+                                      </m:r>
+                                    </m:sub>
+                                    <m:sup>
+                                      <m:r>
+                                        <a:rPr lang="en-US" altLang="ja-JP" sz="2400" i="1">
+                                          <a:latin typeface="Cambria Math" panose="02040503050406030204" pitchFamily="18" charset="0"/>
+                                        </a:rPr>
+                                        <m:t>2</m:t>
+                                      </m:r>
+                                    </m:sup>
+                                  </m:sSubSup>
+                                  <m:r>
+                                    <a:rPr lang="en-US" altLang="ja-JP" sz="2400" i="1">
+                                      <a:latin typeface="Cambria Math" panose="02040503050406030204" pitchFamily="18" charset="0"/>
+                                    </a:rPr>
+                                    <m:t>−</m:t>
+                                  </m:r>
+                                  <m:sSubSup>
+                                    <m:sSubSupPr>
+                                      <m:ctrlPr>
+                                        <a:rPr lang="en-US" altLang="ja-JP" sz="2400" i="1">
+                                          <a:latin typeface="Cambria Math" panose="02040503050406030204" pitchFamily="18" charset="0"/>
+                                        </a:rPr>
+                                      </m:ctrlPr>
+                                    </m:sSubSupPr>
+                                    <m:e>
+                                      <m:r>
+                                        <a:rPr lang="en-US" altLang="ja-JP" sz="2400" i="1">
+                                          <a:latin typeface="Cambria Math" panose="02040503050406030204" pitchFamily="18" charset="0"/>
+                                        </a:rPr>
+                                        <m:t>𝑦</m:t>
+                                      </m:r>
+                                    </m:e>
+                                    <m:sub>
+                                      <m:r>
+                                        <a:rPr lang="en-US" altLang="ja-JP" sz="2400" i="1">
+                                          <a:latin typeface="Cambria Math" panose="02040503050406030204" pitchFamily="18" charset="0"/>
+                                        </a:rPr>
+                                        <m:t>𝑖</m:t>
+                                      </m:r>
+                                      <m:r>
+                                        <a:rPr lang="en-US" altLang="ja-JP" sz="2400" i="1">
+                                          <a:latin typeface="Cambria Math" panose="02040503050406030204" pitchFamily="18" charset="0"/>
+                                        </a:rPr>
+                                        <m:t>−1</m:t>
+                                      </m:r>
+                                    </m:sub>
+                                    <m:sup>
+                                      <m:r>
+                                        <a:rPr lang="en-US" altLang="ja-JP" sz="2400" i="1">
+                                          <a:latin typeface="Cambria Math" panose="02040503050406030204" pitchFamily="18" charset="0"/>
+                                        </a:rPr>
+                                        <m:t>2</m:t>
+                                      </m:r>
+                                    </m:sup>
+                                  </m:sSubSup>
+                                </m:num>
+                                <m:den>
+                                  <m:r>
+                                    <a:rPr lang="en-US" altLang="ja-JP" sz="2400" b="0" i="1" smtClean="0">
+                                      <a:latin typeface="Cambria Math" panose="02040503050406030204" pitchFamily="18" charset="0"/>
+                                    </a:rPr>
+                                    <m:t>2</m:t>
+                                  </m:r>
+                                </m:den>
+                              </m:f>
+                              <m:r>
+                                <a:rPr lang="en-US" altLang="ja-JP" sz="2400" i="1">
+                                  <a:latin typeface="Cambria Math" panose="02040503050406030204" pitchFamily="18" charset="0"/>
+                                </a:rPr>
+                                <m:t>𝑢</m:t>
+                              </m:r>
+                            </m:e>
+                          </m:rad>
+                        </m:num>
+                        <m:den>
+                          <m:sSub>
+                            <m:sSubPr>
+                              <m:ctrlPr>
+                                <a:rPr lang="en-US" altLang="ja-JP" sz="2400" i="1">
+                                  <a:latin typeface="Cambria Math" panose="02040503050406030204" pitchFamily="18" charset="0"/>
+                                </a:rPr>
+                              </m:ctrlPr>
+                            </m:sSubPr>
+                            <m:e>
+                              <m:r>
+                                <a:rPr lang="en-US" altLang="ja-JP" sz="2400" i="1">
+                                  <a:latin typeface="Cambria Math" panose="02040503050406030204" pitchFamily="18" charset="0"/>
+                                </a:rPr>
+                                <m:t>𝑦</m:t>
+                              </m:r>
+                            </m:e>
+                            <m:sub>
+                              <m:r>
+                                <a:rPr lang="en-US" altLang="ja-JP" sz="2400" i="1">
+                                  <a:latin typeface="Cambria Math" panose="02040503050406030204" pitchFamily="18" charset="0"/>
+                                </a:rPr>
+                                <m:t>𝑖</m:t>
+                              </m:r>
+                            </m:sub>
+                          </m:sSub>
+                          <m:r>
+                            <a:rPr lang="en-US" altLang="ja-JP" sz="2400" i="1">
+                              <a:latin typeface="Cambria Math" panose="02040503050406030204" pitchFamily="18" charset="0"/>
+                            </a:rPr>
+                            <m:t>−</m:t>
+                          </m:r>
+                          <m:sSub>
+                            <m:sSubPr>
+                              <m:ctrlPr>
+                                <a:rPr lang="en-US" altLang="ja-JP" sz="2400" i="1">
+                                  <a:latin typeface="Cambria Math" panose="02040503050406030204" pitchFamily="18" charset="0"/>
+                                </a:rPr>
+                              </m:ctrlPr>
+                            </m:sSubPr>
+                            <m:e>
+                              <m:r>
+                                <a:rPr lang="en-US" altLang="ja-JP" sz="2400" i="1">
+                                  <a:latin typeface="Cambria Math" panose="02040503050406030204" pitchFamily="18" charset="0"/>
+                                </a:rPr>
+                                <m:t>𝑦</m:t>
+                              </m:r>
+                            </m:e>
+                            <m:sub>
+                              <m:r>
+                                <a:rPr lang="en-US" altLang="ja-JP" sz="2400" i="1">
+                                  <a:latin typeface="Cambria Math" panose="02040503050406030204" pitchFamily="18" charset="0"/>
+                                </a:rPr>
+                                <m:t>𝑖</m:t>
+                              </m:r>
+                              <m:r>
+                                <a:rPr lang="en-US" altLang="ja-JP" sz="2400" i="1">
+                                  <a:latin typeface="Cambria Math" panose="02040503050406030204" pitchFamily="18" charset="0"/>
+                                </a:rPr>
+                                <m:t>−1</m:t>
+                              </m:r>
+                            </m:sub>
+                          </m:sSub>
+                        </m:den>
+                      </m:f>
+                    </m:oMath>
+                    <m:oMath xmlns:m="http://schemas.openxmlformats.org/officeDocument/2006/math">
+                      <m:r>
+                        <a:rPr lang="en-US" altLang="ja-JP" sz="2400" b="0" i="1" smtClean="0">
+                          <a:latin typeface="Cambria Math" panose="02040503050406030204" pitchFamily="18" charset="0"/>
+                        </a:rPr>
+                        <m:t> </m:t>
+                      </m:r>
+                    </m:oMath>
+                    <m:oMath xmlns:m="http://schemas.openxmlformats.org/officeDocument/2006/math">
+                      <m:sSub>
+                        <m:sSubPr>
+                          <m:ctrlPr>
+                            <a:rPr lang="en-US" altLang="ja-JP" sz="2400" b="0" i="1" smtClean="0">
+                              <a:latin typeface="Cambria Math" panose="02040503050406030204" pitchFamily="18" charset="0"/>
+                            </a:rPr>
+                          </m:ctrlPr>
+                        </m:sSubPr>
+                        <m:e>
+                          <m:r>
+                            <a:rPr lang="en-US" altLang="ja-JP" sz="2400" b="0" i="1" smtClean="0">
+                              <a:latin typeface="Cambria Math" panose="02040503050406030204" pitchFamily="18" charset="0"/>
+                            </a:rPr>
+                            <m:t>𝑦</m:t>
+                          </m:r>
+                        </m:e>
+                        <m:sub>
+                          <m:r>
+                            <a:rPr lang="en-US" altLang="ja-JP" sz="2400" b="0" i="1" smtClean="0">
+                              <a:latin typeface="Cambria Math" panose="02040503050406030204" pitchFamily="18" charset="0"/>
+                            </a:rPr>
+                            <m:t>𝑖</m:t>
+                          </m:r>
+                        </m:sub>
+                      </m:sSub>
+                      <m:r>
+                        <a:rPr lang="en-US" altLang="ja-JP" sz="2400" b="0" i="1" smtClean="0">
+                          <a:latin typeface="Cambria Math" panose="02040503050406030204" pitchFamily="18" charset="0"/>
+                        </a:rPr>
+                        <m:t>=</m:t>
+                      </m:r>
+                      <m:sSub>
+                        <m:sSubPr>
+                          <m:ctrlPr>
+                            <a:rPr lang="en-US" altLang="ja-JP" sz="2400" b="0" i="1" smtClean="0">
+                              <a:latin typeface="Cambria Math" panose="02040503050406030204" pitchFamily="18" charset="0"/>
+                            </a:rPr>
+                          </m:ctrlPr>
+                        </m:sSubPr>
+                        <m:e>
+                          <m:r>
+                            <a:rPr lang="en-US" altLang="ja-JP" sz="2400" b="0" i="1" smtClean="0">
+                              <a:latin typeface="Cambria Math" panose="02040503050406030204" pitchFamily="18" charset="0"/>
+                            </a:rPr>
+                            <m:t>𝑦</m:t>
+                          </m:r>
+                        </m:e>
+                        <m:sub>
+                          <m:r>
+                            <a:rPr lang="en-US" altLang="ja-JP" sz="2400" b="0" i="1" smtClean="0">
+                              <a:latin typeface="Cambria Math" panose="02040503050406030204" pitchFamily="18" charset="0"/>
+                            </a:rPr>
+                            <m:t>𝑖</m:t>
+                          </m:r>
+                          <m:r>
+                            <a:rPr lang="en-US" altLang="ja-JP" sz="2400" b="0" i="1" smtClean="0">
+                              <a:latin typeface="Cambria Math" panose="02040503050406030204" pitchFamily="18" charset="0"/>
+                            </a:rPr>
+                            <m:t>−1</m:t>
+                          </m:r>
+                        </m:sub>
+                      </m:sSub>
+                      <m:r>
+                        <a:rPr lang="ja-JP" altLang="en-US" sz="2400" i="1">
+                          <a:latin typeface="Cambria Math" panose="02040503050406030204" pitchFamily="18" charset="0"/>
+                        </a:rPr>
+                        <m:t>のとき</m:t>
+                      </m:r>
+                      <m:r>
+                        <a:rPr lang="ja-JP" altLang="en-US" sz="2400" i="1" smtClean="0">
+                          <a:latin typeface="Cambria Math" panose="02040503050406030204" pitchFamily="18" charset="0"/>
+                        </a:rPr>
+                        <m:t>　</m:t>
+                      </m:r>
+                      <m:r>
+                        <a:rPr lang="en-US" altLang="ja-JP" sz="2400" b="0" i="1" smtClean="0">
+                          <a:latin typeface="Cambria Math" panose="02040503050406030204" pitchFamily="18" charset="0"/>
+                        </a:rPr>
+                        <m:t>𝑡</m:t>
+                      </m:r>
+                      <m:r>
+                        <a:rPr lang="en-US" altLang="ja-JP" sz="2400" b="0" i="1" smtClean="0">
+                          <a:latin typeface="Cambria Math" panose="02040503050406030204" pitchFamily="18" charset="0"/>
+                        </a:rPr>
+                        <m:t>=</m:t>
+                      </m:r>
+                      <m:r>
+                        <a:rPr lang="en-US" altLang="ja-JP" sz="2400" b="0" i="1" smtClean="0">
+                          <a:latin typeface="Cambria Math" panose="02040503050406030204" pitchFamily="18" charset="0"/>
+                        </a:rPr>
+                        <m:t>𝑢</m:t>
+                      </m:r>
+                    </m:oMath>
+                  </m:oMathPara>
+                </a14:m>
+                <a:endParaRPr lang="en-US" altLang="ja-JP" sz="2400"/>
+              </a:p>
+              <a:p>
+                <a:endParaRPr lang="en-US" altLang="ja-JP" sz="2400"/>
+              </a:p>
+              <a:p>
+                <a:endParaRPr lang="en-US" altLang="ja-JP" sz="2400"/>
+              </a:p>
+              <a:p>
+                <a:endParaRPr kumimoji="1" lang="en-US" altLang="ja-JP" sz="2400"/>
+              </a:p>
+              <a:p>
+                <a:endParaRPr lang="en-US" altLang="ja-JP" sz="2400"/>
+              </a:p>
+              <a:p>
+                <a:endParaRPr kumimoji="1" lang="en-US" altLang="ja-JP" sz="2400"/>
+              </a:p>
+              <a:p>
+                <a:endParaRPr lang="en-US" altLang="ja-JP" sz="2400"/>
+              </a:p>
+              <a:p>
+                <a:endParaRPr kumimoji="1" lang="en-US" altLang="ja-JP" sz="2400"/>
+              </a:p>
+              <a:p>
+                <a:endParaRPr lang="en-US" altLang="ja-JP" sz="2400"/>
+              </a:p>
+              <a:p>
+                <a:endParaRPr kumimoji="1" lang="ja-JP" altLang="en-US" sz="2400"/>
+              </a:p>
+            </p:txBody>
+          </p:sp>
+        </mc:Choice>
+        <mc:Fallback>
+          <p:sp>
+            <p:nvSpPr>
+              <p:cNvPr id="3" name="コンテンツ プレースホルダー 2">
+                <a:extLst>
+                  <a:ext uri="{FF2B5EF4-FFF2-40B4-BE49-F238E27FC236}">
+                    <a16:creationId xmlns:a16="http://schemas.microsoft.com/office/drawing/2014/main" id="{810751A4-F67C-03E1-C6F4-111881BA70B3}"/>
+                  </a:ext>
+                </a:extLst>
+              </p:cNvPr>
+              <p:cNvSpPr>
+                <a:spLocks noGrp="1" noRot="1" noChangeAspect="1" noMove="1" noResize="1" noEditPoints="1" noAdjustHandles="1" noChangeArrowheads="1" noChangeShapeType="1" noTextEdit="1"/>
+              </p:cNvSpPr>
+              <p:nvPr>
+                <p:ph idx="1"/>
+              </p:nvPr>
+            </p:nvSpPr>
+            <p:spPr>
+              <a:xfrm>
+                <a:off x="838200" y="1825625"/>
+                <a:ext cx="7627164" cy="4351338"/>
+              </a:xfrm>
+              <a:blipFill>
+                <a:blip r:embed="rId2"/>
+                <a:stretch>
+                  <a:fillRect l="-959" t="-2241"/>
+                </a:stretch>
+              </a:blipFill>
+            </p:spPr>
+            <p:txBody>
+              <a:bodyPr/>
+              <a:lstStyle/>
+              <a:p>
+                <a:r>
+                  <a:rPr lang="ja-JP" altLang="en-US">
+                    <a:noFill/>
+                  </a:rPr>
+                  <a:t> </a:t>
+                </a:r>
+              </a:p>
+            </p:txBody>
+          </p:sp>
+        </mc:Fallback>
+      </mc:AlternateContent>
+      <p:graphicFrame>
+        <p:nvGraphicFramePr>
+          <p:cNvPr id="4" name="表 3">
+            <a:extLst>
+              <a:ext uri="{FF2B5EF4-FFF2-40B4-BE49-F238E27FC236}">
+                <a16:creationId xmlns:a16="http://schemas.microsoft.com/office/drawing/2014/main" id="{FD2CB336-A6CF-E5CF-09A3-7BEFE184F666}"/>
+              </a:ext>
+            </a:extLst>
+          </p:cNvPr>
+          <p:cNvGraphicFramePr>
+            <a:graphicFrameLocks noGrp="1"/>
+          </p:cNvGraphicFramePr>
+          <p:nvPr>
+            <p:extLst>
+              <p:ext uri="{D42A27DB-BD31-4B8C-83A1-F6EECF244321}">
+                <p14:modId xmlns:p14="http://schemas.microsoft.com/office/powerpoint/2010/main" val="3840948015"/>
+              </p:ext>
+            </p:extLst>
+          </p:nvPr>
+        </p:nvGraphicFramePr>
+        <p:xfrm>
+          <a:off x="7956908" y="3781617"/>
+          <a:ext cx="3672000" cy="365760"/>
+        </p:xfrm>
+        <a:graphic>
+          <a:graphicData uri="http://schemas.openxmlformats.org/drawingml/2006/table">
+            <a:tbl>
+              <a:tblPr>
+                <a:tableStyleId>{5940675A-B579-460E-94D1-54222C63F5DA}</a:tableStyleId>
+              </a:tblPr>
+              <a:tblGrid>
+                <a:gridCol w="918000">
+                  <a:extLst>
+                    <a:ext uri="{9D8B030D-6E8A-4147-A177-3AD203B41FA5}">
+                      <a16:colId xmlns:a16="http://schemas.microsoft.com/office/drawing/2014/main" val="2801293580"/>
+                    </a:ext>
+                  </a:extLst>
+                </a:gridCol>
+                <a:gridCol w="918000">
+                  <a:extLst>
+                    <a:ext uri="{9D8B030D-6E8A-4147-A177-3AD203B41FA5}">
+                      <a16:colId xmlns:a16="http://schemas.microsoft.com/office/drawing/2014/main" val="1210503514"/>
+                    </a:ext>
+                  </a:extLst>
+                </a:gridCol>
+                <a:gridCol w="918000">
+                  <a:extLst>
+                    <a:ext uri="{9D8B030D-6E8A-4147-A177-3AD203B41FA5}">
+                      <a16:colId xmlns:a16="http://schemas.microsoft.com/office/drawing/2014/main" val="1577042054"/>
+                    </a:ext>
+                  </a:extLst>
+                </a:gridCol>
+                <a:gridCol w="918000">
+                  <a:extLst>
+                    <a:ext uri="{9D8B030D-6E8A-4147-A177-3AD203B41FA5}">
+                      <a16:colId xmlns:a16="http://schemas.microsoft.com/office/drawing/2014/main" val="1982503674"/>
+                    </a:ext>
+                  </a:extLst>
+                </a:gridCol>
+              </a:tblGrid>
+              <a:tr h="324000">
+                <a:tc>
+                  <a:txBody>
+                    <a:bodyPr/>
+                    <a:lstStyle/>
+                    <a:p>
+                      <a:endParaRPr kumimoji="1" lang="ja-JP" altLang="en-US"/>
+                    </a:p>
+                  </a:txBody>
+                  <a:tcPr/>
+                </a:tc>
+                <a:tc>
+                  <a:txBody>
+                    <a:bodyPr/>
+                    <a:lstStyle/>
+                    <a:p>
+                      <a:endParaRPr kumimoji="1" lang="ja-JP" altLang="en-US"/>
+                    </a:p>
+                  </a:txBody>
+                  <a:tcPr/>
+                </a:tc>
+                <a:tc>
+                  <a:txBody>
+                    <a:bodyPr/>
+                    <a:lstStyle/>
+                    <a:p>
+                      <a:endParaRPr kumimoji="1" lang="ja-JP" altLang="en-US"/>
+                    </a:p>
+                  </a:txBody>
+                  <a:tcPr/>
+                </a:tc>
+                <a:tc>
+                  <a:txBody>
+                    <a:bodyPr/>
+                    <a:lstStyle/>
+                    <a:p>
+                      <a:endParaRPr kumimoji="1" lang="ja-JP" altLang="en-US"/>
+                    </a:p>
+                  </a:txBody>
+                  <a:tcPr/>
+                </a:tc>
+                <a:extLst>
+                  <a:ext uri="{0D108BD9-81ED-4DB2-BD59-A6C34878D82A}">
+                    <a16:rowId xmlns:a16="http://schemas.microsoft.com/office/drawing/2014/main" val="3085022225"/>
+                  </a:ext>
+                </a:extLst>
+              </a:tr>
+            </a:tbl>
+          </a:graphicData>
+        </a:graphic>
+      </p:graphicFrame>
+      <p:sp>
+        <p:nvSpPr>
+          <p:cNvPr id="5" name="楕円 4">
+            <a:extLst>
+              <a:ext uri="{FF2B5EF4-FFF2-40B4-BE49-F238E27FC236}">
+                <a16:creationId xmlns:a16="http://schemas.microsoft.com/office/drawing/2014/main" id="{A5929EB4-1F14-D2CC-3FB5-46197521DA25}"/>
+              </a:ext>
+            </a:extLst>
+          </p:cNvPr>
+          <p:cNvSpPr/>
+          <p:nvPr/>
+        </p:nvSpPr>
+        <p:spPr>
+          <a:xfrm>
+            <a:off x="8309726" y="3874497"/>
+            <a:ext cx="180000" cy="180000"/>
+          </a:xfrm>
+          <a:prstGeom prst="ellipse">
+            <a:avLst/>
+          </a:prstGeom>
+        </p:spPr>
+        <p:style>
+          <a:lnRef idx="2">
+            <a:schemeClr val="accent1">
+              <a:shade val="15000"/>
+            </a:schemeClr>
+          </a:lnRef>
+          <a:fillRef idx="1">
+            <a:schemeClr val="accent1"/>
+          </a:fillRef>
+          <a:effectRef idx="0">
+            <a:schemeClr val="accent1"/>
+          </a:effectRef>
+          <a:fontRef idx="minor">
+            <a:schemeClr val="lt1"/>
+          </a:fontRef>
+        </p:style>
+        <p:txBody>
+          <a:bodyPr rtlCol="0" anchor="ctr"/>
+          <a:lstStyle/>
+          <a:p>
+            <a:pPr algn="ctr"/>
+            <a:endParaRPr kumimoji="1" lang="ja-JP" altLang="en-US"/>
+          </a:p>
+        </p:txBody>
+      </p:sp>
+      <p:sp>
+        <p:nvSpPr>
+          <p:cNvPr id="6" name="楕円 5">
+            <a:extLst>
+              <a:ext uri="{FF2B5EF4-FFF2-40B4-BE49-F238E27FC236}">
+                <a16:creationId xmlns:a16="http://schemas.microsoft.com/office/drawing/2014/main" id="{18D96C72-1A2C-1BAD-F284-70B427DB6037}"/>
+              </a:ext>
+            </a:extLst>
+          </p:cNvPr>
+          <p:cNvSpPr/>
+          <p:nvPr/>
+        </p:nvSpPr>
+        <p:spPr>
+          <a:xfrm>
+            <a:off x="9243274" y="3874497"/>
+            <a:ext cx="180000" cy="180000"/>
+          </a:xfrm>
+          <a:prstGeom prst="ellipse">
+            <a:avLst/>
+          </a:prstGeom>
+        </p:spPr>
+        <p:style>
+          <a:lnRef idx="2">
+            <a:schemeClr val="accent1">
+              <a:shade val="15000"/>
+            </a:schemeClr>
+          </a:lnRef>
+          <a:fillRef idx="1">
+            <a:schemeClr val="accent1"/>
+          </a:fillRef>
+          <a:effectRef idx="0">
+            <a:schemeClr val="accent1"/>
+          </a:effectRef>
+          <a:fontRef idx="minor">
+            <a:schemeClr val="lt1"/>
+          </a:fontRef>
+        </p:style>
+        <p:txBody>
+          <a:bodyPr rtlCol="0" anchor="ctr"/>
+          <a:lstStyle/>
+          <a:p>
+            <a:pPr algn="ctr"/>
+            <a:endParaRPr kumimoji="1" lang="ja-JP" altLang="en-US"/>
+          </a:p>
+        </p:txBody>
+      </p:sp>
+      <p:sp>
+        <p:nvSpPr>
+          <p:cNvPr id="7" name="楕円 6">
+            <a:extLst>
+              <a:ext uri="{FF2B5EF4-FFF2-40B4-BE49-F238E27FC236}">
+                <a16:creationId xmlns:a16="http://schemas.microsoft.com/office/drawing/2014/main" id="{3102EEBC-C855-7855-F8F8-D35AAC92144C}"/>
+              </a:ext>
+            </a:extLst>
+          </p:cNvPr>
+          <p:cNvSpPr/>
+          <p:nvPr/>
+        </p:nvSpPr>
+        <p:spPr>
+          <a:xfrm>
+            <a:off x="10146530" y="3874497"/>
+            <a:ext cx="180000" cy="180000"/>
+          </a:xfrm>
+          <a:prstGeom prst="ellipse">
+            <a:avLst/>
+          </a:prstGeom>
+        </p:spPr>
+        <p:style>
+          <a:lnRef idx="2">
+            <a:schemeClr val="accent1">
+              <a:shade val="15000"/>
+            </a:schemeClr>
+          </a:lnRef>
+          <a:fillRef idx="1">
+            <a:schemeClr val="accent1"/>
+          </a:fillRef>
+          <a:effectRef idx="0">
+            <a:schemeClr val="accent1"/>
+          </a:effectRef>
+          <a:fontRef idx="minor">
+            <a:schemeClr val="lt1"/>
+          </a:fontRef>
+        </p:style>
+        <p:txBody>
+          <a:bodyPr rtlCol="0" anchor="ctr"/>
+          <a:lstStyle/>
+          <a:p>
+            <a:pPr algn="ctr"/>
+            <a:endParaRPr kumimoji="1" lang="ja-JP" altLang="en-US"/>
+          </a:p>
+        </p:txBody>
+      </p:sp>
+      <p:sp>
+        <p:nvSpPr>
+          <p:cNvPr id="8" name="楕円 7">
+            <a:extLst>
+              <a:ext uri="{FF2B5EF4-FFF2-40B4-BE49-F238E27FC236}">
+                <a16:creationId xmlns:a16="http://schemas.microsoft.com/office/drawing/2014/main" id="{5AAFD235-9D97-AA5E-A9B5-41F14B2ECBAB}"/>
+              </a:ext>
+            </a:extLst>
+          </p:cNvPr>
+          <p:cNvSpPr/>
+          <p:nvPr/>
+        </p:nvSpPr>
+        <p:spPr>
+          <a:xfrm>
+            <a:off x="11080078" y="3874497"/>
+            <a:ext cx="180000" cy="180000"/>
+          </a:xfrm>
+          <a:prstGeom prst="ellipse">
+            <a:avLst/>
+          </a:prstGeom>
+        </p:spPr>
+        <p:style>
+          <a:lnRef idx="2">
+            <a:schemeClr val="accent1">
+              <a:shade val="15000"/>
+            </a:schemeClr>
+          </a:lnRef>
+          <a:fillRef idx="1">
+            <a:schemeClr val="accent1"/>
+          </a:fillRef>
+          <a:effectRef idx="0">
+            <a:schemeClr val="accent1"/>
+          </a:effectRef>
+          <a:fontRef idx="minor">
+            <a:schemeClr val="lt1"/>
+          </a:fontRef>
+        </p:style>
+        <p:txBody>
+          <a:bodyPr rtlCol="0" anchor="ctr"/>
+          <a:lstStyle/>
+          <a:p>
+            <a:pPr algn="ctr"/>
+            <a:endParaRPr kumimoji="1" lang="ja-JP" altLang="en-US"/>
+          </a:p>
+        </p:txBody>
+      </p:sp>
+      <p:cxnSp>
+        <p:nvCxnSpPr>
+          <p:cNvPr id="16" name="直線コネクタ 15">
+            <a:extLst>
+              <a:ext uri="{FF2B5EF4-FFF2-40B4-BE49-F238E27FC236}">
+                <a16:creationId xmlns:a16="http://schemas.microsoft.com/office/drawing/2014/main" id="{16745A10-8B98-ABCB-A1BC-590660E7161A}"/>
+              </a:ext>
+            </a:extLst>
+          </p:cNvPr>
+          <p:cNvCxnSpPr/>
+          <p:nvPr/>
+        </p:nvCxnSpPr>
+        <p:spPr>
+          <a:xfrm flipV="1">
+            <a:off x="7956908" y="3781617"/>
+            <a:ext cx="0" cy="1457960"/>
+          </a:xfrm>
+          <a:prstGeom prst="line">
+            <a:avLst/>
+          </a:prstGeom>
+        </p:spPr>
+        <p:style>
+          <a:lnRef idx="1">
+            <a:schemeClr val="accent1"/>
+          </a:lnRef>
+          <a:fillRef idx="0">
+            <a:schemeClr val="accent1"/>
+          </a:fillRef>
+          <a:effectRef idx="0">
+            <a:schemeClr val="accent1"/>
+          </a:effectRef>
+          <a:fontRef idx="minor">
+            <a:schemeClr val="tx1"/>
+          </a:fontRef>
+        </p:style>
+      </p:cxnSp>
+      <p:cxnSp>
+        <p:nvCxnSpPr>
+          <p:cNvPr id="17" name="直線コネクタ 16">
+            <a:extLst>
+              <a:ext uri="{FF2B5EF4-FFF2-40B4-BE49-F238E27FC236}">
+                <a16:creationId xmlns:a16="http://schemas.microsoft.com/office/drawing/2014/main" id="{B0E4155C-7733-0D59-AB34-2E7FF4058E5C}"/>
+              </a:ext>
+            </a:extLst>
+          </p:cNvPr>
+          <p:cNvCxnSpPr/>
+          <p:nvPr/>
+        </p:nvCxnSpPr>
+        <p:spPr>
+          <a:xfrm flipV="1">
+            <a:off x="8399726" y="3781617"/>
+            <a:ext cx="0" cy="1457960"/>
+          </a:xfrm>
+          <a:prstGeom prst="line">
+            <a:avLst/>
+          </a:prstGeom>
+        </p:spPr>
+        <p:style>
+          <a:lnRef idx="1">
+            <a:schemeClr val="accent1"/>
+          </a:lnRef>
+          <a:fillRef idx="0">
+            <a:schemeClr val="accent1"/>
+          </a:fillRef>
+          <a:effectRef idx="0">
+            <a:schemeClr val="accent1"/>
+          </a:effectRef>
+          <a:fontRef idx="minor">
+            <a:schemeClr val="tx1"/>
+          </a:fontRef>
+        </p:style>
+      </p:cxnSp>
+      <p:cxnSp>
+        <p:nvCxnSpPr>
+          <p:cNvPr id="18" name="直線コネクタ 17">
+            <a:extLst>
+              <a:ext uri="{FF2B5EF4-FFF2-40B4-BE49-F238E27FC236}">
+                <a16:creationId xmlns:a16="http://schemas.microsoft.com/office/drawing/2014/main" id="{D90DE522-1A3F-780C-F765-D5F6C75BFF23}"/>
+              </a:ext>
+            </a:extLst>
+          </p:cNvPr>
+          <p:cNvCxnSpPr/>
+          <p:nvPr/>
+        </p:nvCxnSpPr>
+        <p:spPr>
+          <a:xfrm flipV="1">
+            <a:off x="9322336" y="3781617"/>
+            <a:ext cx="0" cy="1457960"/>
+          </a:xfrm>
+          <a:prstGeom prst="line">
+            <a:avLst/>
+          </a:prstGeom>
+        </p:spPr>
+        <p:style>
+          <a:lnRef idx="1">
+            <a:schemeClr val="accent1"/>
+          </a:lnRef>
+          <a:fillRef idx="0">
+            <a:schemeClr val="accent1"/>
+          </a:fillRef>
+          <a:effectRef idx="0">
+            <a:schemeClr val="accent1"/>
+          </a:effectRef>
+          <a:fontRef idx="minor">
+            <a:schemeClr val="tx1"/>
+          </a:fontRef>
+        </p:style>
+      </p:cxnSp>
+      <p:cxnSp>
+        <p:nvCxnSpPr>
+          <p:cNvPr id="19" name="直線コネクタ 18">
+            <a:extLst>
+              <a:ext uri="{FF2B5EF4-FFF2-40B4-BE49-F238E27FC236}">
+                <a16:creationId xmlns:a16="http://schemas.microsoft.com/office/drawing/2014/main" id="{62C3DE64-8EA4-6B84-F615-1A3EBCB4E24A}"/>
+              </a:ext>
+            </a:extLst>
+          </p:cNvPr>
+          <p:cNvCxnSpPr/>
+          <p:nvPr/>
+        </p:nvCxnSpPr>
+        <p:spPr>
+          <a:xfrm flipV="1">
+            <a:off x="10236530" y="3781617"/>
+            <a:ext cx="0" cy="1457960"/>
+          </a:xfrm>
+          <a:prstGeom prst="line">
+            <a:avLst/>
+          </a:prstGeom>
+        </p:spPr>
+        <p:style>
+          <a:lnRef idx="1">
+            <a:schemeClr val="accent1"/>
+          </a:lnRef>
+          <a:fillRef idx="0">
+            <a:schemeClr val="accent1"/>
+          </a:fillRef>
+          <a:effectRef idx="0">
+            <a:schemeClr val="accent1"/>
+          </a:effectRef>
+          <a:fontRef idx="minor">
+            <a:schemeClr val="tx1"/>
+          </a:fontRef>
+        </p:style>
+      </p:cxnSp>
+      <p:cxnSp>
+        <p:nvCxnSpPr>
+          <p:cNvPr id="20" name="直線コネクタ 19">
+            <a:extLst>
+              <a:ext uri="{FF2B5EF4-FFF2-40B4-BE49-F238E27FC236}">
+                <a16:creationId xmlns:a16="http://schemas.microsoft.com/office/drawing/2014/main" id="{E8561267-B921-3AA0-A54E-0B49412E1F3F}"/>
+              </a:ext>
+            </a:extLst>
+          </p:cNvPr>
+          <p:cNvCxnSpPr/>
+          <p:nvPr/>
+        </p:nvCxnSpPr>
+        <p:spPr>
+          <a:xfrm flipV="1">
+            <a:off x="11170078" y="3781617"/>
+            <a:ext cx="0" cy="1457960"/>
+          </a:xfrm>
+          <a:prstGeom prst="line">
+            <a:avLst/>
+          </a:prstGeom>
+        </p:spPr>
+        <p:style>
+          <a:lnRef idx="1">
+            <a:schemeClr val="accent1"/>
+          </a:lnRef>
+          <a:fillRef idx="0">
+            <a:schemeClr val="accent1"/>
+          </a:fillRef>
+          <a:effectRef idx="0">
+            <a:schemeClr val="accent1"/>
+          </a:effectRef>
+          <a:fontRef idx="minor">
+            <a:schemeClr val="tx1"/>
+          </a:fontRef>
+        </p:style>
+      </p:cxnSp>
+      <p:cxnSp>
+        <p:nvCxnSpPr>
+          <p:cNvPr id="21" name="直線コネクタ 20">
+            <a:extLst>
+              <a:ext uri="{FF2B5EF4-FFF2-40B4-BE49-F238E27FC236}">
+                <a16:creationId xmlns:a16="http://schemas.microsoft.com/office/drawing/2014/main" id="{882FC2C4-F36A-4DB9-3419-67D6ABB43486}"/>
+              </a:ext>
+            </a:extLst>
+          </p:cNvPr>
+          <p:cNvCxnSpPr/>
+          <p:nvPr/>
+        </p:nvCxnSpPr>
+        <p:spPr>
+          <a:xfrm flipV="1">
+            <a:off x="11628908" y="3781617"/>
+            <a:ext cx="0" cy="1457960"/>
+          </a:xfrm>
+          <a:prstGeom prst="line">
+            <a:avLst/>
+          </a:prstGeom>
+        </p:spPr>
+        <p:style>
+          <a:lnRef idx="1">
+            <a:schemeClr val="accent1"/>
+          </a:lnRef>
+          <a:fillRef idx="0">
+            <a:schemeClr val="accent1"/>
+          </a:fillRef>
+          <a:effectRef idx="0">
+            <a:schemeClr val="accent1"/>
+          </a:effectRef>
+          <a:fontRef idx="minor">
+            <a:schemeClr val="tx1"/>
+          </a:fontRef>
+        </p:style>
+      </p:cxnSp>
+      <p:cxnSp>
+        <p:nvCxnSpPr>
+          <p:cNvPr id="23" name="直線矢印コネクタ 22">
+            <a:extLst>
+              <a:ext uri="{FF2B5EF4-FFF2-40B4-BE49-F238E27FC236}">
+                <a16:creationId xmlns:a16="http://schemas.microsoft.com/office/drawing/2014/main" id="{B70E9249-D5EC-DEB7-881C-11AE2F780FDC}"/>
+              </a:ext>
+            </a:extLst>
+          </p:cNvPr>
+          <p:cNvCxnSpPr>
+            <a:cxnSpLocks/>
+          </p:cNvCxnSpPr>
+          <p:nvPr/>
+        </p:nvCxnSpPr>
+        <p:spPr>
+          <a:xfrm>
+            <a:off x="8399726" y="4797617"/>
+            <a:ext cx="922610" cy="0"/>
+          </a:xfrm>
+          <a:prstGeom prst="straightConnector1">
+            <a:avLst/>
+          </a:prstGeom>
+          <a:ln>
+            <a:headEnd type="triangle"/>
+            <a:tailEnd type="triangle"/>
+          </a:ln>
+        </p:spPr>
+        <p:style>
+          <a:lnRef idx="1">
+            <a:schemeClr val="accent1"/>
+          </a:lnRef>
+          <a:fillRef idx="0">
+            <a:schemeClr val="accent1"/>
+          </a:fillRef>
+          <a:effectRef idx="0">
+            <a:schemeClr val="accent1"/>
+          </a:effectRef>
+          <a:fontRef idx="minor">
+            <a:schemeClr val="tx1"/>
+          </a:fontRef>
+        </p:style>
+      </p:cxnSp>
+      <p:cxnSp>
+        <p:nvCxnSpPr>
+          <p:cNvPr id="25" name="直線矢印コネクタ 24">
+            <a:extLst>
+              <a:ext uri="{FF2B5EF4-FFF2-40B4-BE49-F238E27FC236}">
+                <a16:creationId xmlns:a16="http://schemas.microsoft.com/office/drawing/2014/main" id="{F8E5BABC-0CF7-E0D8-0C7D-FC711DFA5CEB}"/>
+              </a:ext>
+            </a:extLst>
+          </p:cNvPr>
+          <p:cNvCxnSpPr>
+            <a:cxnSpLocks/>
+          </p:cNvCxnSpPr>
+          <p:nvPr/>
+        </p:nvCxnSpPr>
+        <p:spPr>
+          <a:xfrm>
+            <a:off x="9333274" y="4797617"/>
+            <a:ext cx="903256" cy="0"/>
+          </a:xfrm>
+          <a:prstGeom prst="straightConnector1">
+            <a:avLst/>
+          </a:prstGeom>
+          <a:ln>
+            <a:headEnd type="triangle"/>
+            <a:tailEnd type="triangle"/>
+          </a:ln>
+        </p:spPr>
+        <p:style>
+          <a:lnRef idx="1">
+            <a:schemeClr val="accent1"/>
+          </a:lnRef>
+          <a:fillRef idx="0">
+            <a:schemeClr val="accent1"/>
+          </a:fillRef>
+          <a:effectRef idx="0">
+            <a:schemeClr val="accent1"/>
+          </a:effectRef>
+          <a:fontRef idx="minor">
+            <a:schemeClr val="tx1"/>
+          </a:fontRef>
+        </p:style>
+      </p:cxnSp>
+      <p:cxnSp>
+        <p:nvCxnSpPr>
+          <p:cNvPr id="27" name="直線矢印コネクタ 26">
+            <a:extLst>
+              <a:ext uri="{FF2B5EF4-FFF2-40B4-BE49-F238E27FC236}">
+                <a16:creationId xmlns:a16="http://schemas.microsoft.com/office/drawing/2014/main" id="{C38E05A7-D75B-D99E-6124-5DC86E440CE6}"/>
+              </a:ext>
+            </a:extLst>
+          </p:cNvPr>
+          <p:cNvCxnSpPr>
+            <a:cxnSpLocks/>
+          </p:cNvCxnSpPr>
+          <p:nvPr/>
+        </p:nvCxnSpPr>
+        <p:spPr>
+          <a:xfrm>
+            <a:off x="10236530" y="4799310"/>
+            <a:ext cx="933548" cy="0"/>
+          </a:xfrm>
+          <a:prstGeom prst="straightConnector1">
+            <a:avLst/>
+          </a:prstGeom>
+          <a:ln>
+            <a:headEnd type="triangle"/>
+            <a:tailEnd type="triangle"/>
+          </a:ln>
+        </p:spPr>
+        <p:style>
+          <a:lnRef idx="1">
+            <a:schemeClr val="accent1"/>
+          </a:lnRef>
+          <a:fillRef idx="0">
+            <a:schemeClr val="accent1"/>
+          </a:fillRef>
+          <a:effectRef idx="0">
+            <a:schemeClr val="accent1"/>
+          </a:effectRef>
+          <a:fontRef idx="minor">
+            <a:schemeClr val="tx1"/>
+          </a:fontRef>
+        </p:style>
+      </p:cxnSp>
+      <p:cxnSp>
+        <p:nvCxnSpPr>
+          <p:cNvPr id="29" name="直線矢印コネクタ 28">
+            <a:extLst>
+              <a:ext uri="{FF2B5EF4-FFF2-40B4-BE49-F238E27FC236}">
+                <a16:creationId xmlns:a16="http://schemas.microsoft.com/office/drawing/2014/main" id="{31A4EBE0-A62A-B00F-710A-58293AC389CA}"/>
+              </a:ext>
+            </a:extLst>
+          </p:cNvPr>
+          <p:cNvCxnSpPr>
+            <a:cxnSpLocks/>
+          </p:cNvCxnSpPr>
+          <p:nvPr/>
+        </p:nvCxnSpPr>
+        <p:spPr>
+          <a:xfrm>
+            <a:off x="11170078" y="4797617"/>
+            <a:ext cx="458830" cy="0"/>
+          </a:xfrm>
+          <a:prstGeom prst="straightConnector1">
+            <a:avLst/>
+          </a:prstGeom>
+          <a:ln>
+            <a:headEnd type="triangle"/>
+            <a:tailEnd type="triangle"/>
+          </a:ln>
+        </p:spPr>
+        <p:style>
+          <a:lnRef idx="1">
+            <a:schemeClr val="accent1"/>
+          </a:lnRef>
+          <a:fillRef idx="0">
+            <a:schemeClr val="accent1"/>
+          </a:fillRef>
+          <a:effectRef idx="0">
+            <a:schemeClr val="accent1"/>
+          </a:effectRef>
+          <a:fontRef idx="minor">
+            <a:schemeClr val="tx1"/>
+          </a:fontRef>
+        </p:style>
+      </p:cxnSp>
+      <p:cxnSp>
+        <p:nvCxnSpPr>
+          <p:cNvPr id="31" name="直線矢印コネクタ 30">
+            <a:extLst>
+              <a:ext uri="{FF2B5EF4-FFF2-40B4-BE49-F238E27FC236}">
+                <a16:creationId xmlns:a16="http://schemas.microsoft.com/office/drawing/2014/main" id="{4996068C-22D9-6677-5709-BF4A5D1FB978}"/>
+              </a:ext>
+            </a:extLst>
+          </p:cNvPr>
+          <p:cNvCxnSpPr>
+            <a:cxnSpLocks/>
+          </p:cNvCxnSpPr>
+          <p:nvPr/>
+        </p:nvCxnSpPr>
+        <p:spPr>
+          <a:xfrm>
+            <a:off x="7940896" y="4797617"/>
+            <a:ext cx="458830" cy="0"/>
+          </a:xfrm>
+          <a:prstGeom prst="straightConnector1">
+            <a:avLst/>
+          </a:prstGeom>
+          <a:ln>
+            <a:headEnd type="triangle"/>
+            <a:tailEnd type="triangle"/>
+          </a:ln>
+        </p:spPr>
+        <p:style>
+          <a:lnRef idx="1">
+            <a:schemeClr val="accent1"/>
+          </a:lnRef>
+          <a:fillRef idx="0">
+            <a:schemeClr val="accent1"/>
+          </a:fillRef>
+          <a:effectRef idx="0">
+            <a:schemeClr val="accent1"/>
+          </a:effectRef>
+          <a:fontRef idx="minor">
+            <a:schemeClr val="tx1"/>
+          </a:fontRef>
+        </p:style>
+      </p:cxnSp>
+    </p:spTree>
+    <p:extLst>
+      <p:ext uri="{BB962C8B-B14F-4D97-AF65-F5344CB8AC3E}">
+        <p14:creationId xmlns:p14="http://schemas.microsoft.com/office/powerpoint/2010/main" val="3505145711"/>
+      </p:ext>
+    </p:extLst>
+  </p:cSld>
+  <p:clrMapOvr>
+    <a:masterClrMapping/>
+  </p:clrMapOvr>
+</p:sld>
+</file>
+
+<file path=ppt/slides/slide16.xml><?xml version="1.0" encoding="utf-8"?>
+<p:sld xmlns:a="http://schemas.openxmlformats.org/drawingml/2006/main" xmlns:r="http://schemas.openxmlformats.org/officeDocument/2006/relationships" xmlns:p="http://schemas.openxmlformats.org/presentationml/2006/main">
+  <p:cSld>
+    <p:spTree>
+      <p:nvGrpSpPr>
+        <p:cNvPr id="1" name=""/>
+        <p:cNvGrpSpPr/>
+        <p:nvPr/>
+      </p:nvGrpSpPr>
+      <p:grpSpPr>
+        <a:xfrm>
+          <a:off x="0" y="0"/>
+          <a:ext cx="0" cy="0"/>
+          <a:chOff x="0" y="0"/>
+          <a:chExt cx="0" cy="0"/>
+        </a:xfrm>
+      </p:grpSpPr>
+      <mc:AlternateContent xmlns:mc="http://schemas.openxmlformats.org/markup-compatibility/2006">
+        <mc:Choice xmlns:a14="http://schemas.microsoft.com/office/drawing/2010/main" Requires="a14">
+          <p:sp>
+            <p:nvSpPr>
+              <p:cNvPr id="3" name="コンテンツ プレースホルダー 2">
+                <a:extLst>
+                  <a:ext uri="{FF2B5EF4-FFF2-40B4-BE49-F238E27FC236}">
+                    <a16:creationId xmlns:a16="http://schemas.microsoft.com/office/drawing/2014/main" id="{BACD03EA-442E-B495-73A0-230EB26C917E}"/>
+                  </a:ext>
+                </a:extLst>
+              </p:cNvPr>
+              <p:cNvSpPr>
+                <a:spLocks noGrp="1"/>
+              </p:cNvSpPr>
+              <p:nvPr>
+                <p:ph idx="1"/>
+              </p:nvPr>
+            </p:nvSpPr>
+            <p:spPr>
+              <a:xfrm>
+                <a:off x="838200" y="753533"/>
+                <a:ext cx="10515600" cy="5423430"/>
+              </a:xfrm>
+            </p:spPr>
+            <p:txBody>
+              <a:bodyPr>
+                <a:normAutofit fontScale="77500" lnSpcReduction="20000"/>
+              </a:bodyPr>
+              <a:lstStyle/>
+              <a:p>
+                <a:pPr marL="0" indent="0">
+                  <a:buNone/>
+                </a:pPr>
+                <a14:m>
+                  <m:oMathPara xmlns:m="http://schemas.openxmlformats.org/officeDocument/2006/math">
+                    <m:oMathParaPr>
+                      <m:jc m:val="centerGroup"/>
+                    </m:oMathParaPr>
+                    <m:oMath xmlns:m="http://schemas.openxmlformats.org/officeDocument/2006/math">
+                      <m:r>
+                        <a:rPr lang="en-US" altLang="ja-JP" i="1" smtClean="0">
+                          <a:latin typeface="Cambria Math" panose="02040503050406030204" pitchFamily="18" charset="0"/>
+                        </a:rPr>
+                        <m:t>𝑓</m:t>
+                      </m:r>
+                      <m:d>
+                        <m:dPr>
+                          <m:ctrlPr>
+                            <a:rPr lang="en-US" altLang="ja-JP" i="1">
+                              <a:latin typeface="Cambria Math" panose="02040503050406030204" pitchFamily="18" charset="0"/>
+                            </a:rPr>
+                          </m:ctrlPr>
+                        </m:dPr>
+                        <m:e>
+                          <m:r>
+                            <a:rPr lang="en-US" altLang="ja-JP" i="1">
+                              <a:latin typeface="Cambria Math" panose="02040503050406030204" pitchFamily="18" charset="0"/>
+                            </a:rPr>
+                            <m:t>𝑡</m:t>
+                          </m:r>
+                        </m:e>
+                      </m:d>
+                      <m:r>
+                        <a:rPr lang="en-US" altLang="ja-JP" i="1">
+                          <a:latin typeface="Cambria Math" panose="02040503050406030204" pitchFamily="18" charset="0"/>
+                        </a:rPr>
+                        <m:t>=</m:t>
+                      </m:r>
+                      <m:d>
+                        <m:dPr>
+                          <m:ctrlPr>
+                            <a:rPr lang="en-US" altLang="ja-JP" i="1">
+                              <a:latin typeface="Cambria Math" panose="02040503050406030204" pitchFamily="18" charset="0"/>
+                            </a:rPr>
+                          </m:ctrlPr>
+                        </m:dPr>
+                        <m:e>
+                          <m:r>
+                            <a:rPr lang="en-US" altLang="ja-JP" i="1">
+                              <a:latin typeface="Cambria Math" panose="02040503050406030204" pitchFamily="18" charset="0"/>
+                            </a:rPr>
+                            <m:t>1−</m:t>
+                          </m:r>
+                          <m:r>
+                            <a:rPr lang="en-US" altLang="ja-JP" i="1">
+                              <a:latin typeface="Cambria Math" panose="02040503050406030204" pitchFamily="18" charset="0"/>
+                            </a:rPr>
+                            <m:t>𝑡</m:t>
+                          </m:r>
+                        </m:e>
+                      </m:d>
+                      <m:sSub>
+                        <m:sSubPr>
+                          <m:ctrlPr>
+                            <a:rPr lang="en-US" altLang="ja-JP" i="1">
+                              <a:latin typeface="Cambria Math" panose="02040503050406030204" pitchFamily="18" charset="0"/>
+                            </a:rPr>
+                          </m:ctrlPr>
+                        </m:sSubPr>
+                        <m:e>
+                          <m:r>
+                            <a:rPr lang="en-US" altLang="ja-JP" i="1">
+                              <a:latin typeface="Cambria Math" panose="02040503050406030204" pitchFamily="18" charset="0"/>
+                            </a:rPr>
+                            <m:t>𝑦</m:t>
+                          </m:r>
+                        </m:e>
+                        <m:sub>
+                          <m:r>
+                            <a:rPr lang="en-US" altLang="ja-JP" i="1">
+                              <a:latin typeface="Cambria Math" panose="02040503050406030204" pitchFamily="18" charset="0"/>
+                            </a:rPr>
+                            <m:t>𝑖</m:t>
+                          </m:r>
+                          <m:r>
+                            <a:rPr lang="en-US" altLang="ja-JP" i="1">
+                              <a:latin typeface="Cambria Math" panose="02040503050406030204" pitchFamily="18" charset="0"/>
+                            </a:rPr>
+                            <m:t>−1</m:t>
+                          </m:r>
+                        </m:sub>
+                      </m:sSub>
+                      <m:r>
+                        <a:rPr lang="en-US" altLang="ja-JP" i="1">
+                          <a:latin typeface="Cambria Math" panose="02040503050406030204" pitchFamily="18" charset="0"/>
+                        </a:rPr>
+                        <m:t>+</m:t>
+                      </m:r>
+                      <m:r>
+                        <a:rPr lang="en-US" altLang="ja-JP" i="1">
+                          <a:latin typeface="Cambria Math" panose="02040503050406030204" pitchFamily="18" charset="0"/>
+                        </a:rPr>
+                        <m:t>𝑡</m:t>
+                      </m:r>
+                      <m:sSub>
+                        <m:sSubPr>
+                          <m:ctrlPr>
+                            <a:rPr lang="en-US" altLang="ja-JP" i="1">
+                              <a:latin typeface="Cambria Math" panose="02040503050406030204" pitchFamily="18" charset="0"/>
+                            </a:rPr>
+                          </m:ctrlPr>
+                        </m:sSubPr>
+                        <m:e>
+                          <m:r>
+                            <a:rPr lang="en-US" altLang="ja-JP" i="1">
+                              <a:latin typeface="Cambria Math" panose="02040503050406030204" pitchFamily="18" charset="0"/>
+                            </a:rPr>
+                            <m:t>𝑦</m:t>
+                          </m:r>
+                        </m:e>
+                        <m:sub>
+                          <m:r>
+                            <a:rPr lang="en-US" altLang="ja-JP" i="1">
+                              <a:latin typeface="Cambria Math" panose="02040503050406030204" pitchFamily="18" charset="0"/>
+                            </a:rPr>
+                            <m:t>𝑖</m:t>
+                          </m:r>
+                        </m:sub>
+                      </m:sSub>
+                      <m:r>
+                        <a:rPr lang="en-US" altLang="ja-JP" i="1">
+                          <a:latin typeface="Cambria Math" panose="02040503050406030204" pitchFamily="18" charset="0"/>
+                        </a:rPr>
+                        <m:t>=</m:t>
+                      </m:r>
+                      <m:sSub>
+                        <m:sSubPr>
+                          <m:ctrlPr>
+                            <a:rPr lang="en-US" altLang="ja-JP" i="1">
+                              <a:latin typeface="Cambria Math" panose="02040503050406030204" pitchFamily="18" charset="0"/>
+                            </a:rPr>
+                          </m:ctrlPr>
+                        </m:sSubPr>
+                        <m:e>
+                          <m:r>
+                            <a:rPr lang="en-US" altLang="ja-JP" i="1">
+                              <a:latin typeface="Cambria Math" panose="02040503050406030204" pitchFamily="18" charset="0"/>
+                            </a:rPr>
+                            <m:t>𝑦</m:t>
+                          </m:r>
+                        </m:e>
+                        <m:sub>
+                          <m:r>
+                            <a:rPr lang="en-US" altLang="ja-JP" i="1">
+                              <a:latin typeface="Cambria Math" panose="02040503050406030204" pitchFamily="18" charset="0"/>
+                            </a:rPr>
+                            <m:t>𝑖</m:t>
+                          </m:r>
+                          <m:r>
+                            <a:rPr lang="en-US" altLang="ja-JP" i="1">
+                              <a:latin typeface="Cambria Math" panose="02040503050406030204" pitchFamily="18" charset="0"/>
+                            </a:rPr>
+                            <m:t>−1</m:t>
+                          </m:r>
+                        </m:sub>
+                      </m:sSub>
+                      <m:r>
+                        <a:rPr lang="en-US" altLang="ja-JP" i="1">
+                          <a:latin typeface="Cambria Math" panose="02040503050406030204" pitchFamily="18" charset="0"/>
+                        </a:rPr>
+                        <m:t>+</m:t>
+                      </m:r>
+                      <m:d>
+                        <m:dPr>
+                          <m:ctrlPr>
+                            <a:rPr lang="en-US" altLang="ja-JP" i="1">
+                              <a:latin typeface="Cambria Math" panose="02040503050406030204" pitchFamily="18" charset="0"/>
+                            </a:rPr>
+                          </m:ctrlPr>
+                        </m:dPr>
+                        <m:e>
+                          <m:sSub>
+                            <m:sSubPr>
+                              <m:ctrlPr>
+                                <a:rPr lang="en-US" altLang="ja-JP" i="1">
+                                  <a:latin typeface="Cambria Math" panose="02040503050406030204" pitchFamily="18" charset="0"/>
+                                </a:rPr>
+                              </m:ctrlPr>
+                            </m:sSubPr>
+                            <m:e>
+                              <m:r>
+                                <a:rPr lang="en-US" altLang="ja-JP" i="1">
+                                  <a:latin typeface="Cambria Math" panose="02040503050406030204" pitchFamily="18" charset="0"/>
+                                </a:rPr>
+                                <m:t>𝑦</m:t>
+                              </m:r>
+                            </m:e>
+                            <m:sub>
+                              <m:r>
+                                <a:rPr lang="en-US" altLang="ja-JP" i="1">
+                                  <a:latin typeface="Cambria Math" panose="02040503050406030204" pitchFamily="18" charset="0"/>
+                                </a:rPr>
+                                <m:t>𝑖</m:t>
+                              </m:r>
+                            </m:sub>
+                          </m:sSub>
+                          <m:r>
+                            <a:rPr lang="en-US" altLang="ja-JP" i="1">
+                              <a:latin typeface="Cambria Math" panose="02040503050406030204" pitchFamily="18" charset="0"/>
+                            </a:rPr>
+                            <m:t>−</m:t>
+                          </m:r>
+                          <m:sSub>
+                            <m:sSubPr>
+                              <m:ctrlPr>
+                                <a:rPr lang="en-US" altLang="ja-JP" i="1">
+                                  <a:latin typeface="Cambria Math" panose="02040503050406030204" pitchFamily="18" charset="0"/>
+                                </a:rPr>
+                              </m:ctrlPr>
+                            </m:sSubPr>
+                            <m:e>
+                              <m:r>
+                                <a:rPr lang="en-US" altLang="ja-JP" i="1">
+                                  <a:latin typeface="Cambria Math" panose="02040503050406030204" pitchFamily="18" charset="0"/>
+                                </a:rPr>
+                                <m:t>𝑦</m:t>
+                              </m:r>
+                            </m:e>
+                            <m:sub>
+                              <m:r>
+                                <a:rPr lang="en-US" altLang="ja-JP" i="1">
+                                  <a:latin typeface="Cambria Math" panose="02040503050406030204" pitchFamily="18" charset="0"/>
+                                </a:rPr>
+                                <m:t>𝑖</m:t>
+                              </m:r>
+                              <m:r>
+                                <a:rPr lang="en-US" altLang="ja-JP" i="1">
+                                  <a:latin typeface="Cambria Math" panose="02040503050406030204" pitchFamily="18" charset="0"/>
+                                </a:rPr>
+                                <m:t>−1</m:t>
+                              </m:r>
+                            </m:sub>
+                          </m:sSub>
+                        </m:e>
+                      </m:d>
+                      <m:r>
+                        <a:rPr lang="en-US" altLang="ja-JP" i="1">
+                          <a:latin typeface="Cambria Math" panose="02040503050406030204" pitchFamily="18" charset="0"/>
+                        </a:rPr>
+                        <m:t>𝑡</m:t>
+                      </m:r>
+                    </m:oMath>
+                    <m:oMath xmlns:m="http://schemas.openxmlformats.org/officeDocument/2006/math">
+                      <m:r>
+                        <a:rPr lang="en-US" altLang="ja-JP" i="1">
+                          <a:latin typeface="Cambria Math" panose="02040503050406030204" pitchFamily="18" charset="0"/>
+                        </a:rPr>
+                        <m:t> </m:t>
+                      </m:r>
+                    </m:oMath>
+                    <m:oMath xmlns:m="http://schemas.openxmlformats.org/officeDocument/2006/math">
+                      <m:r>
+                        <a:rPr lang="en-US" altLang="ja-JP" i="1">
+                          <a:latin typeface="Cambria Math" panose="02040503050406030204" pitchFamily="18" charset="0"/>
+                        </a:rPr>
+                        <m:t>𝑍</m:t>
+                      </m:r>
+                      <m:r>
+                        <a:rPr lang="en-US" altLang="ja-JP" i="1">
+                          <a:latin typeface="Cambria Math" panose="02040503050406030204" pitchFamily="18" charset="0"/>
+                        </a:rPr>
+                        <m:t>=</m:t>
+                      </m:r>
+                      <m:nary>
+                        <m:naryPr>
+                          <m:ctrlPr>
+                            <a:rPr lang="en-US" altLang="ja-JP" i="1">
+                              <a:latin typeface="Cambria Math" panose="02040503050406030204" pitchFamily="18" charset="0"/>
+                            </a:rPr>
+                          </m:ctrlPr>
+                        </m:naryPr>
+                        <m:sub>
+                          <m:r>
+                            <a:rPr lang="en-US" altLang="ja-JP" i="1">
+                              <a:latin typeface="Cambria Math" panose="02040503050406030204" pitchFamily="18" charset="0"/>
+                            </a:rPr>
+                            <m:t>0</m:t>
+                          </m:r>
+                        </m:sub>
+                        <m:sup>
+                          <m:r>
+                            <a:rPr lang="en-US" altLang="ja-JP" i="1">
+                              <a:latin typeface="Cambria Math" panose="02040503050406030204" pitchFamily="18" charset="0"/>
+                            </a:rPr>
+                            <m:t>1</m:t>
+                          </m:r>
+                        </m:sup>
+                        <m:e>
+                          <m:r>
+                            <a:rPr lang="en-US" altLang="ja-JP" i="1">
+                              <a:latin typeface="Cambria Math" panose="02040503050406030204" pitchFamily="18" charset="0"/>
+                            </a:rPr>
+                            <m:t>𝑓</m:t>
+                          </m:r>
+                          <m:d>
+                            <m:dPr>
+                              <m:ctrlPr>
+                                <a:rPr lang="en-US" altLang="ja-JP" i="1">
+                                  <a:latin typeface="Cambria Math" panose="02040503050406030204" pitchFamily="18" charset="0"/>
+                                </a:rPr>
+                              </m:ctrlPr>
+                            </m:dPr>
+                            <m:e>
+                              <m:r>
+                                <a:rPr lang="en-US" altLang="ja-JP" i="1">
+                                  <a:latin typeface="Cambria Math" panose="02040503050406030204" pitchFamily="18" charset="0"/>
+                                </a:rPr>
+                                <m:t>𝑡</m:t>
+                              </m:r>
+                            </m:e>
+                          </m:d>
+                          <m:r>
+                            <a:rPr lang="en-US" altLang="ja-JP" i="1">
+                              <a:latin typeface="Cambria Math" panose="02040503050406030204" pitchFamily="18" charset="0"/>
+                            </a:rPr>
+                            <m:t>𝑑𝑡</m:t>
+                          </m:r>
+                        </m:e>
+                      </m:nary>
+                      <m:r>
+                        <a:rPr lang="en-US" altLang="ja-JP" i="1">
+                          <a:latin typeface="Cambria Math" panose="02040503050406030204" pitchFamily="18" charset="0"/>
+                        </a:rPr>
+                        <m:t>=</m:t>
+                      </m:r>
+                      <m:sSubSup>
+                        <m:sSubSupPr>
+                          <m:ctrlPr>
+                            <a:rPr lang="en-US" altLang="ja-JP" i="1">
+                              <a:latin typeface="Cambria Math" panose="02040503050406030204" pitchFamily="18" charset="0"/>
+                            </a:rPr>
+                          </m:ctrlPr>
+                        </m:sSubSupPr>
+                        <m:e>
+                          <m:d>
+                            <m:dPr>
+                              <m:begChr m:val="["/>
+                              <m:endChr m:val="]"/>
+                              <m:ctrlPr>
+                                <a:rPr lang="en-US" altLang="ja-JP" i="1">
+                                  <a:latin typeface="Cambria Math" panose="02040503050406030204" pitchFamily="18" charset="0"/>
+                                </a:rPr>
+                              </m:ctrlPr>
+                            </m:dPr>
+                            <m:e>
+                              <m:sSub>
+                                <m:sSubPr>
+                                  <m:ctrlPr>
+                                    <a:rPr lang="en-US" altLang="ja-JP" i="1">
+                                      <a:latin typeface="Cambria Math" panose="02040503050406030204" pitchFamily="18" charset="0"/>
+                                    </a:rPr>
+                                  </m:ctrlPr>
+                                </m:sSubPr>
+                                <m:e>
+                                  <m:r>
+                                    <a:rPr lang="en-US" altLang="ja-JP" i="1">
+                                      <a:latin typeface="Cambria Math" panose="02040503050406030204" pitchFamily="18" charset="0"/>
+                                    </a:rPr>
+                                    <m:t>𝑦</m:t>
+                                  </m:r>
+                                </m:e>
+                                <m:sub>
+                                  <m:r>
+                                    <a:rPr lang="en-US" altLang="ja-JP" i="1">
+                                      <a:latin typeface="Cambria Math" panose="02040503050406030204" pitchFamily="18" charset="0"/>
+                                    </a:rPr>
+                                    <m:t>𝑖</m:t>
+                                  </m:r>
+                                  <m:r>
+                                    <a:rPr lang="en-US" altLang="ja-JP" i="1">
+                                      <a:latin typeface="Cambria Math" panose="02040503050406030204" pitchFamily="18" charset="0"/>
+                                    </a:rPr>
+                                    <m:t>−1</m:t>
+                                  </m:r>
+                                </m:sub>
+                              </m:sSub>
+                              <m:r>
+                                <a:rPr lang="en-US" altLang="ja-JP" i="1">
+                                  <a:latin typeface="Cambria Math" panose="02040503050406030204" pitchFamily="18" charset="0"/>
+                                </a:rPr>
+                                <m:t>𝑡</m:t>
+                              </m:r>
+                              <m:r>
+                                <a:rPr lang="en-US" altLang="ja-JP" i="1">
+                                  <a:latin typeface="Cambria Math" panose="02040503050406030204" pitchFamily="18" charset="0"/>
+                                </a:rPr>
+                                <m:t>+</m:t>
+                              </m:r>
+                              <m:f>
+                                <m:fPr>
+                                  <m:ctrlPr>
+                                    <a:rPr lang="en-US" altLang="ja-JP" i="1">
+                                      <a:latin typeface="Cambria Math" panose="02040503050406030204" pitchFamily="18" charset="0"/>
+                                    </a:rPr>
+                                  </m:ctrlPr>
+                                </m:fPr>
+                                <m:num>
+                                  <m:sSub>
+                                    <m:sSubPr>
+                                      <m:ctrlPr>
+                                        <a:rPr lang="en-US" altLang="ja-JP" i="1">
+                                          <a:latin typeface="Cambria Math" panose="02040503050406030204" pitchFamily="18" charset="0"/>
+                                        </a:rPr>
+                                      </m:ctrlPr>
+                                    </m:sSubPr>
+                                    <m:e>
+                                      <m:r>
+                                        <a:rPr lang="en-US" altLang="ja-JP" i="1">
+                                          <a:latin typeface="Cambria Math" panose="02040503050406030204" pitchFamily="18" charset="0"/>
+                                        </a:rPr>
+                                        <m:t>𝑦</m:t>
+                                      </m:r>
+                                    </m:e>
+                                    <m:sub>
+                                      <m:r>
+                                        <a:rPr lang="en-US" altLang="ja-JP" i="1">
+                                          <a:latin typeface="Cambria Math" panose="02040503050406030204" pitchFamily="18" charset="0"/>
+                                        </a:rPr>
+                                        <m:t>𝑖</m:t>
+                                      </m:r>
+                                    </m:sub>
+                                  </m:sSub>
+                                  <m:r>
+                                    <a:rPr lang="en-US" altLang="ja-JP" i="1">
+                                      <a:latin typeface="Cambria Math" panose="02040503050406030204" pitchFamily="18" charset="0"/>
+                                    </a:rPr>
+                                    <m:t>−</m:t>
+                                  </m:r>
+                                  <m:sSub>
+                                    <m:sSubPr>
+                                      <m:ctrlPr>
+                                        <a:rPr lang="en-US" altLang="ja-JP" i="1">
+                                          <a:latin typeface="Cambria Math" panose="02040503050406030204" pitchFamily="18" charset="0"/>
+                                        </a:rPr>
+                                      </m:ctrlPr>
+                                    </m:sSubPr>
+                                    <m:e>
+                                      <m:r>
+                                        <a:rPr lang="en-US" altLang="ja-JP" i="1">
+                                          <a:latin typeface="Cambria Math" panose="02040503050406030204" pitchFamily="18" charset="0"/>
+                                        </a:rPr>
+                                        <m:t>𝑦</m:t>
+                                      </m:r>
+                                    </m:e>
+                                    <m:sub>
+                                      <m:r>
+                                        <a:rPr lang="en-US" altLang="ja-JP" i="1">
+                                          <a:latin typeface="Cambria Math" panose="02040503050406030204" pitchFamily="18" charset="0"/>
+                                        </a:rPr>
+                                        <m:t>𝑖</m:t>
+                                      </m:r>
+                                      <m:r>
+                                        <a:rPr lang="en-US" altLang="ja-JP" i="1">
+                                          <a:latin typeface="Cambria Math" panose="02040503050406030204" pitchFamily="18" charset="0"/>
+                                        </a:rPr>
+                                        <m:t>−1</m:t>
+                                      </m:r>
+                                    </m:sub>
+                                  </m:sSub>
+                                </m:num>
+                                <m:den>
+                                  <m:r>
+                                    <a:rPr lang="en-US" altLang="ja-JP" i="1">
+                                      <a:latin typeface="Cambria Math" panose="02040503050406030204" pitchFamily="18" charset="0"/>
+                                    </a:rPr>
+                                    <m:t>2</m:t>
+                                  </m:r>
+                                </m:den>
+                              </m:f>
+                              <m:sSup>
+                                <m:sSupPr>
+                                  <m:ctrlPr>
+                                    <a:rPr lang="en-US" altLang="ja-JP" i="1">
+                                      <a:latin typeface="Cambria Math" panose="02040503050406030204" pitchFamily="18" charset="0"/>
+                                    </a:rPr>
+                                  </m:ctrlPr>
+                                </m:sSupPr>
+                                <m:e>
+                                  <m:r>
+                                    <a:rPr lang="en-US" altLang="ja-JP" i="1">
+                                      <a:latin typeface="Cambria Math" panose="02040503050406030204" pitchFamily="18" charset="0"/>
+                                    </a:rPr>
+                                    <m:t>𝑡</m:t>
+                                  </m:r>
+                                </m:e>
+                                <m:sup>
+                                  <m:r>
+                                    <a:rPr lang="en-US" altLang="ja-JP" i="1">
+                                      <a:latin typeface="Cambria Math" panose="02040503050406030204" pitchFamily="18" charset="0"/>
+                                    </a:rPr>
+                                    <m:t>2</m:t>
+                                  </m:r>
+                                </m:sup>
+                              </m:sSup>
+                            </m:e>
+                          </m:d>
+                        </m:e>
+                        <m:sub>
+                          <m:r>
+                            <a:rPr lang="en-US" altLang="ja-JP" i="1">
+                              <a:latin typeface="Cambria Math" panose="02040503050406030204" pitchFamily="18" charset="0"/>
+                            </a:rPr>
+                            <m:t>0</m:t>
+                          </m:r>
+                        </m:sub>
+                        <m:sup>
+                          <m:r>
+                            <a:rPr lang="en-US" altLang="ja-JP" i="1">
+                              <a:latin typeface="Cambria Math" panose="02040503050406030204" pitchFamily="18" charset="0"/>
+                            </a:rPr>
+                            <m:t>1</m:t>
+                          </m:r>
+                        </m:sup>
+                      </m:sSubSup>
+                      <m:r>
+                        <a:rPr lang="en-US" altLang="ja-JP" i="1">
+                          <a:latin typeface="Cambria Math" panose="02040503050406030204" pitchFamily="18" charset="0"/>
+                        </a:rPr>
+                        <m:t>=</m:t>
+                      </m:r>
+                      <m:f>
+                        <m:fPr>
+                          <m:ctrlPr>
+                            <a:rPr lang="en-US" altLang="ja-JP" i="1">
+                              <a:latin typeface="Cambria Math" panose="02040503050406030204" pitchFamily="18" charset="0"/>
+                            </a:rPr>
+                          </m:ctrlPr>
+                        </m:fPr>
+                        <m:num>
+                          <m:sSub>
+                            <m:sSubPr>
+                              <m:ctrlPr>
+                                <a:rPr lang="en-US" altLang="ja-JP" i="1">
+                                  <a:latin typeface="Cambria Math" panose="02040503050406030204" pitchFamily="18" charset="0"/>
+                                </a:rPr>
+                              </m:ctrlPr>
+                            </m:sSubPr>
+                            <m:e>
+                              <m:r>
+                                <a:rPr lang="en-US" altLang="ja-JP" i="1">
+                                  <a:latin typeface="Cambria Math" panose="02040503050406030204" pitchFamily="18" charset="0"/>
+                                </a:rPr>
+                                <m:t>𝑦</m:t>
+                              </m:r>
+                            </m:e>
+                            <m:sub>
+                              <m:r>
+                                <a:rPr lang="en-US" altLang="ja-JP" i="1">
+                                  <a:latin typeface="Cambria Math" panose="02040503050406030204" pitchFamily="18" charset="0"/>
+                                </a:rPr>
+                                <m:t>𝑖</m:t>
+                              </m:r>
+                            </m:sub>
+                          </m:sSub>
+                          <m:r>
+                            <a:rPr lang="en-US" altLang="ja-JP" i="1">
+                              <a:latin typeface="Cambria Math" panose="02040503050406030204" pitchFamily="18" charset="0"/>
+                            </a:rPr>
+                            <m:t>+</m:t>
+                          </m:r>
+                          <m:sSub>
+                            <m:sSubPr>
+                              <m:ctrlPr>
+                                <a:rPr lang="en-US" altLang="ja-JP" i="1">
+                                  <a:latin typeface="Cambria Math" panose="02040503050406030204" pitchFamily="18" charset="0"/>
+                                </a:rPr>
+                              </m:ctrlPr>
+                            </m:sSubPr>
+                            <m:e>
+                              <m:r>
+                                <a:rPr lang="en-US" altLang="ja-JP" i="1">
+                                  <a:latin typeface="Cambria Math" panose="02040503050406030204" pitchFamily="18" charset="0"/>
+                                </a:rPr>
+                                <m:t>𝑦</m:t>
+                              </m:r>
+                            </m:e>
+                            <m:sub>
+                              <m:r>
+                                <a:rPr lang="en-US" altLang="ja-JP" i="1">
+                                  <a:latin typeface="Cambria Math" panose="02040503050406030204" pitchFamily="18" charset="0"/>
+                                </a:rPr>
+                                <m:t>𝑖</m:t>
+                              </m:r>
+                              <m:r>
+                                <a:rPr lang="en-US" altLang="ja-JP" i="1">
+                                  <a:latin typeface="Cambria Math" panose="02040503050406030204" pitchFamily="18" charset="0"/>
+                                </a:rPr>
+                                <m:t>−1</m:t>
+                              </m:r>
+                            </m:sub>
+                          </m:sSub>
+                        </m:num>
+                        <m:den>
+                          <m:r>
+                            <a:rPr lang="en-US" altLang="ja-JP" i="1">
+                              <a:latin typeface="Cambria Math" panose="02040503050406030204" pitchFamily="18" charset="0"/>
+                            </a:rPr>
+                            <m:t>2</m:t>
+                          </m:r>
+                        </m:den>
+                      </m:f>
+                    </m:oMath>
+                    <m:oMath xmlns:m="http://schemas.openxmlformats.org/officeDocument/2006/math">
+                      <m:r>
+                        <a:rPr lang="en-US" altLang="ja-JP" i="1">
+                          <a:latin typeface="Cambria Math" panose="02040503050406030204" pitchFamily="18" charset="0"/>
+                        </a:rPr>
+                        <m:t> </m:t>
+                      </m:r>
+                    </m:oMath>
+                    <m:oMath xmlns:m="http://schemas.openxmlformats.org/officeDocument/2006/math">
+                      <m:f>
+                        <m:fPr>
+                          <m:ctrlPr>
+                            <a:rPr lang="en-US" altLang="ja-JP" i="1">
+                              <a:latin typeface="Cambria Math" panose="02040503050406030204" pitchFamily="18" charset="0"/>
+                            </a:rPr>
+                          </m:ctrlPr>
+                        </m:fPr>
+                        <m:num>
+                          <m:r>
+                            <a:rPr lang="en-US" altLang="ja-JP" i="1">
+                              <a:latin typeface="Cambria Math" panose="02040503050406030204" pitchFamily="18" charset="0"/>
+                            </a:rPr>
+                            <m:t>1</m:t>
+                          </m:r>
+                        </m:num>
+                        <m:den>
+                          <m:r>
+                            <a:rPr lang="en-US" altLang="ja-JP" i="1">
+                              <a:latin typeface="Cambria Math" panose="02040503050406030204" pitchFamily="18" charset="0"/>
+                            </a:rPr>
+                            <m:t>𝑍</m:t>
+                          </m:r>
+                        </m:den>
+                      </m:f>
+                      <m:nary>
+                        <m:naryPr>
+                          <m:ctrlPr>
+                            <a:rPr lang="en-US" altLang="ja-JP" i="1">
+                              <a:latin typeface="Cambria Math" panose="02040503050406030204" pitchFamily="18" charset="0"/>
+                            </a:rPr>
+                          </m:ctrlPr>
+                        </m:naryPr>
+                        <m:sub>
+                          <m:r>
+                            <a:rPr lang="en-US" altLang="ja-JP" i="1">
+                              <a:latin typeface="Cambria Math" panose="02040503050406030204" pitchFamily="18" charset="0"/>
+                            </a:rPr>
+                            <m:t>0</m:t>
+                          </m:r>
+                        </m:sub>
+                        <m:sup>
+                          <m:sSup>
+                            <m:sSupPr>
+                              <m:ctrlPr>
+                                <a:rPr lang="en-US" altLang="ja-JP" i="1">
+                                  <a:latin typeface="Cambria Math" panose="02040503050406030204" pitchFamily="18" charset="0"/>
+                                </a:rPr>
+                              </m:ctrlPr>
+                            </m:sSupPr>
+                            <m:e>
+                              <m:r>
+                                <a:rPr lang="en-US" altLang="ja-JP" i="1">
+                                  <a:latin typeface="Cambria Math" panose="02040503050406030204" pitchFamily="18" charset="0"/>
+                                </a:rPr>
+                                <m:t>𝑡</m:t>
+                              </m:r>
+                            </m:e>
+                            <m:sup>
+                              <m:r>
+                                <a:rPr lang="en-US" altLang="ja-JP" i="1">
+                                  <a:latin typeface="Cambria Math" panose="02040503050406030204" pitchFamily="18" charset="0"/>
+                                </a:rPr>
+                                <m:t>′</m:t>
+                              </m:r>
+                            </m:sup>
+                          </m:sSup>
+                        </m:sup>
+                        <m:e>
+                          <m:r>
+                            <a:rPr lang="en-US" altLang="ja-JP" i="1">
+                              <a:latin typeface="Cambria Math" panose="02040503050406030204" pitchFamily="18" charset="0"/>
+                            </a:rPr>
+                            <m:t>𝑓</m:t>
+                          </m:r>
+                          <m:d>
+                            <m:dPr>
+                              <m:ctrlPr>
+                                <a:rPr lang="en-US" altLang="ja-JP" i="1">
+                                  <a:latin typeface="Cambria Math" panose="02040503050406030204" pitchFamily="18" charset="0"/>
+                                </a:rPr>
+                              </m:ctrlPr>
+                            </m:dPr>
+                            <m:e>
+                              <m:r>
+                                <a:rPr lang="en-US" altLang="ja-JP" i="1">
+                                  <a:latin typeface="Cambria Math" panose="02040503050406030204" pitchFamily="18" charset="0"/>
+                                </a:rPr>
+                                <m:t>𝑡</m:t>
+                              </m:r>
+                            </m:e>
+                          </m:d>
+                          <m:r>
+                            <a:rPr lang="en-US" altLang="ja-JP" i="1">
+                              <a:latin typeface="Cambria Math" panose="02040503050406030204" pitchFamily="18" charset="0"/>
+                            </a:rPr>
+                            <m:t>𝑑𝑡</m:t>
+                          </m:r>
+                        </m:e>
+                      </m:nary>
+                      <m:r>
+                        <a:rPr lang="en-US" altLang="ja-JP" i="1">
+                          <a:latin typeface="Cambria Math" panose="02040503050406030204" pitchFamily="18" charset="0"/>
+                        </a:rPr>
+                        <m:t>=</m:t>
+                      </m:r>
+                      <m:f>
+                        <m:fPr>
+                          <m:ctrlPr>
+                            <a:rPr lang="en-US" altLang="ja-JP" i="1">
+                              <a:latin typeface="Cambria Math" panose="02040503050406030204" pitchFamily="18" charset="0"/>
+                            </a:rPr>
+                          </m:ctrlPr>
+                        </m:fPr>
+                        <m:num>
+                          <m:r>
+                            <a:rPr lang="en-US" altLang="ja-JP" i="1">
+                              <a:latin typeface="Cambria Math" panose="02040503050406030204" pitchFamily="18" charset="0"/>
+                            </a:rPr>
+                            <m:t>1</m:t>
+                          </m:r>
+                        </m:num>
+                        <m:den>
+                          <m:r>
+                            <a:rPr lang="en-US" altLang="ja-JP" i="1">
+                              <a:latin typeface="Cambria Math" panose="02040503050406030204" pitchFamily="18" charset="0"/>
+                            </a:rPr>
+                            <m:t>𝑍</m:t>
+                          </m:r>
+                        </m:den>
+                      </m:f>
+                      <m:d>
+                        <m:dPr>
+                          <m:ctrlPr>
+                            <a:rPr lang="en-US" altLang="ja-JP" i="1">
+                              <a:latin typeface="Cambria Math" panose="02040503050406030204" pitchFamily="18" charset="0"/>
+                            </a:rPr>
+                          </m:ctrlPr>
+                        </m:dPr>
+                        <m:e>
+                          <m:sSub>
+                            <m:sSubPr>
+                              <m:ctrlPr>
+                                <a:rPr lang="en-US" altLang="ja-JP" i="1">
+                                  <a:latin typeface="Cambria Math" panose="02040503050406030204" pitchFamily="18" charset="0"/>
+                                </a:rPr>
+                              </m:ctrlPr>
+                            </m:sSubPr>
+                            <m:e>
+                              <m:r>
+                                <a:rPr lang="en-US" altLang="ja-JP" i="1">
+                                  <a:latin typeface="Cambria Math" panose="02040503050406030204" pitchFamily="18" charset="0"/>
+                                </a:rPr>
+                                <m:t>𝑦</m:t>
+                              </m:r>
+                            </m:e>
+                            <m:sub>
+                              <m:r>
+                                <a:rPr lang="en-US" altLang="ja-JP" i="1">
+                                  <a:latin typeface="Cambria Math" panose="02040503050406030204" pitchFamily="18" charset="0"/>
+                                </a:rPr>
+                                <m:t>𝑖</m:t>
+                              </m:r>
+                              <m:r>
+                                <a:rPr lang="en-US" altLang="ja-JP" i="1">
+                                  <a:latin typeface="Cambria Math" panose="02040503050406030204" pitchFamily="18" charset="0"/>
+                                </a:rPr>
+                                <m:t>−1</m:t>
+                              </m:r>
+                            </m:sub>
+                          </m:sSub>
+                          <m:sSup>
+                            <m:sSupPr>
+                              <m:ctrlPr>
+                                <a:rPr lang="en-US" altLang="ja-JP" i="1">
+                                  <a:latin typeface="Cambria Math" panose="02040503050406030204" pitchFamily="18" charset="0"/>
+                                </a:rPr>
+                              </m:ctrlPr>
+                            </m:sSupPr>
+                            <m:e>
+                              <m:r>
+                                <a:rPr lang="en-US" altLang="ja-JP" i="1">
+                                  <a:latin typeface="Cambria Math" panose="02040503050406030204" pitchFamily="18" charset="0"/>
+                                </a:rPr>
+                                <m:t>𝑡</m:t>
+                              </m:r>
+                            </m:e>
+                            <m:sup>
+                              <m:r>
+                                <a:rPr lang="en-US" altLang="ja-JP" i="1">
+                                  <a:latin typeface="Cambria Math" panose="02040503050406030204" pitchFamily="18" charset="0"/>
+                                </a:rPr>
+                                <m:t>′</m:t>
+                              </m:r>
+                            </m:sup>
+                          </m:sSup>
+                          <m:r>
+                            <a:rPr lang="en-US" altLang="ja-JP" i="1">
+                              <a:latin typeface="Cambria Math" panose="02040503050406030204" pitchFamily="18" charset="0"/>
+                            </a:rPr>
+                            <m:t>+</m:t>
+                          </m:r>
+                          <m:f>
+                            <m:fPr>
+                              <m:ctrlPr>
+                                <a:rPr lang="en-US" altLang="ja-JP" i="1">
+                                  <a:latin typeface="Cambria Math" panose="02040503050406030204" pitchFamily="18" charset="0"/>
+                                </a:rPr>
+                              </m:ctrlPr>
+                            </m:fPr>
+                            <m:num>
+                              <m:sSub>
+                                <m:sSubPr>
+                                  <m:ctrlPr>
+                                    <a:rPr lang="en-US" altLang="ja-JP" i="1">
+                                      <a:latin typeface="Cambria Math" panose="02040503050406030204" pitchFamily="18" charset="0"/>
+                                    </a:rPr>
+                                  </m:ctrlPr>
+                                </m:sSubPr>
+                                <m:e>
+                                  <m:r>
+                                    <a:rPr lang="en-US" altLang="ja-JP" i="1">
+                                      <a:latin typeface="Cambria Math" panose="02040503050406030204" pitchFamily="18" charset="0"/>
+                                    </a:rPr>
+                                    <m:t>𝑦</m:t>
+                                  </m:r>
+                                </m:e>
+                                <m:sub>
+                                  <m:r>
+                                    <a:rPr lang="en-US" altLang="ja-JP" i="1">
+                                      <a:latin typeface="Cambria Math" panose="02040503050406030204" pitchFamily="18" charset="0"/>
+                                    </a:rPr>
+                                    <m:t>𝑖</m:t>
+                                  </m:r>
+                                </m:sub>
+                              </m:sSub>
+                              <m:r>
+                                <a:rPr lang="en-US" altLang="ja-JP" i="1">
+                                  <a:latin typeface="Cambria Math" panose="02040503050406030204" pitchFamily="18" charset="0"/>
+                                </a:rPr>
+                                <m:t>−</m:t>
+                              </m:r>
+                              <m:sSub>
+                                <m:sSubPr>
+                                  <m:ctrlPr>
+                                    <a:rPr lang="en-US" altLang="ja-JP" i="1">
+                                      <a:latin typeface="Cambria Math" panose="02040503050406030204" pitchFamily="18" charset="0"/>
+                                    </a:rPr>
+                                  </m:ctrlPr>
+                                </m:sSubPr>
+                                <m:e>
+                                  <m:r>
+                                    <a:rPr lang="en-US" altLang="ja-JP" i="1">
+                                      <a:latin typeface="Cambria Math" panose="02040503050406030204" pitchFamily="18" charset="0"/>
+                                    </a:rPr>
+                                    <m:t>𝑦</m:t>
+                                  </m:r>
+                                </m:e>
+                                <m:sub>
+                                  <m:r>
+                                    <a:rPr lang="en-US" altLang="ja-JP" i="1">
+                                      <a:latin typeface="Cambria Math" panose="02040503050406030204" pitchFamily="18" charset="0"/>
+                                    </a:rPr>
+                                    <m:t>𝑖</m:t>
+                                  </m:r>
+                                  <m:r>
+                                    <a:rPr lang="en-US" altLang="ja-JP" i="1">
+                                      <a:latin typeface="Cambria Math" panose="02040503050406030204" pitchFamily="18" charset="0"/>
+                                    </a:rPr>
+                                    <m:t>−1</m:t>
+                                  </m:r>
+                                </m:sub>
+                              </m:sSub>
+                            </m:num>
+                            <m:den>
+                              <m:r>
+                                <a:rPr lang="en-US" altLang="ja-JP" i="1">
+                                  <a:latin typeface="Cambria Math" panose="02040503050406030204" pitchFamily="18" charset="0"/>
+                                </a:rPr>
+                                <m:t>2</m:t>
+                              </m:r>
+                            </m:den>
+                          </m:f>
+                          <m:sSup>
+                            <m:sSupPr>
+                              <m:ctrlPr>
+                                <a:rPr lang="en-US" altLang="ja-JP" i="1">
+                                  <a:latin typeface="Cambria Math" panose="02040503050406030204" pitchFamily="18" charset="0"/>
+                                </a:rPr>
+                              </m:ctrlPr>
+                            </m:sSupPr>
+                            <m:e>
+                              <m:r>
+                                <a:rPr lang="en-US" altLang="ja-JP" i="1">
+                                  <a:latin typeface="Cambria Math" panose="02040503050406030204" pitchFamily="18" charset="0"/>
+                                </a:rPr>
+                                <m:t>𝑡</m:t>
+                              </m:r>
+                            </m:e>
+                            <m:sup>
+                              <m:r>
+                                <a:rPr lang="en-US" altLang="ja-JP" i="1">
+                                  <a:latin typeface="Cambria Math" panose="02040503050406030204" pitchFamily="18" charset="0"/>
+                                </a:rPr>
+                                <m:t>′2</m:t>
+                              </m:r>
+                            </m:sup>
+                          </m:sSup>
+                        </m:e>
+                      </m:d>
+                      <m:r>
+                        <a:rPr lang="en-US" altLang="ja-JP" i="1">
+                          <a:latin typeface="Cambria Math" panose="02040503050406030204" pitchFamily="18" charset="0"/>
+                        </a:rPr>
+                        <m:t>=</m:t>
+                      </m:r>
+                      <m:r>
+                        <a:rPr lang="en-US" altLang="ja-JP" i="1">
+                          <a:latin typeface="Cambria Math" panose="02040503050406030204" pitchFamily="18" charset="0"/>
+                        </a:rPr>
+                        <m:t>𝑢</m:t>
+                      </m:r>
+                    </m:oMath>
+                    <m:oMath xmlns:m="http://schemas.openxmlformats.org/officeDocument/2006/math">
+                      <m:r>
+                        <a:rPr lang="en-US" altLang="ja-JP" i="1">
+                          <a:latin typeface="Cambria Math" panose="02040503050406030204" pitchFamily="18" charset="0"/>
+                        </a:rPr>
+                        <m:t> </m:t>
+                      </m:r>
+                    </m:oMath>
+                    <m:oMath xmlns:m="http://schemas.openxmlformats.org/officeDocument/2006/math">
+                      <m:f>
+                        <m:fPr>
+                          <m:ctrlPr>
+                            <a:rPr lang="en-US" altLang="ja-JP" i="1">
+                              <a:latin typeface="Cambria Math" panose="02040503050406030204" pitchFamily="18" charset="0"/>
+                            </a:rPr>
+                          </m:ctrlPr>
+                        </m:fPr>
+                        <m:num>
+                          <m:sSub>
+                            <m:sSubPr>
+                              <m:ctrlPr>
+                                <a:rPr lang="en-US" altLang="ja-JP" i="1">
+                                  <a:latin typeface="Cambria Math" panose="02040503050406030204" pitchFamily="18" charset="0"/>
+                                </a:rPr>
+                              </m:ctrlPr>
+                            </m:sSubPr>
+                            <m:e>
+                              <m:r>
+                                <a:rPr lang="en-US" altLang="ja-JP" i="1">
+                                  <a:latin typeface="Cambria Math" panose="02040503050406030204" pitchFamily="18" charset="0"/>
+                                </a:rPr>
+                                <m:t>𝑦</m:t>
+                              </m:r>
+                            </m:e>
+                            <m:sub>
+                              <m:r>
+                                <a:rPr lang="en-US" altLang="ja-JP" i="1">
+                                  <a:latin typeface="Cambria Math" panose="02040503050406030204" pitchFamily="18" charset="0"/>
+                                </a:rPr>
+                                <m:t>𝑖</m:t>
+                              </m:r>
+                            </m:sub>
+                          </m:sSub>
+                          <m:r>
+                            <a:rPr lang="en-US" altLang="ja-JP" i="1">
+                              <a:latin typeface="Cambria Math" panose="02040503050406030204" pitchFamily="18" charset="0"/>
+                            </a:rPr>
+                            <m:t>−</m:t>
+                          </m:r>
+                          <m:sSub>
+                            <m:sSubPr>
+                              <m:ctrlPr>
+                                <a:rPr lang="en-US" altLang="ja-JP" i="1">
+                                  <a:latin typeface="Cambria Math" panose="02040503050406030204" pitchFamily="18" charset="0"/>
+                                </a:rPr>
+                              </m:ctrlPr>
+                            </m:sSubPr>
+                            <m:e>
+                              <m:r>
+                                <a:rPr lang="en-US" altLang="ja-JP" i="1">
+                                  <a:latin typeface="Cambria Math" panose="02040503050406030204" pitchFamily="18" charset="0"/>
+                                </a:rPr>
+                                <m:t>𝑦</m:t>
+                              </m:r>
+                            </m:e>
+                            <m:sub>
+                              <m:r>
+                                <a:rPr lang="en-US" altLang="ja-JP" i="1">
+                                  <a:latin typeface="Cambria Math" panose="02040503050406030204" pitchFamily="18" charset="0"/>
+                                </a:rPr>
+                                <m:t>𝑖</m:t>
+                              </m:r>
+                              <m:r>
+                                <a:rPr lang="en-US" altLang="ja-JP" i="1">
+                                  <a:latin typeface="Cambria Math" panose="02040503050406030204" pitchFamily="18" charset="0"/>
+                                </a:rPr>
+                                <m:t>−1</m:t>
+                              </m:r>
+                            </m:sub>
+                          </m:sSub>
+                        </m:num>
+                        <m:den>
+                          <m:r>
+                            <a:rPr lang="en-US" altLang="ja-JP" i="1">
+                              <a:latin typeface="Cambria Math" panose="02040503050406030204" pitchFamily="18" charset="0"/>
+                            </a:rPr>
+                            <m:t>2</m:t>
+                          </m:r>
+                        </m:den>
+                      </m:f>
+                      <m:sSup>
+                        <m:sSupPr>
+                          <m:ctrlPr>
+                            <a:rPr lang="en-US" altLang="ja-JP" i="1">
+                              <a:latin typeface="Cambria Math" panose="02040503050406030204" pitchFamily="18" charset="0"/>
+                            </a:rPr>
+                          </m:ctrlPr>
+                        </m:sSupPr>
+                        <m:e>
+                          <m:r>
+                            <a:rPr lang="en-US" altLang="ja-JP" i="1">
+                              <a:latin typeface="Cambria Math" panose="02040503050406030204" pitchFamily="18" charset="0"/>
+                            </a:rPr>
+                            <m:t>𝑡</m:t>
+                          </m:r>
+                        </m:e>
+                        <m:sup>
+                          <m:r>
+                            <a:rPr lang="en-US" altLang="ja-JP" i="1">
+                              <a:latin typeface="Cambria Math" panose="02040503050406030204" pitchFamily="18" charset="0"/>
+                            </a:rPr>
+                            <m:t>′2</m:t>
+                          </m:r>
+                        </m:sup>
+                      </m:sSup>
+                      <m:r>
+                        <a:rPr lang="en-US" altLang="ja-JP" i="1">
+                          <a:latin typeface="Cambria Math" panose="02040503050406030204" pitchFamily="18" charset="0"/>
+                        </a:rPr>
+                        <m:t>+</m:t>
+                      </m:r>
+                      <m:sSub>
+                        <m:sSubPr>
+                          <m:ctrlPr>
+                            <a:rPr lang="en-US" altLang="ja-JP" i="1">
+                              <a:latin typeface="Cambria Math" panose="02040503050406030204" pitchFamily="18" charset="0"/>
+                            </a:rPr>
+                          </m:ctrlPr>
+                        </m:sSubPr>
+                        <m:e>
+                          <m:r>
+                            <a:rPr lang="en-US" altLang="ja-JP" i="1">
+                              <a:latin typeface="Cambria Math" panose="02040503050406030204" pitchFamily="18" charset="0"/>
+                            </a:rPr>
+                            <m:t>𝑦</m:t>
+                          </m:r>
+                        </m:e>
+                        <m:sub>
+                          <m:r>
+                            <a:rPr lang="en-US" altLang="ja-JP" i="1">
+                              <a:latin typeface="Cambria Math" panose="02040503050406030204" pitchFamily="18" charset="0"/>
+                            </a:rPr>
+                            <m:t>𝑖</m:t>
+                          </m:r>
+                          <m:r>
+                            <a:rPr lang="en-US" altLang="ja-JP" i="1">
+                              <a:latin typeface="Cambria Math" panose="02040503050406030204" pitchFamily="18" charset="0"/>
+                            </a:rPr>
+                            <m:t>−1</m:t>
+                          </m:r>
+                        </m:sub>
+                      </m:sSub>
+                      <m:sSup>
+                        <m:sSupPr>
+                          <m:ctrlPr>
+                            <a:rPr lang="en-US" altLang="ja-JP" i="1">
+                              <a:latin typeface="Cambria Math" panose="02040503050406030204" pitchFamily="18" charset="0"/>
+                            </a:rPr>
+                          </m:ctrlPr>
+                        </m:sSupPr>
+                        <m:e>
+                          <m:r>
+                            <a:rPr lang="en-US" altLang="ja-JP" i="1">
+                              <a:latin typeface="Cambria Math" panose="02040503050406030204" pitchFamily="18" charset="0"/>
+                            </a:rPr>
+                            <m:t>𝑡</m:t>
+                          </m:r>
+                        </m:e>
+                        <m:sup>
+                          <m:r>
+                            <a:rPr lang="en-US" altLang="ja-JP" i="1">
+                              <a:latin typeface="Cambria Math" panose="02040503050406030204" pitchFamily="18" charset="0"/>
+                            </a:rPr>
+                            <m:t>′</m:t>
+                          </m:r>
+                        </m:sup>
+                      </m:sSup>
+                      <m:r>
+                        <a:rPr lang="en-US" altLang="ja-JP" i="1">
+                          <a:latin typeface="Cambria Math" panose="02040503050406030204" pitchFamily="18" charset="0"/>
+                        </a:rPr>
+                        <m:t>−</m:t>
+                      </m:r>
+                      <m:r>
+                        <a:rPr lang="en-US" altLang="ja-JP" i="1">
+                          <a:latin typeface="Cambria Math" panose="02040503050406030204" pitchFamily="18" charset="0"/>
+                        </a:rPr>
+                        <m:t>𝑢𝑍</m:t>
+                      </m:r>
+                      <m:r>
+                        <a:rPr lang="en-US" altLang="ja-JP" i="1">
+                          <a:latin typeface="Cambria Math" panose="02040503050406030204" pitchFamily="18" charset="0"/>
+                        </a:rPr>
+                        <m:t>=0</m:t>
+                      </m:r>
+                    </m:oMath>
+                    <m:oMath xmlns:m="http://schemas.openxmlformats.org/officeDocument/2006/math">
+                      <m:r>
+                        <a:rPr lang="en-US" altLang="ja-JP" i="1">
+                          <a:latin typeface="Cambria Math" panose="02040503050406030204" pitchFamily="18" charset="0"/>
+                        </a:rPr>
+                        <m:t> </m:t>
+                      </m:r>
+                    </m:oMath>
+                    <m:oMath xmlns:m="http://schemas.openxmlformats.org/officeDocument/2006/math">
+                      <m:r>
+                        <a:rPr lang="en-US" altLang="ja-JP" i="1">
+                          <a:latin typeface="Cambria Math" panose="02040503050406030204" pitchFamily="18" charset="0"/>
+                        </a:rPr>
+                        <m:t>𝑡</m:t>
+                      </m:r>
+                      <m:r>
+                        <a:rPr lang="en-US" altLang="ja-JP" i="1">
+                          <a:latin typeface="Cambria Math" panose="02040503050406030204" pitchFamily="18" charset="0"/>
+                        </a:rPr>
+                        <m:t>=</m:t>
+                      </m:r>
+                      <m:f>
+                        <m:fPr>
+                          <m:ctrlPr>
+                            <a:rPr lang="en-US" altLang="ja-JP" i="1">
+                              <a:latin typeface="Cambria Math" panose="02040503050406030204" pitchFamily="18" charset="0"/>
+                            </a:rPr>
+                          </m:ctrlPr>
+                        </m:fPr>
+                        <m:num>
+                          <m:r>
+                            <a:rPr lang="en-US" altLang="ja-JP" i="1">
+                              <a:latin typeface="Cambria Math" panose="02040503050406030204" pitchFamily="18" charset="0"/>
+                            </a:rPr>
+                            <m:t>−</m:t>
+                          </m:r>
+                          <m:sSub>
+                            <m:sSubPr>
+                              <m:ctrlPr>
+                                <a:rPr lang="en-US" altLang="ja-JP" i="1">
+                                  <a:latin typeface="Cambria Math" panose="02040503050406030204" pitchFamily="18" charset="0"/>
+                                </a:rPr>
+                              </m:ctrlPr>
+                            </m:sSubPr>
+                            <m:e>
+                              <m:r>
+                                <a:rPr lang="en-US" altLang="ja-JP" i="1">
+                                  <a:latin typeface="Cambria Math" panose="02040503050406030204" pitchFamily="18" charset="0"/>
+                                </a:rPr>
+                                <m:t>𝑦</m:t>
+                              </m:r>
+                            </m:e>
+                            <m:sub>
+                              <m:r>
+                                <a:rPr lang="en-US" altLang="ja-JP" i="1">
+                                  <a:latin typeface="Cambria Math" panose="02040503050406030204" pitchFamily="18" charset="0"/>
+                                </a:rPr>
+                                <m:t>𝑖</m:t>
+                              </m:r>
+                              <m:r>
+                                <a:rPr lang="en-US" altLang="ja-JP" i="1">
+                                  <a:latin typeface="Cambria Math" panose="02040503050406030204" pitchFamily="18" charset="0"/>
+                                </a:rPr>
+                                <m:t>−1</m:t>
+                              </m:r>
+                            </m:sub>
+                          </m:sSub>
+                          <m:r>
+                            <a:rPr lang="en-US" altLang="ja-JP" i="1">
+                              <a:latin typeface="Cambria Math" panose="02040503050406030204" pitchFamily="18" charset="0"/>
+                            </a:rPr>
+                            <m:t>+</m:t>
+                          </m:r>
+                          <m:rad>
+                            <m:radPr>
+                              <m:degHide m:val="on"/>
+                              <m:ctrlPr>
+                                <a:rPr lang="en-US" altLang="ja-JP" i="1">
+                                  <a:latin typeface="Cambria Math" panose="02040503050406030204" pitchFamily="18" charset="0"/>
+                                </a:rPr>
+                              </m:ctrlPr>
+                            </m:radPr>
+                            <m:deg/>
+                            <m:e>
+                              <m:sSubSup>
+                                <m:sSubSupPr>
+                                  <m:ctrlPr>
+                                    <a:rPr lang="en-US" altLang="ja-JP" i="1">
+                                      <a:latin typeface="Cambria Math" panose="02040503050406030204" pitchFamily="18" charset="0"/>
+                                    </a:rPr>
+                                  </m:ctrlPr>
+                                </m:sSubSupPr>
+                                <m:e>
+                                  <m:r>
+                                    <a:rPr lang="en-US" altLang="ja-JP" i="1">
+                                      <a:latin typeface="Cambria Math" panose="02040503050406030204" pitchFamily="18" charset="0"/>
+                                    </a:rPr>
+                                    <m:t>𝑦</m:t>
+                                  </m:r>
+                                </m:e>
+                                <m:sub>
+                                  <m:r>
+                                    <a:rPr lang="en-US" altLang="ja-JP" i="1">
+                                      <a:latin typeface="Cambria Math" panose="02040503050406030204" pitchFamily="18" charset="0"/>
+                                    </a:rPr>
+                                    <m:t>𝑖</m:t>
+                                  </m:r>
+                                  <m:r>
+                                    <a:rPr lang="en-US" altLang="ja-JP" i="1">
+                                      <a:latin typeface="Cambria Math" panose="02040503050406030204" pitchFamily="18" charset="0"/>
+                                    </a:rPr>
+                                    <m:t>−1</m:t>
+                                  </m:r>
+                                </m:sub>
+                                <m:sup>
+                                  <m:r>
+                                    <a:rPr lang="en-US" altLang="ja-JP" i="1">
+                                      <a:latin typeface="Cambria Math" panose="02040503050406030204" pitchFamily="18" charset="0"/>
+                                    </a:rPr>
+                                    <m:t>2</m:t>
+                                  </m:r>
+                                </m:sup>
+                              </m:sSubSup>
+                              <m:r>
+                                <a:rPr lang="en-US" altLang="ja-JP" i="1">
+                                  <a:latin typeface="Cambria Math" panose="02040503050406030204" pitchFamily="18" charset="0"/>
+                                </a:rPr>
+                                <m:t>−</m:t>
+                              </m:r>
+                              <m:d>
+                                <m:dPr>
+                                  <m:ctrlPr>
+                                    <a:rPr lang="en-US" altLang="ja-JP" i="1">
+                                      <a:latin typeface="Cambria Math" panose="02040503050406030204" pitchFamily="18" charset="0"/>
+                                    </a:rPr>
+                                  </m:ctrlPr>
+                                </m:dPr>
+                                <m:e>
+                                  <m:sSub>
+                                    <m:sSubPr>
+                                      <m:ctrlPr>
+                                        <a:rPr lang="en-US" altLang="ja-JP" i="1">
+                                          <a:latin typeface="Cambria Math" panose="02040503050406030204" pitchFamily="18" charset="0"/>
+                                        </a:rPr>
+                                      </m:ctrlPr>
+                                    </m:sSubPr>
+                                    <m:e>
+                                      <m:r>
+                                        <a:rPr lang="en-US" altLang="ja-JP" i="1">
+                                          <a:latin typeface="Cambria Math" panose="02040503050406030204" pitchFamily="18" charset="0"/>
+                                        </a:rPr>
+                                        <m:t>𝑦</m:t>
+                                      </m:r>
+                                    </m:e>
+                                    <m:sub>
+                                      <m:r>
+                                        <a:rPr lang="en-US" altLang="ja-JP" i="1">
+                                          <a:latin typeface="Cambria Math" panose="02040503050406030204" pitchFamily="18" charset="0"/>
+                                        </a:rPr>
+                                        <m:t>𝑖</m:t>
+                                      </m:r>
+                                    </m:sub>
+                                  </m:sSub>
+                                  <m:r>
+                                    <a:rPr lang="en-US" altLang="ja-JP" i="1">
+                                      <a:latin typeface="Cambria Math" panose="02040503050406030204" pitchFamily="18" charset="0"/>
+                                    </a:rPr>
+                                    <m:t>−</m:t>
+                                  </m:r>
+                                  <m:sSub>
+                                    <m:sSubPr>
+                                      <m:ctrlPr>
+                                        <a:rPr lang="en-US" altLang="ja-JP" i="1">
+                                          <a:latin typeface="Cambria Math" panose="02040503050406030204" pitchFamily="18" charset="0"/>
+                                        </a:rPr>
+                                      </m:ctrlPr>
+                                    </m:sSubPr>
+                                    <m:e>
+                                      <m:r>
+                                        <a:rPr lang="en-US" altLang="ja-JP" i="1">
+                                          <a:latin typeface="Cambria Math" panose="02040503050406030204" pitchFamily="18" charset="0"/>
+                                        </a:rPr>
+                                        <m:t>𝑦</m:t>
+                                      </m:r>
+                                    </m:e>
+                                    <m:sub>
+                                      <m:r>
+                                        <a:rPr lang="en-US" altLang="ja-JP" i="1">
+                                          <a:latin typeface="Cambria Math" panose="02040503050406030204" pitchFamily="18" charset="0"/>
+                                        </a:rPr>
+                                        <m:t>𝑖</m:t>
+                                      </m:r>
+                                      <m:r>
+                                        <a:rPr lang="en-US" altLang="ja-JP" i="1">
+                                          <a:latin typeface="Cambria Math" panose="02040503050406030204" pitchFamily="18" charset="0"/>
+                                        </a:rPr>
+                                        <m:t>−1</m:t>
+                                      </m:r>
+                                    </m:sub>
+                                  </m:sSub>
+                                </m:e>
+                              </m:d>
+                              <m:r>
+                                <a:rPr lang="en-US" altLang="ja-JP" i="1">
+                                  <a:latin typeface="Cambria Math" panose="02040503050406030204" pitchFamily="18" charset="0"/>
+                                </a:rPr>
+                                <m:t>𝑢𝑍</m:t>
+                              </m:r>
+                            </m:e>
+                          </m:rad>
+                        </m:num>
+                        <m:den>
+                          <m:sSub>
+                            <m:sSubPr>
+                              <m:ctrlPr>
+                                <a:rPr lang="en-US" altLang="ja-JP" i="1">
+                                  <a:latin typeface="Cambria Math" panose="02040503050406030204" pitchFamily="18" charset="0"/>
+                                </a:rPr>
+                              </m:ctrlPr>
+                            </m:sSubPr>
+                            <m:e>
+                              <m:r>
+                                <a:rPr lang="en-US" altLang="ja-JP" i="1">
+                                  <a:latin typeface="Cambria Math" panose="02040503050406030204" pitchFamily="18" charset="0"/>
+                                </a:rPr>
+                                <m:t>𝑦</m:t>
+                              </m:r>
+                            </m:e>
+                            <m:sub>
+                              <m:r>
+                                <a:rPr lang="en-US" altLang="ja-JP" i="1">
+                                  <a:latin typeface="Cambria Math" panose="02040503050406030204" pitchFamily="18" charset="0"/>
+                                </a:rPr>
+                                <m:t>𝑖</m:t>
+                              </m:r>
+                            </m:sub>
+                          </m:sSub>
+                          <m:r>
+                            <a:rPr lang="en-US" altLang="ja-JP" i="1">
+                              <a:latin typeface="Cambria Math" panose="02040503050406030204" pitchFamily="18" charset="0"/>
+                            </a:rPr>
+                            <m:t>−</m:t>
+                          </m:r>
+                          <m:sSub>
+                            <m:sSubPr>
+                              <m:ctrlPr>
+                                <a:rPr lang="en-US" altLang="ja-JP" i="1">
+                                  <a:latin typeface="Cambria Math" panose="02040503050406030204" pitchFamily="18" charset="0"/>
+                                </a:rPr>
+                              </m:ctrlPr>
+                            </m:sSubPr>
+                            <m:e>
+                              <m:r>
+                                <a:rPr lang="en-US" altLang="ja-JP" i="1">
+                                  <a:latin typeface="Cambria Math" panose="02040503050406030204" pitchFamily="18" charset="0"/>
+                                </a:rPr>
+                                <m:t>𝑦</m:t>
+                              </m:r>
+                            </m:e>
+                            <m:sub>
+                              <m:r>
+                                <a:rPr lang="en-US" altLang="ja-JP" i="1">
+                                  <a:latin typeface="Cambria Math" panose="02040503050406030204" pitchFamily="18" charset="0"/>
+                                </a:rPr>
+                                <m:t>𝑖</m:t>
+                              </m:r>
+                              <m:r>
+                                <a:rPr lang="en-US" altLang="ja-JP" i="1">
+                                  <a:latin typeface="Cambria Math" panose="02040503050406030204" pitchFamily="18" charset="0"/>
+                                </a:rPr>
+                                <m:t>−1</m:t>
+                              </m:r>
+                            </m:sub>
+                          </m:sSub>
+                        </m:den>
+                      </m:f>
+                      <m:r>
+                        <a:rPr lang="en-US" altLang="ja-JP" i="1">
+                          <a:latin typeface="Cambria Math" panose="02040503050406030204" pitchFamily="18" charset="0"/>
+                        </a:rPr>
+                        <m:t>=</m:t>
+                      </m:r>
+                      <m:f>
+                        <m:fPr>
+                          <m:ctrlPr>
+                            <a:rPr lang="en-US" altLang="ja-JP" i="1">
+                              <a:latin typeface="Cambria Math" panose="02040503050406030204" pitchFamily="18" charset="0"/>
+                            </a:rPr>
+                          </m:ctrlPr>
+                        </m:fPr>
+                        <m:num>
+                          <m:r>
+                            <a:rPr lang="en-US" altLang="ja-JP" i="1">
+                              <a:latin typeface="Cambria Math" panose="02040503050406030204" pitchFamily="18" charset="0"/>
+                            </a:rPr>
+                            <m:t>−</m:t>
+                          </m:r>
+                          <m:sSub>
+                            <m:sSubPr>
+                              <m:ctrlPr>
+                                <a:rPr lang="en-US" altLang="ja-JP" i="1">
+                                  <a:latin typeface="Cambria Math" panose="02040503050406030204" pitchFamily="18" charset="0"/>
+                                </a:rPr>
+                              </m:ctrlPr>
+                            </m:sSubPr>
+                            <m:e>
+                              <m:r>
+                                <a:rPr lang="en-US" altLang="ja-JP" i="1">
+                                  <a:latin typeface="Cambria Math" panose="02040503050406030204" pitchFamily="18" charset="0"/>
+                                </a:rPr>
+                                <m:t>𝑦</m:t>
+                              </m:r>
+                            </m:e>
+                            <m:sub>
+                              <m:r>
+                                <a:rPr lang="en-US" altLang="ja-JP" i="1">
+                                  <a:latin typeface="Cambria Math" panose="02040503050406030204" pitchFamily="18" charset="0"/>
+                                </a:rPr>
+                                <m:t>𝑖</m:t>
+                              </m:r>
+                              <m:r>
+                                <a:rPr lang="en-US" altLang="ja-JP" i="1">
+                                  <a:latin typeface="Cambria Math" panose="02040503050406030204" pitchFamily="18" charset="0"/>
+                                </a:rPr>
+                                <m:t>−1</m:t>
+                              </m:r>
+                            </m:sub>
+                          </m:sSub>
+                          <m:r>
+                            <a:rPr lang="en-US" altLang="ja-JP" i="1">
+                              <a:latin typeface="Cambria Math" panose="02040503050406030204" pitchFamily="18" charset="0"/>
+                            </a:rPr>
+                            <m:t>+</m:t>
+                          </m:r>
+                          <m:rad>
+                            <m:radPr>
+                              <m:degHide m:val="on"/>
+                              <m:ctrlPr>
+                                <a:rPr lang="en-US" altLang="ja-JP" i="1">
+                                  <a:latin typeface="Cambria Math" panose="02040503050406030204" pitchFamily="18" charset="0"/>
+                                </a:rPr>
+                              </m:ctrlPr>
+                            </m:radPr>
+                            <m:deg/>
+                            <m:e>
+                              <m:sSubSup>
+                                <m:sSubSupPr>
+                                  <m:ctrlPr>
+                                    <a:rPr lang="en-US" altLang="ja-JP" i="1">
+                                      <a:latin typeface="Cambria Math" panose="02040503050406030204" pitchFamily="18" charset="0"/>
+                                    </a:rPr>
+                                  </m:ctrlPr>
+                                </m:sSubSupPr>
+                                <m:e>
+                                  <m:r>
+                                    <a:rPr lang="en-US" altLang="ja-JP" i="1">
+                                      <a:latin typeface="Cambria Math" panose="02040503050406030204" pitchFamily="18" charset="0"/>
+                                    </a:rPr>
+                                    <m:t>𝑦</m:t>
+                                  </m:r>
+                                </m:e>
+                                <m:sub>
+                                  <m:r>
+                                    <a:rPr lang="en-US" altLang="ja-JP" i="1">
+                                      <a:latin typeface="Cambria Math" panose="02040503050406030204" pitchFamily="18" charset="0"/>
+                                    </a:rPr>
+                                    <m:t>𝑖</m:t>
+                                  </m:r>
+                                  <m:r>
+                                    <a:rPr lang="en-US" altLang="ja-JP" i="1">
+                                      <a:latin typeface="Cambria Math" panose="02040503050406030204" pitchFamily="18" charset="0"/>
+                                    </a:rPr>
+                                    <m:t>−1</m:t>
+                                  </m:r>
+                                </m:sub>
+                                <m:sup>
+                                  <m:r>
+                                    <a:rPr lang="en-US" altLang="ja-JP" i="1">
+                                      <a:latin typeface="Cambria Math" panose="02040503050406030204" pitchFamily="18" charset="0"/>
+                                    </a:rPr>
+                                    <m:t>2</m:t>
+                                  </m:r>
+                                </m:sup>
+                              </m:sSubSup>
+                              <m:r>
+                                <a:rPr lang="en-US" altLang="ja-JP" i="1">
+                                  <a:latin typeface="Cambria Math" panose="02040503050406030204" pitchFamily="18" charset="0"/>
+                                </a:rPr>
+                                <m:t>−</m:t>
+                              </m:r>
+                              <m:f>
+                                <m:fPr>
+                                  <m:ctrlPr>
+                                    <a:rPr lang="en-US" altLang="ja-JP" b="0" i="1" smtClean="0">
+                                      <a:latin typeface="Cambria Math" panose="02040503050406030204" pitchFamily="18" charset="0"/>
+                                    </a:rPr>
+                                  </m:ctrlPr>
+                                </m:fPr>
+                                <m:num>
+                                  <m:d>
+                                    <m:dPr>
+                                      <m:ctrlPr>
+                                        <a:rPr lang="en-US" altLang="ja-JP" i="1">
+                                          <a:latin typeface="Cambria Math" panose="02040503050406030204" pitchFamily="18" charset="0"/>
+                                        </a:rPr>
+                                      </m:ctrlPr>
+                                    </m:dPr>
+                                    <m:e>
+                                      <m:sSubSup>
+                                        <m:sSubSupPr>
+                                          <m:ctrlPr>
+                                            <a:rPr lang="en-US" altLang="ja-JP" b="0" i="1" smtClean="0">
+                                              <a:latin typeface="Cambria Math" panose="02040503050406030204" pitchFamily="18" charset="0"/>
+                                            </a:rPr>
+                                          </m:ctrlPr>
+                                        </m:sSubSupPr>
+                                        <m:e>
+                                          <m:r>
+                                            <a:rPr lang="en-US" altLang="ja-JP" i="1">
+                                              <a:latin typeface="Cambria Math" panose="02040503050406030204" pitchFamily="18" charset="0"/>
+                                            </a:rPr>
+                                            <m:t>𝑦</m:t>
+                                          </m:r>
+                                        </m:e>
+                                        <m:sub>
+                                          <m:r>
+                                            <a:rPr lang="en-US" altLang="ja-JP" i="1">
+                                              <a:latin typeface="Cambria Math" panose="02040503050406030204" pitchFamily="18" charset="0"/>
+                                            </a:rPr>
+                                            <m:t>𝑖</m:t>
+                                          </m:r>
+                                        </m:sub>
+                                        <m:sup>
+                                          <m:r>
+                                            <a:rPr lang="en-US" altLang="ja-JP" b="0" i="1" smtClean="0">
+                                              <a:latin typeface="Cambria Math" panose="02040503050406030204" pitchFamily="18" charset="0"/>
+                                            </a:rPr>
+                                            <m:t>2</m:t>
+                                          </m:r>
+                                        </m:sup>
+                                      </m:sSubSup>
+                                      <m:r>
+                                        <a:rPr lang="en-US" altLang="ja-JP" i="1">
+                                          <a:latin typeface="Cambria Math" panose="02040503050406030204" pitchFamily="18" charset="0"/>
+                                        </a:rPr>
+                                        <m:t>−</m:t>
+                                      </m:r>
+                                      <m:sSubSup>
+                                        <m:sSubSupPr>
+                                          <m:ctrlPr>
+                                            <a:rPr lang="en-US" altLang="ja-JP" b="0" i="1" smtClean="0">
+                                              <a:latin typeface="Cambria Math" panose="02040503050406030204" pitchFamily="18" charset="0"/>
+                                            </a:rPr>
+                                          </m:ctrlPr>
+                                        </m:sSubSupPr>
+                                        <m:e>
+                                          <m:r>
+                                            <a:rPr lang="en-US" altLang="ja-JP" i="1">
+                                              <a:latin typeface="Cambria Math" panose="02040503050406030204" pitchFamily="18" charset="0"/>
+                                            </a:rPr>
+                                            <m:t>𝑦</m:t>
+                                          </m:r>
+                                        </m:e>
+                                        <m:sub>
+                                          <m:r>
+                                            <a:rPr lang="en-US" altLang="ja-JP" i="1">
+                                              <a:latin typeface="Cambria Math" panose="02040503050406030204" pitchFamily="18" charset="0"/>
+                                            </a:rPr>
+                                            <m:t>𝑖</m:t>
+                                          </m:r>
+                                          <m:r>
+                                            <a:rPr lang="en-US" altLang="ja-JP" i="1">
+                                              <a:latin typeface="Cambria Math" panose="02040503050406030204" pitchFamily="18" charset="0"/>
+                                            </a:rPr>
+                                            <m:t>−1</m:t>
+                                          </m:r>
+                                        </m:sub>
+                                        <m:sup>
+                                          <m:r>
+                                            <a:rPr lang="en-US" altLang="ja-JP" b="0" i="1" smtClean="0">
+                                              <a:latin typeface="Cambria Math" panose="02040503050406030204" pitchFamily="18" charset="0"/>
+                                            </a:rPr>
+                                            <m:t>2</m:t>
+                                          </m:r>
+                                        </m:sup>
+                                      </m:sSubSup>
+                                    </m:e>
+                                  </m:d>
+                                </m:num>
+                                <m:den>
+                                  <m:r>
+                                    <a:rPr lang="en-US" altLang="ja-JP" b="0" i="1" smtClean="0">
+                                      <a:latin typeface="Cambria Math" panose="02040503050406030204" pitchFamily="18" charset="0"/>
+                                    </a:rPr>
+                                    <m:t>2</m:t>
+                                  </m:r>
+                                </m:den>
+                              </m:f>
+                              <m:r>
+                                <a:rPr lang="en-US" altLang="ja-JP" i="1">
+                                  <a:latin typeface="Cambria Math" panose="02040503050406030204" pitchFamily="18" charset="0"/>
+                                </a:rPr>
+                                <m:t>𝑢</m:t>
+                              </m:r>
+                            </m:e>
+                          </m:rad>
+                        </m:num>
+                        <m:den>
+                          <m:sSub>
+                            <m:sSubPr>
+                              <m:ctrlPr>
+                                <a:rPr lang="en-US" altLang="ja-JP" i="1">
+                                  <a:latin typeface="Cambria Math" panose="02040503050406030204" pitchFamily="18" charset="0"/>
+                                </a:rPr>
+                              </m:ctrlPr>
+                            </m:sSubPr>
+                            <m:e>
+                              <m:r>
+                                <a:rPr lang="en-US" altLang="ja-JP" i="1">
+                                  <a:latin typeface="Cambria Math" panose="02040503050406030204" pitchFamily="18" charset="0"/>
+                                </a:rPr>
+                                <m:t>𝑦</m:t>
+                              </m:r>
+                            </m:e>
+                            <m:sub>
+                              <m:r>
+                                <a:rPr lang="en-US" altLang="ja-JP" i="1">
+                                  <a:latin typeface="Cambria Math" panose="02040503050406030204" pitchFamily="18" charset="0"/>
+                                </a:rPr>
+                                <m:t>𝑖</m:t>
+                              </m:r>
+                            </m:sub>
+                          </m:sSub>
+                          <m:r>
+                            <a:rPr lang="en-US" altLang="ja-JP" i="1">
+                              <a:latin typeface="Cambria Math" panose="02040503050406030204" pitchFamily="18" charset="0"/>
+                            </a:rPr>
+                            <m:t>−</m:t>
+                          </m:r>
+                          <m:sSub>
+                            <m:sSubPr>
+                              <m:ctrlPr>
+                                <a:rPr lang="en-US" altLang="ja-JP" i="1">
+                                  <a:latin typeface="Cambria Math" panose="02040503050406030204" pitchFamily="18" charset="0"/>
+                                </a:rPr>
+                              </m:ctrlPr>
+                            </m:sSubPr>
+                            <m:e>
+                              <m:r>
+                                <a:rPr lang="en-US" altLang="ja-JP" i="1">
+                                  <a:latin typeface="Cambria Math" panose="02040503050406030204" pitchFamily="18" charset="0"/>
+                                </a:rPr>
+                                <m:t>𝑦</m:t>
+                              </m:r>
+                            </m:e>
+                            <m:sub>
+                              <m:r>
+                                <a:rPr lang="en-US" altLang="ja-JP" i="1">
+                                  <a:latin typeface="Cambria Math" panose="02040503050406030204" pitchFamily="18" charset="0"/>
+                                </a:rPr>
+                                <m:t>𝑖</m:t>
+                              </m:r>
+                              <m:r>
+                                <a:rPr lang="en-US" altLang="ja-JP" i="1">
+                                  <a:latin typeface="Cambria Math" panose="02040503050406030204" pitchFamily="18" charset="0"/>
+                                </a:rPr>
+                                <m:t>−1</m:t>
+                              </m:r>
+                            </m:sub>
+                          </m:sSub>
+                        </m:den>
+                      </m:f>
+                    </m:oMath>
+                    <m:oMath xmlns:m="http://schemas.openxmlformats.org/officeDocument/2006/math">
+                      <m:r>
+                        <a:rPr lang="en-US" altLang="ja-JP" b="0" i="1" smtClean="0">
+                          <a:latin typeface="Cambria Math" panose="02040503050406030204" pitchFamily="18" charset="0"/>
+                        </a:rPr>
+                        <m:t> </m:t>
+                      </m:r>
+                    </m:oMath>
+                    <m:oMath xmlns:m="http://schemas.openxmlformats.org/officeDocument/2006/math">
+                      <m:sSub>
+                        <m:sSubPr>
+                          <m:ctrlPr>
+                            <a:rPr lang="en-US" altLang="ja-JP" b="0" i="1" smtClean="0">
+                              <a:latin typeface="Cambria Math" panose="02040503050406030204" pitchFamily="18" charset="0"/>
+                            </a:rPr>
+                          </m:ctrlPr>
+                        </m:sSubPr>
+                        <m:e>
+                          <m:r>
+                            <a:rPr lang="en-US" altLang="ja-JP" b="0" i="1" smtClean="0">
+                              <a:latin typeface="Cambria Math" panose="02040503050406030204" pitchFamily="18" charset="0"/>
+                            </a:rPr>
+                            <m:t>𝑦</m:t>
+                          </m:r>
+                        </m:e>
+                        <m:sub>
+                          <m:r>
+                            <a:rPr lang="en-US" altLang="ja-JP" b="0" i="1" smtClean="0">
+                              <a:latin typeface="Cambria Math" panose="02040503050406030204" pitchFamily="18" charset="0"/>
+                            </a:rPr>
+                            <m:t>𝑖</m:t>
+                          </m:r>
+                        </m:sub>
+                      </m:sSub>
+                      <m:r>
+                        <a:rPr lang="en-US" altLang="ja-JP" b="0" i="1" smtClean="0">
+                          <a:latin typeface="Cambria Math" panose="02040503050406030204" pitchFamily="18" charset="0"/>
+                        </a:rPr>
+                        <m:t>=</m:t>
+                      </m:r>
+                      <m:sSub>
+                        <m:sSubPr>
+                          <m:ctrlPr>
+                            <a:rPr lang="en-US" altLang="ja-JP" b="0" i="1" smtClean="0">
+                              <a:latin typeface="Cambria Math" panose="02040503050406030204" pitchFamily="18" charset="0"/>
+                            </a:rPr>
+                          </m:ctrlPr>
+                        </m:sSubPr>
+                        <m:e>
+                          <m:r>
+                            <a:rPr lang="en-US" altLang="ja-JP" b="0" i="1" smtClean="0">
+                              <a:latin typeface="Cambria Math" panose="02040503050406030204" pitchFamily="18" charset="0"/>
+                            </a:rPr>
+                            <m:t>𝑦</m:t>
+                          </m:r>
+                        </m:e>
+                        <m:sub>
+                          <m:r>
+                            <a:rPr lang="en-US" altLang="ja-JP" b="0" i="1" smtClean="0">
+                              <a:latin typeface="Cambria Math" panose="02040503050406030204" pitchFamily="18" charset="0"/>
+                            </a:rPr>
+                            <m:t>𝑖</m:t>
+                          </m:r>
+                          <m:r>
+                            <a:rPr lang="en-US" altLang="ja-JP" b="0" i="1" smtClean="0">
+                              <a:latin typeface="Cambria Math" panose="02040503050406030204" pitchFamily="18" charset="0"/>
+                            </a:rPr>
+                            <m:t>−1</m:t>
+                          </m:r>
+                        </m:sub>
+                      </m:sSub>
+                      <m:r>
+                        <a:rPr lang="ja-JP" altLang="en-US" i="1">
+                          <a:latin typeface="Cambria Math" panose="02040503050406030204" pitchFamily="18" charset="0"/>
+                        </a:rPr>
+                        <m:t>のとき</m:t>
+                      </m:r>
+                      <m:r>
+                        <a:rPr lang="ja-JP" altLang="en-US" i="1" smtClean="0">
+                          <a:latin typeface="Cambria Math" panose="02040503050406030204" pitchFamily="18" charset="0"/>
+                        </a:rPr>
+                        <m:t>　</m:t>
+                      </m:r>
+                      <m:r>
+                        <a:rPr lang="en-US" altLang="ja-JP" b="0" i="1" smtClean="0">
+                          <a:latin typeface="Cambria Math" panose="02040503050406030204" pitchFamily="18" charset="0"/>
+                        </a:rPr>
+                        <m:t>𝑡</m:t>
+                      </m:r>
+                      <m:r>
+                        <a:rPr lang="en-US" altLang="ja-JP" b="0" i="1" smtClean="0">
+                          <a:latin typeface="Cambria Math" panose="02040503050406030204" pitchFamily="18" charset="0"/>
+                        </a:rPr>
+                        <m:t>=</m:t>
+                      </m:r>
+                      <m:r>
+                        <a:rPr lang="en-US" altLang="ja-JP" b="0" i="1" smtClean="0">
+                          <a:latin typeface="Cambria Math" panose="02040503050406030204" pitchFamily="18" charset="0"/>
+                        </a:rPr>
+                        <m:t>𝑢</m:t>
+                      </m:r>
+                    </m:oMath>
+                  </m:oMathPara>
+                </a14:m>
+                <a:endParaRPr lang="ja-JP" altLang="en-US"/>
+              </a:p>
+              <a:p>
+                <a:endParaRPr kumimoji="1" lang="ja-JP" altLang="en-US"/>
+              </a:p>
+            </p:txBody>
+          </p:sp>
+        </mc:Choice>
+        <mc:Fallback>
+          <p:sp>
+            <p:nvSpPr>
+              <p:cNvPr id="3" name="コンテンツ プレースホルダー 2">
+                <a:extLst>
+                  <a:ext uri="{FF2B5EF4-FFF2-40B4-BE49-F238E27FC236}">
+                    <a16:creationId xmlns:a16="http://schemas.microsoft.com/office/drawing/2014/main" id="{BACD03EA-442E-B495-73A0-230EB26C917E}"/>
+                  </a:ext>
+                </a:extLst>
+              </p:cNvPr>
+              <p:cNvSpPr>
+                <a:spLocks noGrp="1" noRot="1" noChangeAspect="1" noMove="1" noResize="1" noEditPoints="1" noAdjustHandles="1" noChangeArrowheads="1" noChangeShapeType="1" noTextEdit="1"/>
+              </p:cNvSpPr>
+              <p:nvPr>
+                <p:ph idx="1"/>
+              </p:nvPr>
+            </p:nvSpPr>
+            <p:spPr>
+              <a:xfrm>
+                <a:off x="838200" y="753533"/>
+                <a:ext cx="10515600" cy="5423430"/>
+              </a:xfrm>
+              <a:blipFill>
+                <a:blip r:embed="rId2"/>
+                <a:stretch>
+                  <a:fillRect/>
+                </a:stretch>
+              </a:blipFill>
+            </p:spPr>
+            <p:txBody>
+              <a:bodyPr/>
+              <a:lstStyle/>
+              <a:p>
+                <a:r>
+                  <a:rPr lang="ja-JP" altLang="en-US">
+                    <a:noFill/>
+                  </a:rPr>
+                  <a:t> </a:t>
+                </a:r>
+              </a:p>
+            </p:txBody>
+          </p:sp>
+        </mc:Fallback>
+      </mc:AlternateContent>
+    </p:spTree>
+    <p:extLst>
+      <p:ext uri="{BB962C8B-B14F-4D97-AF65-F5344CB8AC3E}">
+        <p14:creationId xmlns:p14="http://schemas.microsoft.com/office/powerpoint/2010/main" val="1169228807"/>
+      </p:ext>
+    </p:extLst>
+  </p:cSld>
+  <p:clrMapOvr>
+    <a:masterClrMapping/>
+  </p:clrMapOvr>
+</p:sld>
+</file>
+
 <file path=ppt/slides/slide2.xml><?xml version="1.0" encoding="utf-8"?>
 <p:sld xmlns:a="http://schemas.openxmlformats.org/drawingml/2006/main" xmlns:r="http://schemas.openxmlformats.org/officeDocument/2006/relationships" xmlns:p="http://schemas.openxmlformats.org/presentationml/2006/main">
   <p:cSld>
@@ -10332,8 +13866,8 @@
           </a:p>
         </p:txBody>
       </p:sp>
-      <mc:AlternateContent xmlns:mc="http://schemas.openxmlformats.org/markup-compatibility/2006">
-        <mc:Choice xmlns:a14="http://schemas.microsoft.com/office/drawing/2010/main" Requires="a14">
+      <mc:AlternateContent xmlns:mc="http://schemas.openxmlformats.org/markup-compatibility/2006" xmlns:a14="http://schemas.microsoft.com/office/drawing/2010/main">
+        <mc:Choice Requires="a14">
           <p:sp>
             <p:nvSpPr>
               <p:cNvPr id="3" name="コンテンツ プレースホルダー 2">
@@ -11712,7 +15246,7 @@
             </p:txBody>
           </p:sp>
         </mc:Choice>
-        <mc:Fallback>
+        <mc:Fallback xmlns="">
           <p:sp>
             <p:nvSpPr>
               <p:cNvPr id="3" name="コンテンツ プレースホルダー 2">
@@ -11786,8 +15320,8 @@
           <a:chExt cx="0" cy="0"/>
         </a:xfrm>
       </p:grpSpPr>
-      <mc:AlternateContent xmlns:mc="http://schemas.openxmlformats.org/markup-compatibility/2006">
-        <mc:Choice xmlns:a14="http://schemas.microsoft.com/office/drawing/2010/main" Requires="a14">
+      <mc:AlternateContent xmlns:mc="http://schemas.openxmlformats.org/markup-compatibility/2006" xmlns:a14="http://schemas.microsoft.com/office/drawing/2010/main">
+        <mc:Choice Requires="a14">
           <p:sp>
             <p:nvSpPr>
               <p:cNvPr id="3" name="コンテンツ プレースホルダー 2">
@@ -15768,7 +19302,7 @@
             </p:txBody>
           </p:sp>
         </mc:Choice>
-        <mc:Fallback>
+        <mc:Fallback xmlns="">
           <p:sp>
             <p:nvSpPr>
               <p:cNvPr id="3" name="コンテンツ プレースホルダー 2">
@@ -16119,8 +19653,8 @@
           </a:p>
         </p:txBody>
       </p:sp>
-      <mc:AlternateContent xmlns:mc="http://schemas.openxmlformats.org/markup-compatibility/2006">
-        <mc:Choice xmlns:a14="http://schemas.microsoft.com/office/drawing/2010/main" Requires="a14">
+      <mc:AlternateContent xmlns:mc="http://schemas.openxmlformats.org/markup-compatibility/2006" xmlns:a14="http://schemas.microsoft.com/office/drawing/2010/main">
+        <mc:Choice Requires="a14">
           <p:sp>
             <p:nvSpPr>
               <p:cNvPr id="23" name="テキスト ボックス 22">
@@ -16160,6 +19694,7 @@
                 </a:endParaRPr>
               </a:p>
               <a:p>
+                <a:pPr/>
                 <a14:m>
                   <m:oMathPara xmlns:m="http://schemas.openxmlformats.org/officeDocument/2006/math">
                     <m:oMathParaPr>
@@ -16363,7 +19898,7 @@
             </p:txBody>
           </p:sp>
         </mc:Choice>
-        <mc:Fallback>
+        <mc:Fallback xmlns="">
           <p:sp>
             <p:nvSpPr>
               <p:cNvPr id="23" name="テキスト ボックス 22">
@@ -16467,8 +20002,8 @@
           </a:p>
         </p:txBody>
       </p:sp>
-      <mc:AlternateContent xmlns:mc="http://schemas.openxmlformats.org/markup-compatibility/2006">
-        <mc:Choice xmlns:a14="http://schemas.microsoft.com/office/drawing/2010/main" Requires="a14">
+      <mc:AlternateContent xmlns:mc="http://schemas.openxmlformats.org/markup-compatibility/2006" xmlns:a14="http://schemas.microsoft.com/office/drawing/2010/main">
+        <mc:Choice Requires="a14">
           <p:sp>
             <p:nvSpPr>
               <p:cNvPr id="3" name="コンテンツ プレースホルダー 2">
@@ -16887,7 +20422,7 @@
             </p:txBody>
           </p:sp>
         </mc:Choice>
-        <mc:Fallback>
+        <mc:Fallback xmlns="">
           <p:sp>
             <p:nvSpPr>
               <p:cNvPr id="3" name="コンテンツ プレースホルダー 2">
@@ -17072,8 +20607,8 @@
           </a:p>
         </p:txBody>
       </p:sp>
-      <mc:AlternateContent xmlns:mc="http://schemas.openxmlformats.org/markup-compatibility/2006">
-        <mc:Choice xmlns:a14="http://schemas.microsoft.com/office/drawing/2010/main" Requires="a14">
+      <mc:AlternateContent xmlns:mc="http://schemas.openxmlformats.org/markup-compatibility/2006" xmlns:a14="http://schemas.microsoft.com/office/drawing/2010/main">
+        <mc:Choice Requires="a14">
           <p:sp>
             <p:nvSpPr>
               <p:cNvPr id="3" name="コンテンツ プレースホルダー 2">
@@ -17439,7 +20974,7 @@
                         <m:begChr m:val="["/>
                         <m:endChr m:val="]"/>
                         <m:ctrlPr>
-                          <a:rPr kumimoji="1" lang="en-US" altLang="ja-JP" b="0" i="0" smtClean="0">
+                          <a:rPr kumimoji="1" lang="en-US" altLang="ja-JP" b="0" i="1" smtClean="0">
                             <a:latin typeface="Cambria Math" panose="02040503050406030204" pitchFamily="18" charset="0"/>
                           </a:rPr>
                         </m:ctrlPr>
@@ -17530,7 +21065,7 @@
             </p:txBody>
           </p:sp>
         </mc:Choice>
-        <mc:Fallback>
+        <mc:Fallback xmlns="">
           <p:sp>
             <p:nvSpPr>
               <p:cNvPr id="3" name="コンテンツ プレースホルダー 2">
@@ -17659,8 +21194,8 @@
           </a:p>
         </p:txBody>
       </p:sp>
-      <mc:AlternateContent xmlns:mc="http://schemas.openxmlformats.org/markup-compatibility/2006">
-        <mc:Choice xmlns:a14="http://schemas.microsoft.com/office/drawing/2010/main" Requires="a14">
+      <mc:AlternateContent xmlns:mc="http://schemas.openxmlformats.org/markup-compatibility/2006" xmlns:a14="http://schemas.microsoft.com/office/drawing/2010/main">
+        <mc:Choice Requires="a14">
           <p:sp>
             <p:nvSpPr>
               <p:cNvPr id="3" name="コンテンツ プレースホルダー 2">
@@ -18363,7 +21898,7 @@
             </p:txBody>
           </p:sp>
         </mc:Choice>
-        <mc:Fallback>
+        <mc:Fallback xmlns="">
           <p:sp>
             <p:nvSpPr>
               <p:cNvPr id="3" name="コンテンツ プレースホルダー 2">
@@ -18630,8 +22165,8 @@
           </a:p>
         </p:txBody>
       </p:sp>
-      <mc:AlternateContent xmlns:mc="http://schemas.openxmlformats.org/markup-compatibility/2006">
-        <mc:Choice xmlns:a14="http://schemas.microsoft.com/office/drawing/2010/main" Requires="a14">
+      <mc:AlternateContent xmlns:mc="http://schemas.openxmlformats.org/markup-compatibility/2006" xmlns:a14="http://schemas.microsoft.com/office/drawing/2010/main">
+        <mc:Choice Requires="a14">
           <p:sp>
             <p:nvSpPr>
               <p:cNvPr id="3" name="コンテンツ プレースホルダー 2">
@@ -19476,7 +23011,7 @@
             </p:txBody>
           </p:sp>
         </mc:Choice>
-        <mc:Fallback>
+        <mc:Fallback xmlns="">
           <p:sp>
             <p:nvSpPr>
               <p:cNvPr id="3" name="コンテンツ プレースホルダー 2">

--- a/memo/Procedural Physically based BRDF for Real-Time Rendering of.pptx
+++ b/memo/Procedural Physically based BRDF for Real-Time Rendering of.pptx
@@ -5,7 +5,7 @@
     <p:sldMasterId id="2147483660" r:id="rId1"/>
   </p:sldMasterIdLst>
   <p:notesMasterIdLst>
-    <p:notesMasterId r:id="rId18"/>
+    <p:notesMasterId r:id="rId19"/>
   </p:notesMasterIdLst>
   <p:sldIdLst>
     <p:sldId id="256" r:id="rId2"/>
@@ -22,8 +22,9 @@
     <p:sldId id="267" r:id="rId13"/>
     <p:sldId id="268" r:id="rId14"/>
     <p:sldId id="269" r:id="rId15"/>
-    <p:sldId id="270" r:id="rId16"/>
-    <p:sldId id="271" r:id="rId17"/>
+    <p:sldId id="272" r:id="rId16"/>
+    <p:sldId id="270" r:id="rId17"/>
+    <p:sldId id="271" r:id="rId18"/>
   </p:sldIdLst>
   <p:sldSz cx="12192000" cy="6858000"/>
   <p:notesSz cx="6858000" cy="9144000"/>
@@ -212,7 +213,7 @@
           <a:p>
             <a:fld id="{83687C97-18DD-46AD-B79F-22424EBB7FF1}" type="datetimeFigureOut">
               <a:rPr kumimoji="1" lang="ja-JP" altLang="en-US" smtClean="0"/>
-              <a:t>2025/6/28</a:t>
+              <a:t>2025/6/29</a:t>
             </a:fld>
             <a:endParaRPr kumimoji="1" lang="ja-JP" altLang="en-US"/>
           </a:p>
@@ -726,7 +727,7 @@
           <a:p>
             <a:fld id="{73FA4CDC-7D36-4B4A-B488-116582B3A61D}" type="datetimeFigureOut">
               <a:rPr kumimoji="1" lang="ja-JP" altLang="en-US" smtClean="0"/>
-              <a:t>2025/6/28</a:t>
+              <a:t>2025/6/29</a:t>
             </a:fld>
             <a:endParaRPr kumimoji="1" lang="ja-JP" altLang="en-US"/>
           </a:p>
@@ -928,7 +929,7 @@
           <a:p>
             <a:fld id="{73FA4CDC-7D36-4B4A-B488-116582B3A61D}" type="datetimeFigureOut">
               <a:rPr kumimoji="1" lang="ja-JP" altLang="en-US" smtClean="0"/>
-              <a:t>2025/6/28</a:t>
+              <a:t>2025/6/29</a:t>
             </a:fld>
             <a:endParaRPr kumimoji="1" lang="ja-JP" altLang="en-US"/>
           </a:p>
@@ -1140,7 +1141,7 @@
           <a:p>
             <a:fld id="{73FA4CDC-7D36-4B4A-B488-116582B3A61D}" type="datetimeFigureOut">
               <a:rPr kumimoji="1" lang="ja-JP" altLang="en-US" smtClean="0"/>
-              <a:t>2025/6/28</a:t>
+              <a:t>2025/6/29</a:t>
             </a:fld>
             <a:endParaRPr kumimoji="1" lang="ja-JP" altLang="en-US"/>
           </a:p>
@@ -1342,7 +1343,7 @@
           <a:p>
             <a:fld id="{73FA4CDC-7D36-4B4A-B488-116582B3A61D}" type="datetimeFigureOut">
               <a:rPr kumimoji="1" lang="ja-JP" altLang="en-US" smtClean="0"/>
-              <a:t>2025/6/28</a:t>
+              <a:t>2025/6/29</a:t>
             </a:fld>
             <a:endParaRPr kumimoji="1" lang="ja-JP" altLang="en-US"/>
           </a:p>
@@ -1588,7 +1589,7 @@
           <a:p>
             <a:fld id="{73FA4CDC-7D36-4B4A-B488-116582B3A61D}" type="datetimeFigureOut">
               <a:rPr kumimoji="1" lang="ja-JP" altLang="en-US" smtClean="0"/>
-              <a:t>2025/6/28</a:t>
+              <a:t>2025/6/29</a:t>
             </a:fld>
             <a:endParaRPr kumimoji="1" lang="ja-JP" altLang="en-US"/>
           </a:p>
@@ -1884,7 +1885,7 @@
           <a:p>
             <a:fld id="{73FA4CDC-7D36-4B4A-B488-116582B3A61D}" type="datetimeFigureOut">
               <a:rPr kumimoji="1" lang="ja-JP" altLang="en-US" smtClean="0"/>
-              <a:t>2025/6/28</a:t>
+              <a:t>2025/6/29</a:t>
             </a:fld>
             <a:endParaRPr kumimoji="1" lang="ja-JP" altLang="en-US"/>
           </a:p>
@@ -2315,7 +2316,7 @@
           <a:p>
             <a:fld id="{73FA4CDC-7D36-4B4A-B488-116582B3A61D}" type="datetimeFigureOut">
               <a:rPr kumimoji="1" lang="ja-JP" altLang="en-US" smtClean="0"/>
-              <a:t>2025/6/28</a:t>
+              <a:t>2025/6/29</a:t>
             </a:fld>
             <a:endParaRPr kumimoji="1" lang="ja-JP" altLang="en-US"/>
           </a:p>
@@ -2433,7 +2434,7 @@
           <a:p>
             <a:fld id="{73FA4CDC-7D36-4B4A-B488-116582B3A61D}" type="datetimeFigureOut">
               <a:rPr kumimoji="1" lang="ja-JP" altLang="en-US" smtClean="0"/>
-              <a:t>2025/6/28</a:t>
+              <a:t>2025/6/29</a:t>
             </a:fld>
             <a:endParaRPr kumimoji="1" lang="ja-JP" altLang="en-US"/>
           </a:p>
@@ -2528,7 +2529,7 @@
           <a:p>
             <a:fld id="{73FA4CDC-7D36-4B4A-B488-116582B3A61D}" type="datetimeFigureOut">
               <a:rPr kumimoji="1" lang="ja-JP" altLang="en-US" smtClean="0"/>
-              <a:t>2025/6/28</a:t>
+              <a:t>2025/6/29</a:t>
             </a:fld>
             <a:endParaRPr kumimoji="1" lang="ja-JP" altLang="en-US"/>
           </a:p>
@@ -2837,7 +2838,7 @@
           <a:p>
             <a:fld id="{73FA4CDC-7D36-4B4A-B488-116582B3A61D}" type="datetimeFigureOut">
               <a:rPr kumimoji="1" lang="ja-JP" altLang="en-US" smtClean="0"/>
-              <a:t>2025/6/28</a:t>
+              <a:t>2025/6/29</a:t>
             </a:fld>
             <a:endParaRPr kumimoji="1" lang="ja-JP" altLang="en-US"/>
           </a:p>
@@ -3094,7 +3095,7 @@
           <a:p>
             <a:fld id="{73FA4CDC-7D36-4B4A-B488-116582B3A61D}" type="datetimeFigureOut">
               <a:rPr kumimoji="1" lang="ja-JP" altLang="en-US" smtClean="0"/>
-              <a:t>2025/6/28</a:t>
+              <a:t>2025/6/29</a:t>
             </a:fld>
             <a:endParaRPr kumimoji="1" lang="ja-JP" altLang="en-US"/>
           </a:p>
@@ -3339,7 +3340,7 @@
           <a:p>
             <a:fld id="{73FA4CDC-7D36-4B4A-B488-116582B3A61D}" type="datetimeFigureOut">
               <a:rPr kumimoji="1" lang="ja-JP" altLang="en-US" smtClean="0"/>
-              <a:t>2025/6/28</a:t>
+              <a:t>2025/6/29</a:t>
             </a:fld>
             <a:endParaRPr kumimoji="1" lang="ja-JP" altLang="en-US"/>
           </a:p>
@@ -10201,6 +10202,1422 @@
           <p:cNvPr id="2" name="タイトル 1">
             <a:extLst>
               <a:ext uri="{FF2B5EF4-FFF2-40B4-BE49-F238E27FC236}">
+                <a16:creationId xmlns:a16="http://schemas.microsoft.com/office/drawing/2014/main" id="{73254BC6-F347-9F8B-7849-168685CF66EB}"/>
+              </a:ext>
+            </a:extLst>
+          </p:cNvPr>
+          <p:cNvSpPr>
+            <a:spLocks noGrp="1"/>
+          </p:cNvSpPr>
+          <p:nvPr>
+            <p:ph type="title"/>
+          </p:nvPr>
+        </p:nvSpPr>
+        <p:spPr/>
+        <p:txBody>
+          <a:bodyPr/>
+          <a:lstStyle/>
+          <a:p>
+            <a:r>
+              <a:rPr kumimoji="1" lang="en-US" altLang="ja-JP"/>
+              <a:t>SDF </a:t>
+            </a:r>
+            <a:r>
+              <a:rPr kumimoji="1" lang="ja-JP" altLang="en-US"/>
+              <a:t>の正規化</a:t>
+            </a:r>
+          </a:p>
+        </p:txBody>
+      </p:sp>
+      <mc:AlternateContent xmlns:mc="http://schemas.openxmlformats.org/markup-compatibility/2006">
+        <mc:Choice xmlns:a14="http://schemas.microsoft.com/office/drawing/2010/main" Requires="a14">
+          <p:sp>
+            <p:nvSpPr>
+              <p:cNvPr id="3" name="コンテンツ プレースホルダー 2">
+                <a:extLst>
+                  <a:ext uri="{FF2B5EF4-FFF2-40B4-BE49-F238E27FC236}">
+                    <a16:creationId xmlns:a16="http://schemas.microsoft.com/office/drawing/2014/main" id="{993E1325-8E31-1726-5C10-695EFF5A5CB2}"/>
+                  </a:ext>
+                </a:extLst>
+              </p:cNvPr>
+              <p:cNvSpPr>
+                <a:spLocks noGrp="1"/>
+              </p:cNvSpPr>
+              <p:nvPr>
+                <p:ph idx="1"/>
+              </p:nvPr>
+            </p:nvSpPr>
+            <p:spPr/>
+            <p:txBody>
+              <a:bodyPr/>
+              <a:lstStyle/>
+              <a:p>
+                <a:r>
+                  <a:rPr lang="ja-JP" altLang="en-US"/>
+                  <a:t>積分値</a:t>
+                </a:r>
+                <a14:m>
+                  <m:oMath xmlns:m="http://schemas.openxmlformats.org/officeDocument/2006/math">
+                    <m:r>
+                      <a:rPr lang="en-US" altLang="ja-JP" b="0" i="1" smtClean="0">
+                        <a:latin typeface="Cambria Math" panose="02040503050406030204" pitchFamily="18" charset="0"/>
+                      </a:rPr>
+                      <m:t>𝐼</m:t>
+                    </m:r>
+                  </m:oMath>
+                </a14:m>
+                <a:r>
+                  <a:rPr lang="ja-JP" altLang="en-US"/>
+                  <a:t>で除算</a:t>
+                </a:r>
+                <a:endParaRPr lang="en-US" altLang="ja-JP"/>
+              </a:p>
+              <a:p>
+                <a:pPr lvl="8"/>
+                <a:endParaRPr lang="en-US" altLang="ja-JP"/>
+              </a:p>
+              <a:p>
+                <a:pPr marL="0" indent="0">
+                  <a:buNone/>
+                </a:pPr>
+                <a14:m>
+                  <m:oMathPara xmlns:m="http://schemas.openxmlformats.org/officeDocument/2006/math">
+                    <m:oMathParaPr>
+                      <m:jc m:val="centerGroup"/>
+                    </m:oMathParaPr>
+                    <m:oMath xmlns:m="http://schemas.openxmlformats.org/officeDocument/2006/math">
+                      <m:r>
+                        <a:rPr lang="en-US" altLang="ja-JP" b="0" i="1" smtClean="0">
+                          <a:latin typeface="Cambria Math" panose="02040503050406030204" pitchFamily="18" charset="0"/>
+                        </a:rPr>
+                        <m:t>𝐼</m:t>
+                      </m:r>
+                      <m:r>
+                        <a:rPr lang="en-US" altLang="ja-JP" b="0" i="1" smtClean="0">
+                          <a:latin typeface="Cambria Math" panose="02040503050406030204" pitchFamily="18" charset="0"/>
+                        </a:rPr>
+                        <m:t>=</m:t>
+                      </m:r>
+                      <m:f>
+                        <m:fPr>
+                          <m:ctrlPr>
+                            <a:rPr lang="en-US" altLang="ja-JP" b="0" i="1" smtClean="0">
+                              <a:latin typeface="Cambria Math" panose="02040503050406030204" pitchFamily="18" charset="0"/>
+                            </a:rPr>
+                          </m:ctrlPr>
+                        </m:fPr>
+                        <m:num>
+                          <m:r>
+                            <m:rPr>
+                              <m:sty m:val="p"/>
+                            </m:rPr>
+                            <a:rPr lang="en-US" altLang="ja-JP" b="0" i="0" smtClean="0">
+                              <a:latin typeface="Cambria Math" panose="02040503050406030204" pitchFamily="18" charset="0"/>
+                            </a:rPr>
+                            <m:t>Δ</m:t>
+                          </m:r>
+                          <m:r>
+                            <a:rPr lang="en-US" altLang="ja-JP" b="0" i="1" smtClean="0">
+                              <a:latin typeface="Cambria Math" panose="02040503050406030204" pitchFamily="18" charset="0"/>
+                            </a:rPr>
+                            <m:t>𝑥</m:t>
+                          </m:r>
+                        </m:num>
+                        <m:den>
+                          <m:r>
+                            <a:rPr lang="en-US" altLang="ja-JP" b="0" i="1" smtClean="0">
+                              <a:latin typeface="Cambria Math" panose="02040503050406030204" pitchFamily="18" charset="0"/>
+                            </a:rPr>
+                            <m:t>2</m:t>
+                          </m:r>
+                        </m:den>
+                      </m:f>
+                      <m:sSub>
+                        <m:sSubPr>
+                          <m:ctrlPr>
+                            <a:rPr lang="en-US" altLang="ja-JP" i="1">
+                              <a:latin typeface="Cambria Math" panose="02040503050406030204" pitchFamily="18" charset="0"/>
+                            </a:rPr>
+                          </m:ctrlPr>
+                        </m:sSubPr>
+                        <m:e>
+                          <m:r>
+                            <a:rPr lang="en-US" altLang="ja-JP" i="1">
+                              <a:latin typeface="Cambria Math" panose="02040503050406030204" pitchFamily="18" charset="0"/>
+                            </a:rPr>
+                            <m:t>𝑦</m:t>
+                          </m:r>
+                        </m:e>
+                        <m:sub>
+                          <m:r>
+                            <a:rPr lang="en-US" altLang="ja-JP" i="1">
+                              <a:latin typeface="Cambria Math" panose="02040503050406030204" pitchFamily="18" charset="0"/>
+                            </a:rPr>
+                            <m:t>0</m:t>
+                          </m:r>
+                        </m:sub>
+                      </m:sSub>
+                      <m:r>
+                        <a:rPr lang="en-US" altLang="ja-JP" b="0" i="1" smtClean="0">
+                          <a:latin typeface="Cambria Math" panose="02040503050406030204" pitchFamily="18" charset="0"/>
+                        </a:rPr>
+                        <m:t>+</m:t>
+                      </m:r>
+                      <m:r>
+                        <m:rPr>
+                          <m:sty m:val="p"/>
+                        </m:rPr>
+                        <a:rPr lang="en-US" altLang="ja-JP" b="0" i="0" smtClean="0">
+                          <a:latin typeface="Cambria Math" panose="02040503050406030204" pitchFamily="18" charset="0"/>
+                        </a:rPr>
+                        <m:t>Δ</m:t>
+                      </m:r>
+                      <m:r>
+                        <a:rPr lang="en-US" altLang="ja-JP" b="0" i="1" smtClean="0">
+                          <a:latin typeface="Cambria Math" panose="02040503050406030204" pitchFamily="18" charset="0"/>
+                        </a:rPr>
+                        <m:t>𝑥</m:t>
+                      </m:r>
+                      <m:nary>
+                        <m:naryPr>
+                          <m:chr m:val="∑"/>
+                          <m:ctrlPr>
+                            <a:rPr lang="en-US" altLang="ja-JP" i="1">
+                              <a:latin typeface="Cambria Math" panose="02040503050406030204" pitchFamily="18" charset="0"/>
+                            </a:rPr>
+                          </m:ctrlPr>
+                        </m:naryPr>
+                        <m:sub>
+                          <m:r>
+                            <a:rPr lang="en-US" altLang="ja-JP" i="1">
+                              <a:latin typeface="Cambria Math" panose="02040503050406030204" pitchFamily="18" charset="0"/>
+                            </a:rPr>
+                            <m:t>𝑖</m:t>
+                          </m:r>
+                          <m:r>
+                            <a:rPr lang="en-US" altLang="ja-JP" i="1">
+                              <a:latin typeface="Cambria Math" panose="02040503050406030204" pitchFamily="18" charset="0"/>
+                            </a:rPr>
+                            <m:t>=1</m:t>
+                          </m:r>
+                        </m:sub>
+                        <m:sup>
+                          <m:r>
+                            <a:rPr lang="en-US" altLang="ja-JP" i="1">
+                              <a:latin typeface="Cambria Math" panose="02040503050406030204" pitchFamily="18" charset="0"/>
+                            </a:rPr>
+                            <m:t>𝑁</m:t>
+                          </m:r>
+                          <m:r>
+                            <a:rPr lang="en-US" altLang="ja-JP" b="0" i="1" smtClean="0">
+                              <a:latin typeface="Cambria Math" panose="02040503050406030204" pitchFamily="18" charset="0"/>
+                            </a:rPr>
+                            <m:t>−1</m:t>
+                          </m:r>
+                        </m:sup>
+                        <m:e>
+                          <m:f>
+                            <m:fPr>
+                              <m:ctrlPr>
+                                <a:rPr lang="en-US" altLang="ja-JP" b="0" i="1" smtClean="0">
+                                  <a:latin typeface="Cambria Math" panose="02040503050406030204" pitchFamily="18" charset="0"/>
+                                </a:rPr>
+                              </m:ctrlPr>
+                            </m:fPr>
+                            <m:num>
+                              <m:sSub>
+                                <m:sSubPr>
+                                  <m:ctrlPr>
+                                    <a:rPr lang="en-US" altLang="ja-JP" i="1">
+                                      <a:latin typeface="Cambria Math" panose="02040503050406030204" pitchFamily="18" charset="0"/>
+                                    </a:rPr>
+                                  </m:ctrlPr>
+                                </m:sSubPr>
+                                <m:e>
+                                  <m:r>
+                                    <a:rPr lang="en-US" altLang="ja-JP" b="0" i="1" smtClean="0">
+                                      <a:latin typeface="Cambria Math" panose="02040503050406030204" pitchFamily="18" charset="0"/>
+                                    </a:rPr>
+                                    <m:t>𝑦</m:t>
+                                  </m:r>
+                                </m:e>
+                                <m:sub>
+                                  <m:r>
+                                    <a:rPr lang="en-US" altLang="ja-JP" i="1">
+                                      <a:latin typeface="Cambria Math" panose="02040503050406030204" pitchFamily="18" charset="0"/>
+                                    </a:rPr>
+                                    <m:t>𝑖</m:t>
+                                  </m:r>
+                                </m:sub>
+                              </m:sSub>
+                              <m:r>
+                                <a:rPr lang="en-US" altLang="ja-JP" b="0" i="1" smtClean="0">
+                                  <a:latin typeface="Cambria Math" panose="02040503050406030204" pitchFamily="18" charset="0"/>
+                                </a:rPr>
+                                <m:t>+</m:t>
+                              </m:r>
+                              <m:sSub>
+                                <m:sSubPr>
+                                  <m:ctrlPr>
+                                    <a:rPr lang="en-US" altLang="ja-JP" b="0" i="1" smtClean="0">
+                                      <a:latin typeface="Cambria Math" panose="02040503050406030204" pitchFamily="18" charset="0"/>
+                                    </a:rPr>
+                                  </m:ctrlPr>
+                                </m:sSubPr>
+                                <m:e>
+                                  <m:r>
+                                    <a:rPr lang="en-US" altLang="ja-JP" b="0" i="1" smtClean="0">
+                                      <a:latin typeface="Cambria Math" panose="02040503050406030204" pitchFamily="18" charset="0"/>
+                                    </a:rPr>
+                                    <m:t>𝑦</m:t>
+                                  </m:r>
+                                </m:e>
+                                <m:sub>
+                                  <m:r>
+                                    <a:rPr lang="en-US" altLang="ja-JP" b="0" i="1" smtClean="0">
+                                      <a:latin typeface="Cambria Math" panose="02040503050406030204" pitchFamily="18" charset="0"/>
+                                    </a:rPr>
+                                    <m:t>𝑖</m:t>
+                                  </m:r>
+                                  <m:r>
+                                    <a:rPr lang="en-US" altLang="ja-JP" b="0" i="1" smtClean="0">
+                                      <a:latin typeface="Cambria Math" panose="02040503050406030204" pitchFamily="18" charset="0"/>
+                                    </a:rPr>
+                                    <m:t>−1</m:t>
+                                  </m:r>
+                                </m:sub>
+                              </m:sSub>
+                            </m:num>
+                            <m:den>
+                              <m:r>
+                                <a:rPr lang="en-US" altLang="ja-JP" b="0" i="1" smtClean="0">
+                                  <a:latin typeface="Cambria Math" panose="02040503050406030204" pitchFamily="18" charset="0"/>
+                                </a:rPr>
+                                <m:t>2</m:t>
+                              </m:r>
+                            </m:den>
+                          </m:f>
+                        </m:e>
+                      </m:nary>
+                      <m:r>
+                        <a:rPr lang="en-US" altLang="ja-JP" b="0" i="1" smtClean="0">
+                          <a:latin typeface="Cambria Math" panose="02040503050406030204" pitchFamily="18" charset="0"/>
+                        </a:rPr>
+                        <m:t>+</m:t>
+                      </m:r>
+                      <m:f>
+                        <m:fPr>
+                          <m:ctrlPr>
+                            <a:rPr lang="en-US" altLang="ja-JP" b="0" i="1" smtClean="0">
+                              <a:latin typeface="Cambria Math" panose="02040503050406030204" pitchFamily="18" charset="0"/>
+                            </a:rPr>
+                          </m:ctrlPr>
+                        </m:fPr>
+                        <m:num>
+                          <m:r>
+                            <m:rPr>
+                              <m:sty m:val="p"/>
+                            </m:rPr>
+                            <a:rPr lang="en-US" altLang="ja-JP" b="0" i="0" smtClean="0">
+                              <a:latin typeface="Cambria Math" panose="02040503050406030204" pitchFamily="18" charset="0"/>
+                            </a:rPr>
+                            <m:t>Δ</m:t>
+                          </m:r>
+                          <m:r>
+                            <a:rPr lang="en-US" altLang="ja-JP" b="0" i="1" smtClean="0">
+                              <a:latin typeface="Cambria Math" panose="02040503050406030204" pitchFamily="18" charset="0"/>
+                            </a:rPr>
+                            <m:t>𝑥</m:t>
+                          </m:r>
+                        </m:num>
+                        <m:den>
+                          <m:r>
+                            <a:rPr lang="en-US" altLang="ja-JP" b="0" i="1" smtClean="0">
+                              <a:latin typeface="Cambria Math" panose="02040503050406030204" pitchFamily="18" charset="0"/>
+                            </a:rPr>
+                            <m:t>2</m:t>
+                          </m:r>
+                        </m:den>
+                      </m:f>
+                      <m:sSub>
+                        <m:sSubPr>
+                          <m:ctrlPr>
+                            <a:rPr lang="en-US" altLang="ja-JP" b="0" i="1" smtClean="0">
+                              <a:latin typeface="Cambria Math" panose="02040503050406030204" pitchFamily="18" charset="0"/>
+                            </a:rPr>
+                          </m:ctrlPr>
+                        </m:sSubPr>
+                        <m:e>
+                          <m:r>
+                            <a:rPr lang="en-US" altLang="ja-JP" b="0" i="1" smtClean="0">
+                              <a:latin typeface="Cambria Math" panose="02040503050406030204" pitchFamily="18" charset="0"/>
+                            </a:rPr>
+                            <m:t>𝑦</m:t>
+                          </m:r>
+                        </m:e>
+                        <m:sub>
+                          <m:r>
+                            <a:rPr lang="en-US" altLang="ja-JP" b="0" i="1" smtClean="0">
+                              <a:latin typeface="Cambria Math" panose="02040503050406030204" pitchFamily="18" charset="0"/>
+                            </a:rPr>
+                            <m:t>𝑁</m:t>
+                          </m:r>
+                          <m:r>
+                            <a:rPr lang="en-US" altLang="ja-JP" b="0" i="1" smtClean="0">
+                              <a:latin typeface="Cambria Math" panose="02040503050406030204" pitchFamily="18" charset="0"/>
+                            </a:rPr>
+                            <m:t>−1</m:t>
+                          </m:r>
+                        </m:sub>
+                      </m:sSub>
+                      <m:r>
+                        <a:rPr lang="en-US" altLang="ja-JP" b="0" i="1" smtClean="0">
+                          <a:latin typeface="Cambria Math" panose="02040503050406030204" pitchFamily="18" charset="0"/>
+                        </a:rPr>
+                        <m:t>=</m:t>
+                      </m:r>
+                      <m:r>
+                        <m:rPr>
+                          <m:sty m:val="p"/>
+                        </m:rPr>
+                        <a:rPr lang="en-US" altLang="ja-JP" b="0" i="0" smtClean="0">
+                          <a:latin typeface="Cambria Math" panose="02040503050406030204" pitchFamily="18" charset="0"/>
+                        </a:rPr>
+                        <m:t>Δ</m:t>
+                      </m:r>
+                      <m:r>
+                        <a:rPr lang="en-US" altLang="ja-JP" b="0" i="1" smtClean="0">
+                          <a:latin typeface="Cambria Math" panose="02040503050406030204" pitchFamily="18" charset="0"/>
+                        </a:rPr>
+                        <m:t>𝑥</m:t>
+                      </m:r>
+                      <m:nary>
+                        <m:naryPr>
+                          <m:chr m:val="∑"/>
+                          <m:ctrlPr>
+                            <a:rPr lang="en-US" altLang="ja-JP" b="0" i="1" smtClean="0">
+                              <a:latin typeface="Cambria Math" panose="02040503050406030204" pitchFamily="18" charset="0"/>
+                            </a:rPr>
+                          </m:ctrlPr>
+                        </m:naryPr>
+                        <m:sub>
+                          <m:r>
+                            <a:rPr lang="en-US" altLang="ja-JP" b="0" i="1" smtClean="0">
+                              <a:latin typeface="Cambria Math" panose="02040503050406030204" pitchFamily="18" charset="0"/>
+                            </a:rPr>
+                            <m:t>𝑖</m:t>
+                          </m:r>
+                          <m:r>
+                            <a:rPr lang="en-US" altLang="ja-JP" b="0" i="1" smtClean="0">
+                              <a:latin typeface="Cambria Math" panose="02040503050406030204" pitchFamily="18" charset="0"/>
+                            </a:rPr>
+                            <m:t>=0</m:t>
+                          </m:r>
+                        </m:sub>
+                        <m:sup>
+                          <m:r>
+                            <a:rPr lang="en-US" altLang="ja-JP" b="0" i="1" smtClean="0">
+                              <a:latin typeface="Cambria Math" panose="02040503050406030204" pitchFamily="18" charset="0"/>
+                            </a:rPr>
+                            <m:t>𝑁</m:t>
+                          </m:r>
+                          <m:r>
+                            <a:rPr lang="en-US" altLang="ja-JP" b="0" i="1" smtClean="0">
+                              <a:latin typeface="Cambria Math" panose="02040503050406030204" pitchFamily="18" charset="0"/>
+                            </a:rPr>
+                            <m:t>−1</m:t>
+                          </m:r>
+                        </m:sup>
+                        <m:e>
+                          <m:sSub>
+                            <m:sSubPr>
+                              <m:ctrlPr>
+                                <a:rPr lang="en-US" altLang="ja-JP" b="0" i="1" smtClean="0">
+                                  <a:latin typeface="Cambria Math" panose="02040503050406030204" pitchFamily="18" charset="0"/>
+                                </a:rPr>
+                              </m:ctrlPr>
+                            </m:sSubPr>
+                            <m:e>
+                              <m:r>
+                                <a:rPr lang="en-US" altLang="ja-JP" b="0" i="1" smtClean="0">
+                                  <a:latin typeface="Cambria Math" panose="02040503050406030204" pitchFamily="18" charset="0"/>
+                                </a:rPr>
+                                <m:t>𝑦</m:t>
+                              </m:r>
+                            </m:e>
+                            <m:sub>
+                              <m:r>
+                                <a:rPr lang="en-US" altLang="ja-JP" b="0" i="1" smtClean="0">
+                                  <a:latin typeface="Cambria Math" panose="02040503050406030204" pitchFamily="18" charset="0"/>
+                                </a:rPr>
+                                <m:t>𝑖</m:t>
+                              </m:r>
+                            </m:sub>
+                          </m:sSub>
+                        </m:e>
+                      </m:nary>
+                    </m:oMath>
+                    <m:oMath xmlns:m="http://schemas.openxmlformats.org/officeDocument/2006/math">
+                      <m:r>
+                        <a:rPr lang="en-US" altLang="ja-JP" b="0" i="1" smtClean="0">
+                          <a:latin typeface="Cambria Math" panose="02040503050406030204" pitchFamily="18" charset="0"/>
+                        </a:rPr>
+                        <m:t> </m:t>
+                      </m:r>
+                    </m:oMath>
+                    <m:oMath xmlns:m="http://schemas.openxmlformats.org/officeDocument/2006/math">
+                      <m:r>
+                        <m:rPr>
+                          <m:sty m:val="p"/>
+                        </m:rPr>
+                        <a:rPr lang="en-US" altLang="ja-JP" b="0" i="0" smtClean="0">
+                          <a:latin typeface="Cambria Math" panose="02040503050406030204" pitchFamily="18" charset="0"/>
+                        </a:rPr>
+                        <m:t>Δ</m:t>
+                      </m:r>
+                      <m:r>
+                        <a:rPr lang="en-US" altLang="ja-JP" b="0" i="1" smtClean="0">
+                          <a:latin typeface="Cambria Math" panose="02040503050406030204" pitchFamily="18" charset="0"/>
+                        </a:rPr>
+                        <m:t>𝑥</m:t>
+                      </m:r>
+                      <m:r>
+                        <a:rPr lang="en-US" altLang="ja-JP" b="0" i="1" smtClean="0">
+                          <a:latin typeface="Cambria Math" panose="02040503050406030204" pitchFamily="18" charset="0"/>
+                        </a:rPr>
+                        <m:t>=</m:t>
+                      </m:r>
+                      <m:f>
+                        <m:fPr>
+                          <m:ctrlPr>
+                            <a:rPr lang="en-US" altLang="ja-JP" i="1">
+                              <a:latin typeface="Cambria Math" panose="02040503050406030204" pitchFamily="18" charset="0"/>
+                            </a:rPr>
+                          </m:ctrlPr>
+                        </m:fPr>
+                        <m:num>
+                          <m:r>
+                            <a:rPr lang="en-US" altLang="ja-JP" i="1">
+                              <a:latin typeface="Cambria Math" panose="02040503050406030204" pitchFamily="18" charset="0"/>
+                            </a:rPr>
+                            <m:t>4</m:t>
+                          </m:r>
+                          <m:r>
+                            <a:rPr lang="en-US" altLang="ja-JP" i="1">
+                              <a:latin typeface="Cambria Math" panose="02040503050406030204" pitchFamily="18" charset="0"/>
+                            </a:rPr>
+                            <m:t>𝛼</m:t>
+                          </m:r>
+                        </m:num>
+                        <m:den>
+                          <m:rad>
+                            <m:radPr>
+                              <m:degHide m:val="on"/>
+                              <m:ctrlPr>
+                                <a:rPr lang="en-US" altLang="ja-JP" i="1">
+                                  <a:latin typeface="Cambria Math" panose="02040503050406030204" pitchFamily="18" charset="0"/>
+                                </a:rPr>
+                              </m:ctrlPr>
+                            </m:radPr>
+                            <m:deg/>
+                            <m:e>
+                              <m:r>
+                                <a:rPr lang="en-US" altLang="ja-JP" i="1">
+                                  <a:latin typeface="Cambria Math" panose="02040503050406030204" pitchFamily="18" charset="0"/>
+                                </a:rPr>
+                                <m:t>2</m:t>
+                              </m:r>
+                            </m:e>
+                          </m:rad>
+                          <m:r>
+                            <a:rPr lang="en-US" altLang="ja-JP" b="0" i="1" smtClean="0">
+                              <a:latin typeface="Cambria Math" panose="02040503050406030204" pitchFamily="18" charset="0"/>
+                            </a:rPr>
+                            <m:t>𝑁</m:t>
+                          </m:r>
+                        </m:den>
+                      </m:f>
+                    </m:oMath>
+                  </m:oMathPara>
+                </a14:m>
+                <a:endParaRPr lang="en-US" altLang="ja-JP"/>
+              </a:p>
+              <a:p>
+                <a:pPr lvl="8"/>
+                <a:endParaRPr lang="en-US" altLang="ja-JP"/>
+              </a:p>
+              <a:p>
+                <a:pPr lvl="1"/>
+                <a14:m>
+                  <m:oMath xmlns:m="http://schemas.openxmlformats.org/officeDocument/2006/math">
+                    <m:r>
+                      <m:rPr>
+                        <m:sty m:val="p"/>
+                      </m:rPr>
+                      <a:rPr lang="en-US" altLang="ja-JP" b="0" i="0" smtClean="0">
+                        <a:latin typeface="Cambria Math" panose="02040503050406030204" pitchFamily="18" charset="0"/>
+                      </a:rPr>
+                      <m:t>Δ</m:t>
+                    </m:r>
+                    <m:r>
+                      <a:rPr lang="en-US" altLang="ja-JP" b="0" i="1" smtClean="0">
+                        <a:latin typeface="Cambria Math" panose="02040503050406030204" pitchFamily="18" charset="0"/>
+                      </a:rPr>
+                      <m:t>𝑥</m:t>
+                    </m:r>
+                  </m:oMath>
+                </a14:m>
+                <a:r>
+                  <a:rPr lang="ja-JP" altLang="en-US"/>
+                  <a:t>は含めず</a:t>
+                </a:r>
+                <a:r>
+                  <a:rPr lang="en-US" altLang="ja-JP"/>
+                  <a:t>unorm</a:t>
+                </a:r>
+                <a:r>
+                  <a:rPr lang="ja-JP" altLang="en-US"/>
+                  <a:t>で保存し</a:t>
+                </a:r>
+                <a14:m>
+                  <m:oMath xmlns:m="http://schemas.openxmlformats.org/officeDocument/2006/math">
+                    <m:r>
+                      <m:rPr>
+                        <m:sty m:val="p"/>
+                      </m:rPr>
+                      <a:rPr lang="en-US" altLang="ja-JP" b="0" i="0" smtClean="0">
+                        <a:latin typeface="Cambria Math" panose="02040503050406030204" pitchFamily="18" charset="0"/>
+                      </a:rPr>
+                      <m:t>Δ</m:t>
+                    </m:r>
+                    <m:r>
+                      <a:rPr lang="en-US" altLang="ja-JP" b="0" i="1" smtClean="0">
+                        <a:latin typeface="Cambria Math" panose="02040503050406030204" pitchFamily="18" charset="0"/>
+                      </a:rPr>
+                      <m:t>𝑥</m:t>
+                    </m:r>
+                  </m:oMath>
+                </a14:m>
+                <a:r>
+                  <a:rPr lang="ja-JP" altLang="en-US"/>
+                  <a:t>を後で除算</a:t>
+                </a:r>
+                <a:endParaRPr lang="en-US" altLang="ja-JP"/>
+              </a:p>
+              <a:p>
+                <a:endParaRPr kumimoji="1" lang="en-US" altLang="ja-JP"/>
+              </a:p>
+              <a:p>
+                <a:endParaRPr lang="en-US" altLang="ja-JP"/>
+              </a:p>
+              <a:p>
+                <a:endParaRPr kumimoji="1" lang="en-US" altLang="ja-JP"/>
+              </a:p>
+              <a:p>
+                <a:endParaRPr lang="en-US" altLang="ja-JP"/>
+              </a:p>
+              <a:p>
+                <a:endParaRPr kumimoji="1" lang="ja-JP" altLang="en-US"/>
+              </a:p>
+            </p:txBody>
+          </p:sp>
+        </mc:Choice>
+        <mc:Fallback>
+          <p:sp>
+            <p:nvSpPr>
+              <p:cNvPr id="3" name="コンテンツ プレースホルダー 2">
+                <a:extLst>
+                  <a:ext uri="{FF2B5EF4-FFF2-40B4-BE49-F238E27FC236}">
+                    <a16:creationId xmlns:a16="http://schemas.microsoft.com/office/drawing/2014/main" id="{993E1325-8E31-1726-5C10-695EFF5A5CB2}"/>
+                  </a:ext>
+                </a:extLst>
+              </p:cNvPr>
+              <p:cNvSpPr>
+                <a:spLocks noGrp="1" noRot="1" noChangeAspect="1" noMove="1" noResize="1" noEditPoints="1" noAdjustHandles="1" noChangeArrowheads="1" noChangeShapeType="1" noTextEdit="1"/>
+              </p:cNvSpPr>
+              <p:nvPr>
+                <p:ph idx="1"/>
+              </p:nvPr>
+            </p:nvSpPr>
+            <p:spPr>
+              <a:blipFill>
+                <a:blip r:embed="rId2"/>
+                <a:stretch>
+                  <a:fillRect l="-1043" t="-2241"/>
+                </a:stretch>
+              </a:blipFill>
+            </p:spPr>
+            <p:txBody>
+              <a:bodyPr/>
+              <a:lstStyle/>
+              <a:p>
+                <a:r>
+                  <a:rPr lang="ja-JP" altLang="en-US">
+                    <a:noFill/>
+                  </a:rPr>
+                  <a:t> </a:t>
+                </a:r>
+              </a:p>
+            </p:txBody>
+          </p:sp>
+        </mc:Fallback>
+      </mc:AlternateContent>
+      <p:graphicFrame>
+        <p:nvGraphicFramePr>
+          <p:cNvPr id="4" name="表 3">
+            <a:extLst>
+              <a:ext uri="{FF2B5EF4-FFF2-40B4-BE49-F238E27FC236}">
+                <a16:creationId xmlns:a16="http://schemas.microsoft.com/office/drawing/2014/main" id="{6E1DD2DD-A570-45E4-660F-1D3B86A44191}"/>
+              </a:ext>
+            </a:extLst>
+          </p:cNvPr>
+          <p:cNvGraphicFramePr>
+            <a:graphicFrameLocks noGrp="1"/>
+          </p:cNvGraphicFramePr>
+          <p:nvPr>
+            <p:extLst>
+              <p:ext uri="{D42A27DB-BD31-4B8C-83A1-F6EECF244321}">
+                <p14:modId xmlns:p14="http://schemas.microsoft.com/office/powerpoint/2010/main" val="2762328233"/>
+              </p:ext>
+            </p:extLst>
+          </p:nvPr>
+        </p:nvGraphicFramePr>
+        <p:xfrm>
+          <a:off x="8098310" y="4545188"/>
+          <a:ext cx="3672000" cy="365760"/>
+        </p:xfrm>
+        <a:graphic>
+          <a:graphicData uri="http://schemas.openxmlformats.org/drawingml/2006/table">
+            <a:tbl>
+              <a:tblPr>
+                <a:tableStyleId>{5940675A-B579-460E-94D1-54222C63F5DA}</a:tableStyleId>
+              </a:tblPr>
+              <a:tblGrid>
+                <a:gridCol w="918000">
+                  <a:extLst>
+                    <a:ext uri="{9D8B030D-6E8A-4147-A177-3AD203B41FA5}">
+                      <a16:colId xmlns:a16="http://schemas.microsoft.com/office/drawing/2014/main" val="2801293580"/>
+                    </a:ext>
+                  </a:extLst>
+                </a:gridCol>
+                <a:gridCol w="918000">
+                  <a:extLst>
+                    <a:ext uri="{9D8B030D-6E8A-4147-A177-3AD203B41FA5}">
+                      <a16:colId xmlns:a16="http://schemas.microsoft.com/office/drawing/2014/main" val="1210503514"/>
+                    </a:ext>
+                  </a:extLst>
+                </a:gridCol>
+                <a:gridCol w="918000">
+                  <a:extLst>
+                    <a:ext uri="{9D8B030D-6E8A-4147-A177-3AD203B41FA5}">
+                      <a16:colId xmlns:a16="http://schemas.microsoft.com/office/drawing/2014/main" val="1577042054"/>
+                    </a:ext>
+                  </a:extLst>
+                </a:gridCol>
+                <a:gridCol w="918000">
+                  <a:extLst>
+                    <a:ext uri="{9D8B030D-6E8A-4147-A177-3AD203B41FA5}">
+                      <a16:colId xmlns:a16="http://schemas.microsoft.com/office/drawing/2014/main" val="1982503674"/>
+                    </a:ext>
+                  </a:extLst>
+                </a:gridCol>
+              </a:tblGrid>
+              <a:tr h="324000">
+                <a:tc>
+                  <a:txBody>
+                    <a:bodyPr/>
+                    <a:lstStyle/>
+                    <a:p>
+                      <a:endParaRPr kumimoji="1" lang="ja-JP" altLang="en-US"/>
+                    </a:p>
+                  </a:txBody>
+                  <a:tcPr/>
+                </a:tc>
+                <a:tc>
+                  <a:txBody>
+                    <a:bodyPr/>
+                    <a:lstStyle/>
+                    <a:p>
+                      <a:endParaRPr kumimoji="1" lang="ja-JP" altLang="en-US"/>
+                    </a:p>
+                  </a:txBody>
+                  <a:tcPr/>
+                </a:tc>
+                <a:tc>
+                  <a:txBody>
+                    <a:bodyPr/>
+                    <a:lstStyle/>
+                    <a:p>
+                      <a:endParaRPr kumimoji="1" lang="ja-JP" altLang="en-US"/>
+                    </a:p>
+                  </a:txBody>
+                  <a:tcPr/>
+                </a:tc>
+                <a:tc>
+                  <a:txBody>
+                    <a:bodyPr/>
+                    <a:lstStyle/>
+                    <a:p>
+                      <a:endParaRPr kumimoji="1" lang="ja-JP" altLang="en-US"/>
+                    </a:p>
+                  </a:txBody>
+                  <a:tcPr/>
+                </a:tc>
+                <a:extLst>
+                  <a:ext uri="{0D108BD9-81ED-4DB2-BD59-A6C34878D82A}">
+                    <a16:rowId xmlns:a16="http://schemas.microsoft.com/office/drawing/2014/main" val="3085022225"/>
+                  </a:ext>
+                </a:extLst>
+              </a:tr>
+            </a:tbl>
+          </a:graphicData>
+        </a:graphic>
+      </p:graphicFrame>
+      <p:sp>
+        <p:nvSpPr>
+          <p:cNvPr id="5" name="楕円 4">
+            <a:extLst>
+              <a:ext uri="{FF2B5EF4-FFF2-40B4-BE49-F238E27FC236}">
+                <a16:creationId xmlns:a16="http://schemas.microsoft.com/office/drawing/2014/main" id="{D23F369A-8C83-7527-4528-2456A92324F7}"/>
+              </a:ext>
+            </a:extLst>
+          </p:cNvPr>
+          <p:cNvSpPr/>
+          <p:nvPr/>
+        </p:nvSpPr>
+        <p:spPr>
+          <a:xfrm>
+            <a:off x="8451128" y="4638068"/>
+            <a:ext cx="180000" cy="180000"/>
+          </a:xfrm>
+          <a:prstGeom prst="ellipse">
+            <a:avLst/>
+          </a:prstGeom>
+        </p:spPr>
+        <p:style>
+          <a:lnRef idx="2">
+            <a:schemeClr val="accent1">
+              <a:shade val="15000"/>
+            </a:schemeClr>
+          </a:lnRef>
+          <a:fillRef idx="1">
+            <a:schemeClr val="accent1"/>
+          </a:fillRef>
+          <a:effectRef idx="0">
+            <a:schemeClr val="accent1"/>
+          </a:effectRef>
+          <a:fontRef idx="minor">
+            <a:schemeClr val="lt1"/>
+          </a:fontRef>
+        </p:style>
+        <p:txBody>
+          <a:bodyPr rtlCol="0" anchor="ctr"/>
+          <a:lstStyle/>
+          <a:p>
+            <a:pPr algn="ctr"/>
+            <a:endParaRPr kumimoji="1" lang="ja-JP" altLang="en-US"/>
+          </a:p>
+        </p:txBody>
+      </p:sp>
+      <p:sp>
+        <p:nvSpPr>
+          <p:cNvPr id="6" name="楕円 5">
+            <a:extLst>
+              <a:ext uri="{FF2B5EF4-FFF2-40B4-BE49-F238E27FC236}">
+                <a16:creationId xmlns:a16="http://schemas.microsoft.com/office/drawing/2014/main" id="{FA619AFD-5BF4-EE01-B773-756566F633F2}"/>
+              </a:ext>
+            </a:extLst>
+          </p:cNvPr>
+          <p:cNvSpPr/>
+          <p:nvPr/>
+        </p:nvSpPr>
+        <p:spPr>
+          <a:xfrm>
+            <a:off x="9384676" y="4638068"/>
+            <a:ext cx="180000" cy="180000"/>
+          </a:xfrm>
+          <a:prstGeom prst="ellipse">
+            <a:avLst/>
+          </a:prstGeom>
+        </p:spPr>
+        <p:style>
+          <a:lnRef idx="2">
+            <a:schemeClr val="accent1">
+              <a:shade val="15000"/>
+            </a:schemeClr>
+          </a:lnRef>
+          <a:fillRef idx="1">
+            <a:schemeClr val="accent1"/>
+          </a:fillRef>
+          <a:effectRef idx="0">
+            <a:schemeClr val="accent1"/>
+          </a:effectRef>
+          <a:fontRef idx="minor">
+            <a:schemeClr val="lt1"/>
+          </a:fontRef>
+        </p:style>
+        <p:txBody>
+          <a:bodyPr rtlCol="0" anchor="ctr"/>
+          <a:lstStyle/>
+          <a:p>
+            <a:pPr algn="ctr"/>
+            <a:endParaRPr kumimoji="1" lang="ja-JP" altLang="en-US"/>
+          </a:p>
+        </p:txBody>
+      </p:sp>
+      <p:sp>
+        <p:nvSpPr>
+          <p:cNvPr id="7" name="楕円 6">
+            <a:extLst>
+              <a:ext uri="{FF2B5EF4-FFF2-40B4-BE49-F238E27FC236}">
+                <a16:creationId xmlns:a16="http://schemas.microsoft.com/office/drawing/2014/main" id="{8F1C7F40-4C38-F6B3-9338-960468F72E9B}"/>
+              </a:ext>
+            </a:extLst>
+          </p:cNvPr>
+          <p:cNvSpPr/>
+          <p:nvPr/>
+        </p:nvSpPr>
+        <p:spPr>
+          <a:xfrm>
+            <a:off x="10287932" y="4638068"/>
+            <a:ext cx="180000" cy="180000"/>
+          </a:xfrm>
+          <a:prstGeom prst="ellipse">
+            <a:avLst/>
+          </a:prstGeom>
+        </p:spPr>
+        <p:style>
+          <a:lnRef idx="2">
+            <a:schemeClr val="accent1">
+              <a:shade val="15000"/>
+            </a:schemeClr>
+          </a:lnRef>
+          <a:fillRef idx="1">
+            <a:schemeClr val="accent1"/>
+          </a:fillRef>
+          <a:effectRef idx="0">
+            <a:schemeClr val="accent1"/>
+          </a:effectRef>
+          <a:fontRef idx="minor">
+            <a:schemeClr val="lt1"/>
+          </a:fontRef>
+        </p:style>
+        <p:txBody>
+          <a:bodyPr rtlCol="0" anchor="ctr"/>
+          <a:lstStyle/>
+          <a:p>
+            <a:pPr algn="ctr"/>
+            <a:endParaRPr kumimoji="1" lang="ja-JP" altLang="en-US"/>
+          </a:p>
+        </p:txBody>
+      </p:sp>
+      <p:sp>
+        <p:nvSpPr>
+          <p:cNvPr id="8" name="楕円 7">
+            <a:extLst>
+              <a:ext uri="{FF2B5EF4-FFF2-40B4-BE49-F238E27FC236}">
+                <a16:creationId xmlns:a16="http://schemas.microsoft.com/office/drawing/2014/main" id="{B93C6F85-D125-E0AD-7D88-17361142D293}"/>
+              </a:ext>
+            </a:extLst>
+          </p:cNvPr>
+          <p:cNvSpPr/>
+          <p:nvPr/>
+        </p:nvSpPr>
+        <p:spPr>
+          <a:xfrm>
+            <a:off x="11221480" y="4638068"/>
+            <a:ext cx="180000" cy="180000"/>
+          </a:xfrm>
+          <a:prstGeom prst="ellipse">
+            <a:avLst/>
+          </a:prstGeom>
+        </p:spPr>
+        <p:style>
+          <a:lnRef idx="2">
+            <a:schemeClr val="accent1">
+              <a:shade val="15000"/>
+            </a:schemeClr>
+          </a:lnRef>
+          <a:fillRef idx="1">
+            <a:schemeClr val="accent1"/>
+          </a:fillRef>
+          <a:effectRef idx="0">
+            <a:schemeClr val="accent1"/>
+          </a:effectRef>
+          <a:fontRef idx="minor">
+            <a:schemeClr val="lt1"/>
+          </a:fontRef>
+        </p:style>
+        <p:txBody>
+          <a:bodyPr rtlCol="0" anchor="ctr"/>
+          <a:lstStyle/>
+          <a:p>
+            <a:pPr algn="ctr"/>
+            <a:endParaRPr kumimoji="1" lang="ja-JP" altLang="en-US"/>
+          </a:p>
+        </p:txBody>
+      </p:sp>
+      <p:cxnSp>
+        <p:nvCxnSpPr>
+          <p:cNvPr id="9" name="直線コネクタ 8">
+            <a:extLst>
+              <a:ext uri="{FF2B5EF4-FFF2-40B4-BE49-F238E27FC236}">
+                <a16:creationId xmlns:a16="http://schemas.microsoft.com/office/drawing/2014/main" id="{C5050915-3630-E2A5-7ADF-DE18615DB75E}"/>
+              </a:ext>
+            </a:extLst>
+          </p:cNvPr>
+          <p:cNvCxnSpPr/>
+          <p:nvPr/>
+        </p:nvCxnSpPr>
+        <p:spPr>
+          <a:xfrm flipV="1">
+            <a:off x="8098310" y="4545188"/>
+            <a:ext cx="0" cy="1457960"/>
+          </a:xfrm>
+          <a:prstGeom prst="line">
+            <a:avLst/>
+          </a:prstGeom>
+        </p:spPr>
+        <p:style>
+          <a:lnRef idx="1">
+            <a:schemeClr val="accent1"/>
+          </a:lnRef>
+          <a:fillRef idx="0">
+            <a:schemeClr val="accent1"/>
+          </a:fillRef>
+          <a:effectRef idx="0">
+            <a:schemeClr val="accent1"/>
+          </a:effectRef>
+          <a:fontRef idx="minor">
+            <a:schemeClr val="tx1"/>
+          </a:fontRef>
+        </p:style>
+      </p:cxnSp>
+      <p:cxnSp>
+        <p:nvCxnSpPr>
+          <p:cNvPr id="10" name="直線コネクタ 9">
+            <a:extLst>
+              <a:ext uri="{FF2B5EF4-FFF2-40B4-BE49-F238E27FC236}">
+                <a16:creationId xmlns:a16="http://schemas.microsoft.com/office/drawing/2014/main" id="{9D823FEC-3706-4E35-15BD-167C35D2DF64}"/>
+              </a:ext>
+            </a:extLst>
+          </p:cNvPr>
+          <p:cNvCxnSpPr/>
+          <p:nvPr/>
+        </p:nvCxnSpPr>
+        <p:spPr>
+          <a:xfrm flipV="1">
+            <a:off x="8541128" y="4545188"/>
+            <a:ext cx="0" cy="1457960"/>
+          </a:xfrm>
+          <a:prstGeom prst="line">
+            <a:avLst/>
+          </a:prstGeom>
+        </p:spPr>
+        <p:style>
+          <a:lnRef idx="1">
+            <a:schemeClr val="accent1"/>
+          </a:lnRef>
+          <a:fillRef idx="0">
+            <a:schemeClr val="accent1"/>
+          </a:fillRef>
+          <a:effectRef idx="0">
+            <a:schemeClr val="accent1"/>
+          </a:effectRef>
+          <a:fontRef idx="minor">
+            <a:schemeClr val="tx1"/>
+          </a:fontRef>
+        </p:style>
+      </p:cxnSp>
+      <p:cxnSp>
+        <p:nvCxnSpPr>
+          <p:cNvPr id="11" name="直線コネクタ 10">
+            <a:extLst>
+              <a:ext uri="{FF2B5EF4-FFF2-40B4-BE49-F238E27FC236}">
+                <a16:creationId xmlns:a16="http://schemas.microsoft.com/office/drawing/2014/main" id="{CB69AA8A-F76E-19B7-F52A-62688531C995}"/>
+              </a:ext>
+            </a:extLst>
+          </p:cNvPr>
+          <p:cNvCxnSpPr/>
+          <p:nvPr/>
+        </p:nvCxnSpPr>
+        <p:spPr>
+          <a:xfrm flipV="1">
+            <a:off x="9463738" y="4545188"/>
+            <a:ext cx="0" cy="1457960"/>
+          </a:xfrm>
+          <a:prstGeom prst="line">
+            <a:avLst/>
+          </a:prstGeom>
+        </p:spPr>
+        <p:style>
+          <a:lnRef idx="1">
+            <a:schemeClr val="accent1"/>
+          </a:lnRef>
+          <a:fillRef idx="0">
+            <a:schemeClr val="accent1"/>
+          </a:fillRef>
+          <a:effectRef idx="0">
+            <a:schemeClr val="accent1"/>
+          </a:effectRef>
+          <a:fontRef idx="minor">
+            <a:schemeClr val="tx1"/>
+          </a:fontRef>
+        </p:style>
+      </p:cxnSp>
+      <p:cxnSp>
+        <p:nvCxnSpPr>
+          <p:cNvPr id="12" name="直線コネクタ 11">
+            <a:extLst>
+              <a:ext uri="{FF2B5EF4-FFF2-40B4-BE49-F238E27FC236}">
+                <a16:creationId xmlns:a16="http://schemas.microsoft.com/office/drawing/2014/main" id="{918E08DB-4E50-6936-FDD3-351FFB15DDD1}"/>
+              </a:ext>
+            </a:extLst>
+          </p:cNvPr>
+          <p:cNvCxnSpPr/>
+          <p:nvPr/>
+        </p:nvCxnSpPr>
+        <p:spPr>
+          <a:xfrm flipV="1">
+            <a:off x="10377932" y="4545188"/>
+            <a:ext cx="0" cy="1457960"/>
+          </a:xfrm>
+          <a:prstGeom prst="line">
+            <a:avLst/>
+          </a:prstGeom>
+        </p:spPr>
+        <p:style>
+          <a:lnRef idx="1">
+            <a:schemeClr val="accent1"/>
+          </a:lnRef>
+          <a:fillRef idx="0">
+            <a:schemeClr val="accent1"/>
+          </a:fillRef>
+          <a:effectRef idx="0">
+            <a:schemeClr val="accent1"/>
+          </a:effectRef>
+          <a:fontRef idx="minor">
+            <a:schemeClr val="tx1"/>
+          </a:fontRef>
+        </p:style>
+      </p:cxnSp>
+      <p:cxnSp>
+        <p:nvCxnSpPr>
+          <p:cNvPr id="13" name="直線コネクタ 12">
+            <a:extLst>
+              <a:ext uri="{FF2B5EF4-FFF2-40B4-BE49-F238E27FC236}">
+                <a16:creationId xmlns:a16="http://schemas.microsoft.com/office/drawing/2014/main" id="{52F6C60D-C359-0ED8-CA78-EB984691792C}"/>
+              </a:ext>
+            </a:extLst>
+          </p:cNvPr>
+          <p:cNvCxnSpPr/>
+          <p:nvPr/>
+        </p:nvCxnSpPr>
+        <p:spPr>
+          <a:xfrm flipV="1">
+            <a:off x="11311480" y="4545188"/>
+            <a:ext cx="0" cy="1457960"/>
+          </a:xfrm>
+          <a:prstGeom prst="line">
+            <a:avLst/>
+          </a:prstGeom>
+        </p:spPr>
+        <p:style>
+          <a:lnRef idx="1">
+            <a:schemeClr val="accent1"/>
+          </a:lnRef>
+          <a:fillRef idx="0">
+            <a:schemeClr val="accent1"/>
+          </a:fillRef>
+          <a:effectRef idx="0">
+            <a:schemeClr val="accent1"/>
+          </a:effectRef>
+          <a:fontRef idx="minor">
+            <a:schemeClr val="tx1"/>
+          </a:fontRef>
+        </p:style>
+      </p:cxnSp>
+      <p:cxnSp>
+        <p:nvCxnSpPr>
+          <p:cNvPr id="14" name="直線コネクタ 13">
+            <a:extLst>
+              <a:ext uri="{FF2B5EF4-FFF2-40B4-BE49-F238E27FC236}">
+                <a16:creationId xmlns:a16="http://schemas.microsoft.com/office/drawing/2014/main" id="{D5940EF9-529D-462E-75C3-0DA1584A0883}"/>
+              </a:ext>
+            </a:extLst>
+          </p:cNvPr>
+          <p:cNvCxnSpPr/>
+          <p:nvPr/>
+        </p:nvCxnSpPr>
+        <p:spPr>
+          <a:xfrm flipV="1">
+            <a:off x="11770310" y="4545188"/>
+            <a:ext cx="0" cy="1457960"/>
+          </a:xfrm>
+          <a:prstGeom prst="line">
+            <a:avLst/>
+          </a:prstGeom>
+        </p:spPr>
+        <p:style>
+          <a:lnRef idx="1">
+            <a:schemeClr val="accent1"/>
+          </a:lnRef>
+          <a:fillRef idx="0">
+            <a:schemeClr val="accent1"/>
+          </a:fillRef>
+          <a:effectRef idx="0">
+            <a:schemeClr val="accent1"/>
+          </a:effectRef>
+          <a:fontRef idx="minor">
+            <a:schemeClr val="tx1"/>
+          </a:fontRef>
+        </p:style>
+      </p:cxnSp>
+      <p:cxnSp>
+        <p:nvCxnSpPr>
+          <p:cNvPr id="15" name="直線矢印コネクタ 14">
+            <a:extLst>
+              <a:ext uri="{FF2B5EF4-FFF2-40B4-BE49-F238E27FC236}">
+                <a16:creationId xmlns:a16="http://schemas.microsoft.com/office/drawing/2014/main" id="{22174F37-FE31-EB71-A426-2F193BE7B435}"/>
+              </a:ext>
+            </a:extLst>
+          </p:cNvPr>
+          <p:cNvCxnSpPr>
+            <a:cxnSpLocks/>
+          </p:cNvCxnSpPr>
+          <p:nvPr/>
+        </p:nvCxnSpPr>
+        <p:spPr>
+          <a:xfrm>
+            <a:off x="8541128" y="5561188"/>
+            <a:ext cx="922610" cy="0"/>
+          </a:xfrm>
+          <a:prstGeom prst="straightConnector1">
+            <a:avLst/>
+          </a:prstGeom>
+          <a:ln>
+            <a:headEnd type="triangle"/>
+            <a:tailEnd type="triangle"/>
+          </a:ln>
+        </p:spPr>
+        <p:style>
+          <a:lnRef idx="1">
+            <a:schemeClr val="accent1"/>
+          </a:lnRef>
+          <a:fillRef idx="0">
+            <a:schemeClr val="accent1"/>
+          </a:fillRef>
+          <a:effectRef idx="0">
+            <a:schemeClr val="accent1"/>
+          </a:effectRef>
+          <a:fontRef idx="minor">
+            <a:schemeClr val="tx1"/>
+          </a:fontRef>
+        </p:style>
+      </p:cxnSp>
+      <p:cxnSp>
+        <p:nvCxnSpPr>
+          <p:cNvPr id="16" name="直線矢印コネクタ 15">
+            <a:extLst>
+              <a:ext uri="{FF2B5EF4-FFF2-40B4-BE49-F238E27FC236}">
+                <a16:creationId xmlns:a16="http://schemas.microsoft.com/office/drawing/2014/main" id="{5FD670D4-1FB4-8201-71D9-8173AED2B712}"/>
+              </a:ext>
+            </a:extLst>
+          </p:cNvPr>
+          <p:cNvCxnSpPr>
+            <a:cxnSpLocks/>
+          </p:cNvCxnSpPr>
+          <p:nvPr/>
+        </p:nvCxnSpPr>
+        <p:spPr>
+          <a:xfrm>
+            <a:off x="9474676" y="5561188"/>
+            <a:ext cx="903256" cy="0"/>
+          </a:xfrm>
+          <a:prstGeom prst="straightConnector1">
+            <a:avLst/>
+          </a:prstGeom>
+          <a:ln>
+            <a:headEnd type="triangle"/>
+            <a:tailEnd type="triangle"/>
+          </a:ln>
+        </p:spPr>
+        <p:style>
+          <a:lnRef idx="1">
+            <a:schemeClr val="accent1"/>
+          </a:lnRef>
+          <a:fillRef idx="0">
+            <a:schemeClr val="accent1"/>
+          </a:fillRef>
+          <a:effectRef idx="0">
+            <a:schemeClr val="accent1"/>
+          </a:effectRef>
+          <a:fontRef idx="minor">
+            <a:schemeClr val="tx1"/>
+          </a:fontRef>
+        </p:style>
+      </p:cxnSp>
+      <p:cxnSp>
+        <p:nvCxnSpPr>
+          <p:cNvPr id="17" name="直線矢印コネクタ 16">
+            <a:extLst>
+              <a:ext uri="{FF2B5EF4-FFF2-40B4-BE49-F238E27FC236}">
+                <a16:creationId xmlns:a16="http://schemas.microsoft.com/office/drawing/2014/main" id="{C134763A-ED88-F781-F5A0-D4F99EA40A93}"/>
+              </a:ext>
+            </a:extLst>
+          </p:cNvPr>
+          <p:cNvCxnSpPr>
+            <a:cxnSpLocks/>
+          </p:cNvCxnSpPr>
+          <p:nvPr/>
+        </p:nvCxnSpPr>
+        <p:spPr>
+          <a:xfrm>
+            <a:off x="10377932" y="5562881"/>
+            <a:ext cx="933548" cy="0"/>
+          </a:xfrm>
+          <a:prstGeom prst="straightConnector1">
+            <a:avLst/>
+          </a:prstGeom>
+          <a:ln>
+            <a:headEnd type="triangle"/>
+            <a:tailEnd type="triangle"/>
+          </a:ln>
+        </p:spPr>
+        <p:style>
+          <a:lnRef idx="1">
+            <a:schemeClr val="accent1"/>
+          </a:lnRef>
+          <a:fillRef idx="0">
+            <a:schemeClr val="accent1"/>
+          </a:fillRef>
+          <a:effectRef idx="0">
+            <a:schemeClr val="accent1"/>
+          </a:effectRef>
+          <a:fontRef idx="minor">
+            <a:schemeClr val="tx1"/>
+          </a:fontRef>
+        </p:style>
+      </p:cxnSp>
+      <p:cxnSp>
+        <p:nvCxnSpPr>
+          <p:cNvPr id="18" name="直線矢印コネクタ 17">
+            <a:extLst>
+              <a:ext uri="{FF2B5EF4-FFF2-40B4-BE49-F238E27FC236}">
+                <a16:creationId xmlns:a16="http://schemas.microsoft.com/office/drawing/2014/main" id="{A39B7641-2A89-4359-800A-D0E06F8B8B75}"/>
+              </a:ext>
+            </a:extLst>
+          </p:cNvPr>
+          <p:cNvCxnSpPr>
+            <a:cxnSpLocks/>
+          </p:cNvCxnSpPr>
+          <p:nvPr/>
+        </p:nvCxnSpPr>
+        <p:spPr>
+          <a:xfrm>
+            <a:off x="11311480" y="5561188"/>
+            <a:ext cx="458830" cy="0"/>
+          </a:xfrm>
+          <a:prstGeom prst="straightConnector1">
+            <a:avLst/>
+          </a:prstGeom>
+          <a:ln>
+            <a:headEnd type="triangle"/>
+            <a:tailEnd type="triangle"/>
+          </a:ln>
+        </p:spPr>
+        <p:style>
+          <a:lnRef idx="1">
+            <a:schemeClr val="accent1"/>
+          </a:lnRef>
+          <a:fillRef idx="0">
+            <a:schemeClr val="accent1"/>
+          </a:fillRef>
+          <a:effectRef idx="0">
+            <a:schemeClr val="accent1"/>
+          </a:effectRef>
+          <a:fontRef idx="minor">
+            <a:schemeClr val="tx1"/>
+          </a:fontRef>
+        </p:style>
+      </p:cxnSp>
+      <p:cxnSp>
+        <p:nvCxnSpPr>
+          <p:cNvPr id="19" name="直線矢印コネクタ 18">
+            <a:extLst>
+              <a:ext uri="{FF2B5EF4-FFF2-40B4-BE49-F238E27FC236}">
+                <a16:creationId xmlns:a16="http://schemas.microsoft.com/office/drawing/2014/main" id="{B7137E33-CF2A-2E5A-9B1C-7B4D324CEBC3}"/>
+              </a:ext>
+            </a:extLst>
+          </p:cNvPr>
+          <p:cNvCxnSpPr>
+            <a:cxnSpLocks/>
+          </p:cNvCxnSpPr>
+          <p:nvPr/>
+        </p:nvCxnSpPr>
+        <p:spPr>
+          <a:xfrm>
+            <a:off x="8082298" y="5561188"/>
+            <a:ext cx="458830" cy="0"/>
+          </a:xfrm>
+          <a:prstGeom prst="straightConnector1">
+            <a:avLst/>
+          </a:prstGeom>
+          <a:ln>
+            <a:headEnd type="triangle"/>
+            <a:tailEnd type="triangle"/>
+          </a:ln>
+        </p:spPr>
+        <p:style>
+          <a:lnRef idx="1">
+            <a:schemeClr val="accent1"/>
+          </a:lnRef>
+          <a:fillRef idx="0">
+            <a:schemeClr val="accent1"/>
+          </a:fillRef>
+          <a:effectRef idx="0">
+            <a:schemeClr val="accent1"/>
+          </a:effectRef>
+          <a:fontRef idx="minor">
+            <a:schemeClr val="tx1"/>
+          </a:fontRef>
+        </p:style>
+      </p:cxnSp>
+    </p:spTree>
+    <p:extLst>
+      <p:ext uri="{BB962C8B-B14F-4D97-AF65-F5344CB8AC3E}">
+        <p14:creationId xmlns:p14="http://schemas.microsoft.com/office/powerpoint/2010/main" val="3266546444"/>
+      </p:ext>
+    </p:extLst>
+  </p:cSld>
+  <p:clrMapOvr>
+    <a:masterClrMapping/>
+  </p:clrMapOvr>
+</p:sld>
+</file>
+
+<file path=ppt/slides/slide16.xml><?xml version="1.0" encoding="utf-8"?>
+<p:sld xmlns:a="http://schemas.openxmlformats.org/drawingml/2006/main" xmlns:r="http://schemas.openxmlformats.org/officeDocument/2006/relationships" xmlns:p="http://schemas.openxmlformats.org/presentationml/2006/main">
+  <p:cSld>
+    <p:spTree>
+      <p:nvGrpSpPr>
+        <p:cNvPr id="1" name=""/>
+        <p:cNvGrpSpPr/>
+        <p:nvPr/>
+      </p:nvGrpSpPr>
+      <p:grpSpPr>
+        <a:xfrm>
+          <a:off x="0" y="0"/>
+          <a:ext cx="0" cy="0"/>
+          <a:chOff x="0" y="0"/>
+          <a:chExt cx="0" cy="0"/>
+        </a:xfrm>
+      </p:grpSpPr>
+      <p:sp>
+        <p:nvSpPr>
+          <p:cNvPr id="2" name="タイトル 1">
+            <a:extLst>
+              <a:ext uri="{FF2B5EF4-FFF2-40B4-BE49-F238E27FC236}">
                 <a16:creationId xmlns:a16="http://schemas.microsoft.com/office/drawing/2014/main" id="{B4853CF9-0C48-86E2-6AA5-722E3F8E1F15}"/>
               </a:ext>
             </a:extLst>
@@ -10224,8 +11641,8 @@
           </a:p>
         </p:txBody>
       </p:sp>
-      <mc:AlternateContent xmlns:mc="http://schemas.openxmlformats.org/markup-compatibility/2006">
-        <mc:Choice xmlns:a14="http://schemas.microsoft.com/office/drawing/2010/main" Requires="a14">
+      <mc:AlternateContent xmlns:mc="http://schemas.openxmlformats.org/markup-compatibility/2006" xmlns:a14="http://schemas.microsoft.com/office/drawing/2010/main">
+        <mc:Choice Requires="a14">
           <p:sp>
             <p:nvSpPr>
               <p:cNvPr id="3" name="コンテンツ プレースホルダー 2">
@@ -10916,7 +12333,7 @@
             </p:txBody>
           </p:sp>
         </mc:Choice>
-        <mc:Fallback>
+        <mc:Fallback xmlns="">
           <p:sp>
             <p:nvSpPr>
               <p:cNvPr id="3" name="コンテンツ プレースホルダー 2">
@@ -11694,7 +13111,7 @@
 </p:sld>
 </file>
 
-<file path=ppt/slides/slide16.xml><?xml version="1.0" encoding="utf-8"?>
+<file path=ppt/slides/slide17.xml><?xml version="1.0" encoding="utf-8"?>
 <p:sld xmlns:a="http://schemas.openxmlformats.org/drawingml/2006/main" xmlns:r="http://schemas.openxmlformats.org/officeDocument/2006/relationships" xmlns:p="http://schemas.openxmlformats.org/presentationml/2006/main">
   <p:cSld>
     <p:spTree>
@@ -11711,8 +13128,8 @@
           <a:chExt cx="0" cy="0"/>
         </a:xfrm>
       </p:grpSpPr>
-      <mc:AlternateContent xmlns:mc="http://schemas.openxmlformats.org/markup-compatibility/2006">
-        <mc:Choice xmlns:a14="http://schemas.microsoft.com/office/drawing/2010/main" Requires="a14">
+      <mc:AlternateContent xmlns:mc="http://schemas.openxmlformats.org/markup-compatibility/2006" xmlns:a14="http://schemas.microsoft.com/office/drawing/2010/main">
+        <mc:Choice Requires="a14">
           <p:sp>
             <p:nvSpPr>
               <p:cNvPr id="3" name="コンテンツ プレースホルダー 2">
@@ -13566,7 +14983,7 @@
             </p:txBody>
           </p:sp>
         </mc:Choice>
-        <mc:Fallback>
+        <mc:Fallback xmlns="">
           <p:sp>
             <p:nvSpPr>
               <p:cNvPr id="3" name="コンテンツ プレースホルダー 2">

--- a/memo/Procedural Physically based BRDF for Real-Time Rendering of.pptx
+++ b/memo/Procedural Physically based BRDF for Real-Time Rendering of.pptx
@@ -20,8 +20,8 @@
     <p:sldId id="265" r:id="rId11"/>
     <p:sldId id="266" r:id="rId12"/>
     <p:sldId id="267" r:id="rId13"/>
-    <p:sldId id="268" r:id="rId14"/>
-    <p:sldId id="269" r:id="rId15"/>
+    <p:sldId id="273" r:id="rId14"/>
+    <p:sldId id="268" r:id="rId15"/>
     <p:sldId id="272" r:id="rId16"/>
     <p:sldId id="270" r:id="rId17"/>
     <p:sldId id="271" r:id="rId18"/>
@@ -213,7 +213,7 @@
           <a:p>
             <a:fld id="{83687C97-18DD-46AD-B79F-22424EBB7FF1}" type="datetimeFigureOut">
               <a:rPr kumimoji="1" lang="ja-JP" altLang="en-US" smtClean="0"/>
-              <a:t>2025/6/29</a:t>
+              <a:t>2025/7/5</a:t>
             </a:fld>
             <a:endParaRPr kumimoji="1" lang="ja-JP" altLang="en-US"/>
           </a:p>
@@ -727,7 +727,7 @@
           <a:p>
             <a:fld id="{73FA4CDC-7D36-4B4A-B488-116582B3A61D}" type="datetimeFigureOut">
               <a:rPr kumimoji="1" lang="ja-JP" altLang="en-US" smtClean="0"/>
-              <a:t>2025/6/29</a:t>
+              <a:t>2025/7/5</a:t>
             </a:fld>
             <a:endParaRPr kumimoji="1" lang="ja-JP" altLang="en-US"/>
           </a:p>
@@ -929,7 +929,7 @@
           <a:p>
             <a:fld id="{73FA4CDC-7D36-4B4A-B488-116582B3A61D}" type="datetimeFigureOut">
               <a:rPr kumimoji="1" lang="ja-JP" altLang="en-US" smtClean="0"/>
-              <a:t>2025/6/29</a:t>
+              <a:t>2025/7/5</a:t>
             </a:fld>
             <a:endParaRPr kumimoji="1" lang="ja-JP" altLang="en-US"/>
           </a:p>
@@ -1141,7 +1141,7 @@
           <a:p>
             <a:fld id="{73FA4CDC-7D36-4B4A-B488-116582B3A61D}" type="datetimeFigureOut">
               <a:rPr kumimoji="1" lang="ja-JP" altLang="en-US" smtClean="0"/>
-              <a:t>2025/6/29</a:t>
+              <a:t>2025/7/5</a:t>
             </a:fld>
             <a:endParaRPr kumimoji="1" lang="ja-JP" altLang="en-US"/>
           </a:p>
@@ -1343,7 +1343,7 @@
           <a:p>
             <a:fld id="{73FA4CDC-7D36-4B4A-B488-116582B3A61D}" type="datetimeFigureOut">
               <a:rPr kumimoji="1" lang="ja-JP" altLang="en-US" smtClean="0"/>
-              <a:t>2025/6/29</a:t>
+              <a:t>2025/7/5</a:t>
             </a:fld>
             <a:endParaRPr kumimoji="1" lang="ja-JP" altLang="en-US"/>
           </a:p>
@@ -1589,7 +1589,7 @@
           <a:p>
             <a:fld id="{73FA4CDC-7D36-4B4A-B488-116582B3A61D}" type="datetimeFigureOut">
               <a:rPr kumimoji="1" lang="ja-JP" altLang="en-US" smtClean="0"/>
-              <a:t>2025/6/29</a:t>
+              <a:t>2025/7/5</a:t>
             </a:fld>
             <a:endParaRPr kumimoji="1" lang="ja-JP" altLang="en-US"/>
           </a:p>
@@ -1885,7 +1885,7 @@
           <a:p>
             <a:fld id="{73FA4CDC-7D36-4B4A-B488-116582B3A61D}" type="datetimeFigureOut">
               <a:rPr kumimoji="1" lang="ja-JP" altLang="en-US" smtClean="0"/>
-              <a:t>2025/6/29</a:t>
+              <a:t>2025/7/5</a:t>
             </a:fld>
             <a:endParaRPr kumimoji="1" lang="ja-JP" altLang="en-US"/>
           </a:p>
@@ -2316,7 +2316,7 @@
           <a:p>
             <a:fld id="{73FA4CDC-7D36-4B4A-B488-116582B3A61D}" type="datetimeFigureOut">
               <a:rPr kumimoji="1" lang="ja-JP" altLang="en-US" smtClean="0"/>
-              <a:t>2025/6/29</a:t>
+              <a:t>2025/7/5</a:t>
             </a:fld>
             <a:endParaRPr kumimoji="1" lang="ja-JP" altLang="en-US"/>
           </a:p>
@@ -2434,7 +2434,7 @@
           <a:p>
             <a:fld id="{73FA4CDC-7D36-4B4A-B488-116582B3A61D}" type="datetimeFigureOut">
               <a:rPr kumimoji="1" lang="ja-JP" altLang="en-US" smtClean="0"/>
-              <a:t>2025/6/29</a:t>
+              <a:t>2025/7/5</a:t>
             </a:fld>
             <a:endParaRPr kumimoji="1" lang="ja-JP" altLang="en-US"/>
           </a:p>
@@ -2529,7 +2529,7 @@
           <a:p>
             <a:fld id="{73FA4CDC-7D36-4B4A-B488-116582B3A61D}" type="datetimeFigureOut">
               <a:rPr kumimoji="1" lang="ja-JP" altLang="en-US" smtClean="0"/>
-              <a:t>2025/6/29</a:t>
+              <a:t>2025/7/5</a:t>
             </a:fld>
             <a:endParaRPr kumimoji="1" lang="ja-JP" altLang="en-US"/>
           </a:p>
@@ -2838,7 +2838,7 @@
           <a:p>
             <a:fld id="{73FA4CDC-7D36-4B4A-B488-116582B3A61D}" type="datetimeFigureOut">
               <a:rPr kumimoji="1" lang="ja-JP" altLang="en-US" smtClean="0"/>
-              <a:t>2025/6/29</a:t>
+              <a:t>2025/7/5</a:t>
             </a:fld>
             <a:endParaRPr kumimoji="1" lang="ja-JP" altLang="en-US"/>
           </a:p>
@@ -3095,7 +3095,7 @@
           <a:p>
             <a:fld id="{73FA4CDC-7D36-4B4A-B488-116582B3A61D}" type="datetimeFigureOut">
               <a:rPr kumimoji="1" lang="ja-JP" altLang="en-US" smtClean="0"/>
-              <a:t>2025/6/29</a:t>
+              <a:t>2025/7/5</a:t>
             </a:fld>
             <a:endParaRPr kumimoji="1" lang="ja-JP" altLang="en-US"/>
           </a:p>
@@ -3340,7 +3340,7 @@
           <a:p>
             <a:fld id="{73FA4CDC-7D36-4B4A-B488-116582B3A61D}" type="datetimeFigureOut">
               <a:rPr kumimoji="1" lang="ja-JP" altLang="en-US" smtClean="0"/>
-              <a:t>2025/6/29</a:t>
+              <a:t>2025/7/5</a:t>
             </a:fld>
             <a:endParaRPr kumimoji="1" lang="ja-JP" altLang="en-US"/>
           </a:p>
@@ -9568,6 +9568,1796 @@
   <p:cSld>
     <p:spTree>
       <p:nvGrpSpPr>
+        <p:cNvPr id="1" name="">
+          <a:extLst>
+            <a:ext uri="{FF2B5EF4-FFF2-40B4-BE49-F238E27FC236}">
+              <a16:creationId xmlns:a16="http://schemas.microsoft.com/office/drawing/2014/main" id="{A30884D1-2776-663D-78D9-B87EBF4D44DE}"/>
+            </a:ext>
+          </a:extLst>
+        </p:cNvPr>
+        <p:cNvGrpSpPr/>
+        <p:nvPr/>
+      </p:nvGrpSpPr>
+      <p:grpSpPr>
+        <a:xfrm>
+          <a:off x="0" y="0"/>
+          <a:ext cx="0" cy="0"/>
+          <a:chOff x="0" y="0"/>
+          <a:chExt cx="0" cy="0"/>
+        </a:xfrm>
+      </p:grpSpPr>
+      <p:sp>
+        <p:nvSpPr>
+          <p:cNvPr id="27" name="タイトル 26">
+            <a:extLst>
+              <a:ext uri="{FF2B5EF4-FFF2-40B4-BE49-F238E27FC236}">
+                <a16:creationId xmlns:a16="http://schemas.microsoft.com/office/drawing/2014/main" id="{8428CD96-DDBA-2770-8C91-DF21BC49170E}"/>
+              </a:ext>
+            </a:extLst>
+          </p:cNvPr>
+          <p:cNvSpPr>
+            <a:spLocks noGrp="1"/>
+          </p:cNvSpPr>
+          <p:nvPr>
+            <p:ph type="title"/>
+          </p:nvPr>
+        </p:nvSpPr>
+        <p:spPr/>
+        <p:txBody>
+          <a:bodyPr/>
+          <a:lstStyle/>
+          <a:p>
+            <a:r>
+              <a:rPr lang="ja-JP" altLang="en-US"/>
+              <a:t>パッチ</a:t>
+            </a:r>
+          </a:p>
+        </p:txBody>
+      </p:sp>
+      <mc:AlternateContent xmlns:mc="http://schemas.openxmlformats.org/markup-compatibility/2006">
+        <mc:Choice xmlns:a14="http://schemas.microsoft.com/office/drawing/2010/main" Requires="a14">
+          <p:sp>
+            <p:nvSpPr>
+              <p:cNvPr id="31" name="コンテンツ プレースホルダー 30">
+                <a:extLst>
+                  <a:ext uri="{FF2B5EF4-FFF2-40B4-BE49-F238E27FC236}">
+                    <a16:creationId xmlns:a16="http://schemas.microsoft.com/office/drawing/2014/main" id="{B6F14DC5-3FD8-0A05-A6B0-57E6B5B91283}"/>
+                  </a:ext>
+                </a:extLst>
+              </p:cNvPr>
+              <p:cNvSpPr>
+                <a:spLocks noGrp="1"/>
+              </p:cNvSpPr>
+              <p:nvPr>
+                <p:ph idx="1"/>
+              </p:nvPr>
+            </p:nvSpPr>
+            <p:spPr/>
+            <p:txBody>
+              <a:bodyPr>
+                <a:normAutofit/>
+              </a:bodyPr>
+              <a:lstStyle/>
+              <a:p>
+                <a:r>
+                  <a:rPr lang="en-US" altLang="ja-JP" sz="2400"/>
+                  <a:t>uv</a:t>
+                </a:r>
+                <a:r>
+                  <a:rPr lang="ja-JP" altLang="en-US" sz="2400"/>
+                  <a:t>マッピングのされ方で見た目が変わってしまう</a:t>
+                </a:r>
+                <a:endParaRPr lang="en-US" altLang="ja-JP" sz="2400"/>
+              </a:p>
+              <a:p>
+                <a:pPr marL="0" indent="0">
+                  <a:buNone/>
+                </a:pPr>
+                <a:r>
+                  <a:rPr lang="ja-JP" altLang="en-US" sz="2400"/>
+                  <a:t>⇒ </a:t>
+                </a:r>
+                <a:r>
+                  <a:rPr lang="en-US" altLang="ja-JP" sz="2400"/>
+                  <a:t>uv</a:t>
+                </a:r>
+                <a:r>
+                  <a:rPr lang="ja-JP" altLang="en-US" sz="2400">
+                    <a:latin typeface="Cambria Math" panose="02040503050406030204" pitchFamily="18" charset="0"/>
+                  </a:rPr>
+                  <a:t>を</a:t>
+                </a:r>
+                <a14:m>
+                  <m:oMath xmlns:m="http://schemas.openxmlformats.org/officeDocument/2006/math">
+                    <m:d>
+                      <m:dPr>
+                        <m:ctrlPr>
+                          <a:rPr lang="en-US" altLang="ja-JP" sz="2400" b="0" i="0" smtClean="0">
+                            <a:latin typeface="Cambria Math" panose="02040503050406030204" pitchFamily="18" charset="0"/>
+                          </a:rPr>
+                        </m:ctrlPr>
+                      </m:dPr>
+                      <m:e>
+                        <m:d>
+                          <m:dPr>
+                            <m:begChr m:val="|"/>
+                            <m:endChr m:val="|"/>
+                            <m:ctrlPr>
+                              <a:rPr lang="en-US" altLang="ja-JP" sz="2400" b="0" i="0" smtClean="0">
+                                <a:latin typeface="Cambria Math" panose="02040503050406030204" pitchFamily="18" charset="0"/>
+                              </a:rPr>
+                            </m:ctrlPr>
+                          </m:dPr>
+                          <m:e>
+                            <m:f>
+                              <m:fPr>
+                                <m:ctrlPr>
+                                  <a:rPr lang="en-US" altLang="ja-JP" sz="2400" i="1" smtClean="0">
+                                    <a:latin typeface="Cambria Math" panose="02040503050406030204" pitchFamily="18" charset="0"/>
+                                  </a:rPr>
+                                </m:ctrlPr>
+                              </m:fPr>
+                              <m:num>
+                                <m:r>
+                                  <a:rPr lang="en-US" altLang="ja-JP" sz="2400" i="1">
+                                    <a:latin typeface="Cambria Math" panose="02040503050406030204" pitchFamily="18" charset="0"/>
+                                  </a:rPr>
+                                  <m:t>𝜕</m:t>
+                                </m:r>
+                                <m:r>
+                                  <a:rPr lang="en-US" altLang="ja-JP" sz="2400" i="1">
+                                    <a:latin typeface="Cambria Math" panose="02040503050406030204" pitchFamily="18" charset="0"/>
+                                  </a:rPr>
+                                  <m:t>𝑝</m:t>
+                                </m:r>
+                              </m:num>
+                              <m:den>
+                                <m:r>
+                                  <a:rPr lang="en-US" altLang="ja-JP" sz="2400" i="1">
+                                    <a:latin typeface="Cambria Math" panose="02040503050406030204" pitchFamily="18" charset="0"/>
+                                  </a:rPr>
+                                  <m:t>𝜕</m:t>
+                                </m:r>
+                                <m:r>
+                                  <a:rPr lang="en-US" altLang="ja-JP" sz="2400" i="1">
+                                    <a:latin typeface="Cambria Math" panose="02040503050406030204" pitchFamily="18" charset="0"/>
+                                  </a:rPr>
+                                  <m:t>𝑢</m:t>
+                                </m:r>
+                              </m:den>
+                            </m:f>
+                          </m:e>
+                        </m:d>
+                        <m:r>
+                          <a:rPr lang="en-US" altLang="ja-JP" sz="2400" b="0" i="1" smtClean="0">
+                            <a:latin typeface="Cambria Math" panose="02040503050406030204" pitchFamily="18" charset="0"/>
+                          </a:rPr>
+                          <m:t>,</m:t>
+                        </m:r>
+                        <m:d>
+                          <m:dPr>
+                            <m:begChr m:val="|"/>
+                            <m:endChr m:val="|"/>
+                            <m:ctrlPr>
+                              <a:rPr lang="en-US" altLang="ja-JP" sz="2400" b="0" i="1" smtClean="0">
+                                <a:latin typeface="Cambria Math" panose="02040503050406030204" pitchFamily="18" charset="0"/>
+                              </a:rPr>
+                            </m:ctrlPr>
+                          </m:dPr>
+                          <m:e>
+                            <m:f>
+                              <m:fPr>
+                                <m:ctrlPr>
+                                  <a:rPr lang="en-US" altLang="ja-JP" sz="2400" b="0" i="1" smtClean="0">
+                                    <a:latin typeface="Cambria Math" panose="02040503050406030204" pitchFamily="18" charset="0"/>
+                                  </a:rPr>
+                                </m:ctrlPr>
+                              </m:fPr>
+                              <m:num>
+                                <m:r>
+                                  <a:rPr lang="en-US" altLang="ja-JP" sz="2400" b="0" i="1" smtClean="0">
+                                    <a:latin typeface="Cambria Math" panose="02040503050406030204" pitchFamily="18" charset="0"/>
+                                  </a:rPr>
+                                  <m:t>𝜕</m:t>
+                                </m:r>
+                                <m:r>
+                                  <a:rPr lang="en-US" altLang="ja-JP" sz="2400" b="0" i="1" smtClean="0">
+                                    <a:latin typeface="Cambria Math" panose="02040503050406030204" pitchFamily="18" charset="0"/>
+                                  </a:rPr>
+                                  <m:t>𝑝</m:t>
+                                </m:r>
+                              </m:num>
+                              <m:den>
+                                <m:r>
+                                  <a:rPr lang="en-US" altLang="ja-JP" sz="2400" b="0" i="1" smtClean="0">
+                                    <a:latin typeface="Cambria Math" panose="02040503050406030204" pitchFamily="18" charset="0"/>
+                                  </a:rPr>
+                                  <m:t>𝜕</m:t>
+                                </m:r>
+                                <m:r>
+                                  <a:rPr lang="en-US" altLang="ja-JP" sz="2400" b="0" i="1" smtClean="0">
+                                    <a:latin typeface="Cambria Math" panose="02040503050406030204" pitchFamily="18" charset="0"/>
+                                  </a:rPr>
+                                  <m:t>𝑣</m:t>
+                                </m:r>
+                              </m:den>
+                            </m:f>
+                          </m:e>
+                        </m:d>
+                      </m:e>
+                    </m:d>
+                  </m:oMath>
+                </a14:m>
+                <a:r>
+                  <a:rPr lang="ja-JP" altLang="en-US" sz="2400"/>
+                  <a:t>で乗算 </a:t>
+                </a:r>
+                <a:r>
+                  <a:rPr lang="en-US" altLang="ja-JP" sz="2400"/>
+                  <a:t>&amp; </a:t>
+                </a:r>
+                <a14:m>
+                  <m:oMath xmlns:m="http://schemas.openxmlformats.org/officeDocument/2006/math">
+                    <m:f>
+                      <m:fPr>
+                        <m:ctrlPr>
+                          <a:rPr lang="en-US" altLang="ja-JP" sz="2400" i="1">
+                            <a:latin typeface="Cambria Math" panose="02040503050406030204" pitchFamily="18" charset="0"/>
+                          </a:rPr>
+                        </m:ctrlPr>
+                      </m:fPr>
+                      <m:num>
+                        <m:r>
+                          <a:rPr lang="en-US" altLang="ja-JP" sz="2400" i="1">
+                            <a:latin typeface="Cambria Math" panose="02040503050406030204" pitchFamily="18" charset="0"/>
+                          </a:rPr>
+                          <m:t>𝜕</m:t>
+                        </m:r>
+                        <m:r>
+                          <a:rPr lang="en-US" altLang="ja-JP" sz="2400" i="1">
+                            <a:latin typeface="Cambria Math" panose="02040503050406030204" pitchFamily="18" charset="0"/>
+                          </a:rPr>
+                          <m:t>𝑝</m:t>
+                        </m:r>
+                      </m:num>
+                      <m:den>
+                        <m:r>
+                          <a:rPr lang="en-US" altLang="ja-JP" sz="2400" i="1">
+                            <a:latin typeface="Cambria Math" panose="02040503050406030204" pitchFamily="18" charset="0"/>
+                          </a:rPr>
+                          <m:t>𝜕</m:t>
+                        </m:r>
+                        <m:r>
+                          <a:rPr lang="en-US" altLang="ja-JP" sz="2400" i="1">
+                            <a:latin typeface="Cambria Math" panose="02040503050406030204" pitchFamily="18" charset="0"/>
+                          </a:rPr>
+                          <m:t>𝑢</m:t>
+                        </m:r>
+                      </m:den>
+                    </m:f>
+                    <m:r>
+                      <a:rPr lang="en-US" altLang="ja-JP" sz="2400" b="0" i="1" smtClean="0">
+                        <a:latin typeface="Cambria Math" panose="02040503050406030204" pitchFamily="18" charset="0"/>
+                      </a:rPr>
+                      <m:t>,</m:t>
+                    </m:r>
+                    <m:f>
+                      <m:fPr>
+                        <m:ctrlPr>
+                          <a:rPr lang="en-US" altLang="ja-JP" sz="2400" i="1">
+                            <a:latin typeface="Cambria Math" panose="02040503050406030204" pitchFamily="18" charset="0"/>
+                          </a:rPr>
+                        </m:ctrlPr>
+                      </m:fPr>
+                      <m:num>
+                        <m:r>
+                          <a:rPr lang="en-US" altLang="ja-JP" sz="2400" i="1">
+                            <a:latin typeface="Cambria Math" panose="02040503050406030204" pitchFamily="18" charset="0"/>
+                          </a:rPr>
+                          <m:t>𝜕</m:t>
+                        </m:r>
+                        <m:r>
+                          <a:rPr lang="en-US" altLang="ja-JP" sz="2400" i="1">
+                            <a:latin typeface="Cambria Math" panose="02040503050406030204" pitchFamily="18" charset="0"/>
+                          </a:rPr>
+                          <m:t>𝑝</m:t>
+                        </m:r>
+                      </m:num>
+                      <m:den>
+                        <m:r>
+                          <a:rPr lang="en-US" altLang="ja-JP" sz="2400" i="1">
+                            <a:latin typeface="Cambria Math" panose="02040503050406030204" pitchFamily="18" charset="0"/>
+                          </a:rPr>
+                          <m:t>𝜕</m:t>
+                        </m:r>
+                        <m:r>
+                          <a:rPr lang="en-US" altLang="ja-JP" sz="2400" b="0" i="1" smtClean="0">
+                            <a:latin typeface="Cambria Math" panose="02040503050406030204" pitchFamily="18" charset="0"/>
+                          </a:rPr>
+                          <m:t>𝑣</m:t>
+                        </m:r>
+                      </m:den>
+                    </m:f>
+                  </m:oMath>
+                </a14:m>
+                <a:r>
+                  <a:rPr lang="ja-JP" altLang="en-US" sz="2400"/>
+                  <a:t>は正規化</a:t>
+                </a:r>
+                <a:endParaRPr lang="en-US" altLang="ja-JP" sz="2400"/>
+              </a:p>
+            </p:txBody>
+          </p:sp>
+        </mc:Choice>
+        <mc:Fallback>
+          <p:sp>
+            <p:nvSpPr>
+              <p:cNvPr id="31" name="コンテンツ プレースホルダー 30">
+                <a:extLst>
+                  <a:ext uri="{FF2B5EF4-FFF2-40B4-BE49-F238E27FC236}">
+                    <a16:creationId xmlns:a16="http://schemas.microsoft.com/office/drawing/2014/main" id="{B6F14DC5-3FD8-0A05-A6B0-57E6B5B91283}"/>
+                  </a:ext>
+                </a:extLst>
+              </p:cNvPr>
+              <p:cNvSpPr>
+                <a:spLocks noGrp="1" noRot="1" noChangeAspect="1" noMove="1" noResize="1" noEditPoints="1" noAdjustHandles="1" noChangeArrowheads="1" noChangeShapeType="1" noTextEdit="1"/>
+              </p:cNvSpPr>
+              <p:nvPr>
+                <p:ph idx="1"/>
+              </p:nvPr>
+            </p:nvSpPr>
+            <p:spPr>
+              <a:blipFill>
+                <a:blip r:embed="rId2"/>
+                <a:stretch>
+                  <a:fillRect l="-928" t="-1961"/>
+                </a:stretch>
+              </a:blipFill>
+            </p:spPr>
+            <p:txBody>
+              <a:bodyPr/>
+              <a:lstStyle/>
+              <a:p>
+                <a:r>
+                  <a:rPr lang="ja-JP" altLang="en-US">
+                    <a:noFill/>
+                  </a:rPr>
+                  <a:t> </a:t>
+                </a:r>
+              </a:p>
+            </p:txBody>
+          </p:sp>
+        </mc:Fallback>
+      </mc:AlternateContent>
+      <p:sp>
+        <p:nvSpPr>
+          <p:cNvPr id="2" name="二等辺三角形 1">
+            <a:extLst>
+              <a:ext uri="{FF2B5EF4-FFF2-40B4-BE49-F238E27FC236}">
+                <a16:creationId xmlns:a16="http://schemas.microsoft.com/office/drawing/2014/main" id="{30FB154D-2FA9-B53F-A9E4-B8EC5467891D}"/>
+              </a:ext>
+            </a:extLst>
+          </p:cNvPr>
+          <p:cNvSpPr/>
+          <p:nvPr/>
+        </p:nvSpPr>
+        <p:spPr>
+          <a:xfrm>
+            <a:off x="3681136" y="3712807"/>
+            <a:ext cx="806334" cy="695116"/>
+          </a:xfrm>
+          <a:prstGeom prst="triangle">
+            <a:avLst/>
+          </a:prstGeom>
+        </p:spPr>
+        <p:style>
+          <a:lnRef idx="2">
+            <a:schemeClr val="accent1">
+              <a:shade val="15000"/>
+            </a:schemeClr>
+          </a:lnRef>
+          <a:fillRef idx="1">
+            <a:schemeClr val="accent1"/>
+          </a:fillRef>
+          <a:effectRef idx="0">
+            <a:schemeClr val="accent1"/>
+          </a:effectRef>
+          <a:fontRef idx="minor">
+            <a:schemeClr val="lt1"/>
+          </a:fontRef>
+        </p:style>
+        <p:txBody>
+          <a:bodyPr rtlCol="0" anchor="ctr"/>
+          <a:lstStyle/>
+          <a:p>
+            <a:pPr algn="ctr"/>
+            <a:endParaRPr kumimoji="1" lang="ja-JP" altLang="en-US"/>
+          </a:p>
+        </p:txBody>
+      </p:sp>
+      <p:sp>
+        <p:nvSpPr>
+          <p:cNvPr id="4" name="二等辺三角形 3">
+            <a:extLst>
+              <a:ext uri="{FF2B5EF4-FFF2-40B4-BE49-F238E27FC236}">
+                <a16:creationId xmlns:a16="http://schemas.microsoft.com/office/drawing/2014/main" id="{7BCC009D-A25F-9087-D460-A6616C4FB05E}"/>
+              </a:ext>
+            </a:extLst>
+          </p:cNvPr>
+          <p:cNvSpPr/>
+          <p:nvPr/>
+        </p:nvSpPr>
+        <p:spPr>
+          <a:xfrm>
+            <a:off x="6030421" y="3551917"/>
+            <a:ext cx="911019" cy="785361"/>
+          </a:xfrm>
+          <a:prstGeom prst="triangle">
+            <a:avLst/>
+          </a:prstGeom>
+        </p:spPr>
+        <p:style>
+          <a:lnRef idx="2">
+            <a:schemeClr val="accent1">
+              <a:shade val="15000"/>
+            </a:schemeClr>
+          </a:lnRef>
+          <a:fillRef idx="1">
+            <a:schemeClr val="accent1"/>
+          </a:fillRef>
+          <a:effectRef idx="0">
+            <a:schemeClr val="accent1"/>
+          </a:effectRef>
+          <a:fontRef idx="minor">
+            <a:schemeClr val="lt1"/>
+          </a:fontRef>
+        </p:style>
+        <p:txBody>
+          <a:bodyPr rtlCol="0" anchor="ctr"/>
+          <a:lstStyle/>
+          <a:p>
+            <a:pPr algn="ctr"/>
+            <a:endParaRPr kumimoji="1" lang="ja-JP" altLang="en-US"/>
+          </a:p>
+        </p:txBody>
+      </p:sp>
+      <p:sp>
+        <p:nvSpPr>
+          <p:cNvPr id="5" name="二等辺三角形 4">
+            <a:extLst>
+              <a:ext uri="{FF2B5EF4-FFF2-40B4-BE49-F238E27FC236}">
+                <a16:creationId xmlns:a16="http://schemas.microsoft.com/office/drawing/2014/main" id="{6D064910-FFA4-AC49-FD4B-59C2986DA0E6}"/>
+              </a:ext>
+            </a:extLst>
+          </p:cNvPr>
+          <p:cNvSpPr/>
+          <p:nvPr/>
+        </p:nvSpPr>
+        <p:spPr>
+          <a:xfrm>
+            <a:off x="6030421" y="3879639"/>
+            <a:ext cx="2376000" cy="2048278"/>
+          </a:xfrm>
+          <a:prstGeom prst="triangle">
+            <a:avLst/>
+          </a:prstGeom>
+          <a:solidFill>
+            <a:schemeClr val="accent6"/>
+          </a:solidFill>
+        </p:spPr>
+        <p:style>
+          <a:lnRef idx="2">
+            <a:schemeClr val="accent1">
+              <a:shade val="15000"/>
+            </a:schemeClr>
+          </a:lnRef>
+          <a:fillRef idx="1">
+            <a:schemeClr val="accent1"/>
+          </a:fillRef>
+          <a:effectRef idx="0">
+            <a:schemeClr val="accent1"/>
+          </a:effectRef>
+          <a:fontRef idx="minor">
+            <a:schemeClr val="lt1"/>
+          </a:fontRef>
+        </p:style>
+        <p:txBody>
+          <a:bodyPr rtlCol="0" anchor="ctr"/>
+          <a:lstStyle/>
+          <a:p>
+            <a:pPr algn="ctr"/>
+            <a:endParaRPr kumimoji="1" lang="ja-JP" altLang="en-US"/>
+          </a:p>
+        </p:txBody>
+      </p:sp>
+      <p:sp>
+        <p:nvSpPr>
+          <p:cNvPr id="6" name="二等辺三角形 5">
+            <a:extLst>
+              <a:ext uri="{FF2B5EF4-FFF2-40B4-BE49-F238E27FC236}">
+                <a16:creationId xmlns:a16="http://schemas.microsoft.com/office/drawing/2014/main" id="{E35BED27-9988-053C-1943-9A6DCB3C0D83}"/>
+              </a:ext>
+            </a:extLst>
+          </p:cNvPr>
+          <p:cNvSpPr/>
+          <p:nvPr/>
+        </p:nvSpPr>
+        <p:spPr>
+          <a:xfrm>
+            <a:off x="3653991" y="5100705"/>
+            <a:ext cx="806334" cy="695116"/>
+          </a:xfrm>
+          <a:prstGeom prst="triangle">
+            <a:avLst/>
+          </a:prstGeom>
+          <a:solidFill>
+            <a:schemeClr val="accent6"/>
+          </a:solidFill>
+        </p:spPr>
+        <p:style>
+          <a:lnRef idx="2">
+            <a:schemeClr val="accent1">
+              <a:shade val="15000"/>
+            </a:schemeClr>
+          </a:lnRef>
+          <a:fillRef idx="1">
+            <a:schemeClr val="accent1"/>
+          </a:fillRef>
+          <a:effectRef idx="0">
+            <a:schemeClr val="accent1"/>
+          </a:effectRef>
+          <a:fontRef idx="minor">
+            <a:schemeClr val="lt1"/>
+          </a:fontRef>
+        </p:style>
+        <p:txBody>
+          <a:bodyPr rtlCol="0" anchor="ctr"/>
+          <a:lstStyle/>
+          <a:p>
+            <a:pPr algn="ctr"/>
+            <a:endParaRPr kumimoji="1" lang="ja-JP" altLang="en-US"/>
+          </a:p>
+        </p:txBody>
+      </p:sp>
+      <p:graphicFrame>
+        <p:nvGraphicFramePr>
+          <p:cNvPr id="7" name="表 6">
+            <a:extLst>
+              <a:ext uri="{FF2B5EF4-FFF2-40B4-BE49-F238E27FC236}">
+                <a16:creationId xmlns:a16="http://schemas.microsoft.com/office/drawing/2014/main" id="{93E928B6-2469-5815-95B6-9892F21E67E3}"/>
+              </a:ext>
+            </a:extLst>
+          </p:cNvPr>
+          <p:cNvGraphicFramePr>
+            <a:graphicFrameLocks noGrp="1"/>
+          </p:cNvGraphicFramePr>
+          <p:nvPr>
+            <p:extLst>
+              <p:ext uri="{D42A27DB-BD31-4B8C-83A1-F6EECF244321}">
+                <p14:modId xmlns:p14="http://schemas.microsoft.com/office/powerpoint/2010/main" val="2037615815"/>
+              </p:ext>
+            </p:extLst>
+          </p:nvPr>
+        </p:nvGraphicFramePr>
+        <p:xfrm>
+          <a:off x="6030421" y="3551917"/>
+          <a:ext cx="2376000" cy="2376000"/>
+        </p:xfrm>
+        <a:graphic>
+          <a:graphicData uri="http://schemas.openxmlformats.org/drawingml/2006/table">
+            <a:tbl>
+              <a:tblPr firstRow="1" bandRow="1">
+                <a:tableStyleId>{5940675A-B579-460E-94D1-54222C63F5DA}</a:tableStyleId>
+              </a:tblPr>
+              <a:tblGrid>
+                <a:gridCol w="396000">
+                  <a:extLst>
+                    <a:ext uri="{9D8B030D-6E8A-4147-A177-3AD203B41FA5}">
+                      <a16:colId xmlns:a16="http://schemas.microsoft.com/office/drawing/2014/main" val="2075134690"/>
+                    </a:ext>
+                  </a:extLst>
+                </a:gridCol>
+                <a:gridCol w="396000">
+                  <a:extLst>
+                    <a:ext uri="{9D8B030D-6E8A-4147-A177-3AD203B41FA5}">
+                      <a16:colId xmlns:a16="http://schemas.microsoft.com/office/drawing/2014/main" val="427897118"/>
+                    </a:ext>
+                  </a:extLst>
+                </a:gridCol>
+                <a:gridCol w="396000">
+                  <a:extLst>
+                    <a:ext uri="{9D8B030D-6E8A-4147-A177-3AD203B41FA5}">
+                      <a16:colId xmlns:a16="http://schemas.microsoft.com/office/drawing/2014/main" val="2827347061"/>
+                    </a:ext>
+                  </a:extLst>
+                </a:gridCol>
+                <a:gridCol w="396000">
+                  <a:extLst>
+                    <a:ext uri="{9D8B030D-6E8A-4147-A177-3AD203B41FA5}">
+                      <a16:colId xmlns:a16="http://schemas.microsoft.com/office/drawing/2014/main" val="369407080"/>
+                    </a:ext>
+                  </a:extLst>
+                </a:gridCol>
+                <a:gridCol w="396000">
+                  <a:extLst>
+                    <a:ext uri="{9D8B030D-6E8A-4147-A177-3AD203B41FA5}">
+                      <a16:colId xmlns:a16="http://schemas.microsoft.com/office/drawing/2014/main" val="2944887014"/>
+                    </a:ext>
+                  </a:extLst>
+                </a:gridCol>
+                <a:gridCol w="396000">
+                  <a:extLst>
+                    <a:ext uri="{9D8B030D-6E8A-4147-A177-3AD203B41FA5}">
+                      <a16:colId xmlns:a16="http://schemas.microsoft.com/office/drawing/2014/main" val="3502176028"/>
+                    </a:ext>
+                  </a:extLst>
+                </a:gridCol>
+              </a:tblGrid>
+              <a:tr h="396000">
+                <a:tc>
+                  <a:txBody>
+                    <a:bodyPr/>
+                    <a:lstStyle/>
+                    <a:p>
+                      <a:endParaRPr kumimoji="1" lang="ja-JP" altLang="en-US"/>
+                    </a:p>
+                  </a:txBody>
+                  <a:tcPr/>
+                </a:tc>
+                <a:tc>
+                  <a:txBody>
+                    <a:bodyPr/>
+                    <a:lstStyle/>
+                    <a:p>
+                      <a:endParaRPr kumimoji="1" lang="ja-JP" altLang="en-US"/>
+                    </a:p>
+                  </a:txBody>
+                  <a:tcPr/>
+                </a:tc>
+                <a:tc>
+                  <a:txBody>
+                    <a:bodyPr/>
+                    <a:lstStyle/>
+                    <a:p>
+                      <a:endParaRPr kumimoji="1" lang="ja-JP" altLang="en-US"/>
+                    </a:p>
+                  </a:txBody>
+                  <a:tcPr/>
+                </a:tc>
+                <a:tc>
+                  <a:txBody>
+                    <a:bodyPr/>
+                    <a:lstStyle/>
+                    <a:p>
+                      <a:endParaRPr kumimoji="1" lang="ja-JP" altLang="en-US"/>
+                    </a:p>
+                  </a:txBody>
+                  <a:tcPr/>
+                </a:tc>
+                <a:tc>
+                  <a:txBody>
+                    <a:bodyPr/>
+                    <a:lstStyle/>
+                    <a:p>
+                      <a:endParaRPr kumimoji="1" lang="ja-JP" altLang="en-US"/>
+                    </a:p>
+                  </a:txBody>
+                  <a:tcPr/>
+                </a:tc>
+                <a:tc>
+                  <a:txBody>
+                    <a:bodyPr/>
+                    <a:lstStyle/>
+                    <a:p>
+                      <a:endParaRPr kumimoji="1" lang="ja-JP" altLang="en-US"/>
+                    </a:p>
+                  </a:txBody>
+                  <a:tcPr/>
+                </a:tc>
+                <a:extLst>
+                  <a:ext uri="{0D108BD9-81ED-4DB2-BD59-A6C34878D82A}">
+                    <a16:rowId xmlns:a16="http://schemas.microsoft.com/office/drawing/2014/main" val="4081197956"/>
+                  </a:ext>
+                </a:extLst>
+              </a:tr>
+              <a:tr h="396000">
+                <a:tc>
+                  <a:txBody>
+                    <a:bodyPr/>
+                    <a:lstStyle/>
+                    <a:p>
+                      <a:endParaRPr kumimoji="1" lang="ja-JP" altLang="en-US"/>
+                    </a:p>
+                  </a:txBody>
+                  <a:tcPr/>
+                </a:tc>
+                <a:tc>
+                  <a:txBody>
+                    <a:bodyPr/>
+                    <a:lstStyle/>
+                    <a:p>
+                      <a:endParaRPr kumimoji="1" lang="ja-JP" altLang="en-US"/>
+                    </a:p>
+                  </a:txBody>
+                  <a:tcPr/>
+                </a:tc>
+                <a:tc>
+                  <a:txBody>
+                    <a:bodyPr/>
+                    <a:lstStyle/>
+                    <a:p>
+                      <a:endParaRPr kumimoji="1" lang="ja-JP" altLang="en-US"/>
+                    </a:p>
+                  </a:txBody>
+                  <a:tcPr/>
+                </a:tc>
+                <a:tc>
+                  <a:txBody>
+                    <a:bodyPr/>
+                    <a:lstStyle/>
+                    <a:p>
+                      <a:endParaRPr kumimoji="1" lang="ja-JP" altLang="en-US"/>
+                    </a:p>
+                  </a:txBody>
+                  <a:tcPr/>
+                </a:tc>
+                <a:tc>
+                  <a:txBody>
+                    <a:bodyPr/>
+                    <a:lstStyle/>
+                    <a:p>
+                      <a:endParaRPr kumimoji="1" lang="ja-JP" altLang="en-US"/>
+                    </a:p>
+                  </a:txBody>
+                  <a:tcPr/>
+                </a:tc>
+                <a:tc>
+                  <a:txBody>
+                    <a:bodyPr/>
+                    <a:lstStyle/>
+                    <a:p>
+                      <a:endParaRPr kumimoji="1" lang="ja-JP" altLang="en-US"/>
+                    </a:p>
+                  </a:txBody>
+                  <a:tcPr/>
+                </a:tc>
+                <a:extLst>
+                  <a:ext uri="{0D108BD9-81ED-4DB2-BD59-A6C34878D82A}">
+                    <a16:rowId xmlns:a16="http://schemas.microsoft.com/office/drawing/2014/main" val="3077833558"/>
+                  </a:ext>
+                </a:extLst>
+              </a:tr>
+              <a:tr h="396000">
+                <a:tc>
+                  <a:txBody>
+                    <a:bodyPr/>
+                    <a:lstStyle/>
+                    <a:p>
+                      <a:endParaRPr kumimoji="1" lang="ja-JP" altLang="en-US"/>
+                    </a:p>
+                  </a:txBody>
+                  <a:tcPr/>
+                </a:tc>
+                <a:tc>
+                  <a:txBody>
+                    <a:bodyPr/>
+                    <a:lstStyle/>
+                    <a:p>
+                      <a:endParaRPr kumimoji="1" lang="ja-JP" altLang="en-US"/>
+                    </a:p>
+                  </a:txBody>
+                  <a:tcPr/>
+                </a:tc>
+                <a:tc>
+                  <a:txBody>
+                    <a:bodyPr/>
+                    <a:lstStyle/>
+                    <a:p>
+                      <a:endParaRPr kumimoji="1" lang="ja-JP" altLang="en-US"/>
+                    </a:p>
+                  </a:txBody>
+                  <a:tcPr/>
+                </a:tc>
+                <a:tc>
+                  <a:txBody>
+                    <a:bodyPr/>
+                    <a:lstStyle/>
+                    <a:p>
+                      <a:endParaRPr kumimoji="1" lang="ja-JP" altLang="en-US"/>
+                    </a:p>
+                  </a:txBody>
+                  <a:tcPr/>
+                </a:tc>
+                <a:tc>
+                  <a:txBody>
+                    <a:bodyPr/>
+                    <a:lstStyle/>
+                    <a:p>
+                      <a:endParaRPr kumimoji="1" lang="ja-JP" altLang="en-US"/>
+                    </a:p>
+                  </a:txBody>
+                  <a:tcPr/>
+                </a:tc>
+                <a:tc>
+                  <a:txBody>
+                    <a:bodyPr/>
+                    <a:lstStyle/>
+                    <a:p>
+                      <a:endParaRPr kumimoji="1" lang="ja-JP" altLang="en-US"/>
+                    </a:p>
+                  </a:txBody>
+                  <a:tcPr/>
+                </a:tc>
+                <a:extLst>
+                  <a:ext uri="{0D108BD9-81ED-4DB2-BD59-A6C34878D82A}">
+                    <a16:rowId xmlns:a16="http://schemas.microsoft.com/office/drawing/2014/main" val="1990611097"/>
+                  </a:ext>
+                </a:extLst>
+              </a:tr>
+              <a:tr h="396000">
+                <a:tc>
+                  <a:txBody>
+                    <a:bodyPr/>
+                    <a:lstStyle/>
+                    <a:p>
+                      <a:endParaRPr kumimoji="1" lang="ja-JP" altLang="en-US"/>
+                    </a:p>
+                  </a:txBody>
+                  <a:tcPr/>
+                </a:tc>
+                <a:tc>
+                  <a:txBody>
+                    <a:bodyPr/>
+                    <a:lstStyle/>
+                    <a:p>
+                      <a:endParaRPr kumimoji="1" lang="ja-JP" altLang="en-US"/>
+                    </a:p>
+                  </a:txBody>
+                  <a:tcPr/>
+                </a:tc>
+                <a:tc>
+                  <a:txBody>
+                    <a:bodyPr/>
+                    <a:lstStyle/>
+                    <a:p>
+                      <a:endParaRPr kumimoji="1" lang="ja-JP" altLang="en-US"/>
+                    </a:p>
+                  </a:txBody>
+                  <a:tcPr/>
+                </a:tc>
+                <a:tc>
+                  <a:txBody>
+                    <a:bodyPr/>
+                    <a:lstStyle/>
+                    <a:p>
+                      <a:endParaRPr kumimoji="1" lang="ja-JP" altLang="en-US"/>
+                    </a:p>
+                  </a:txBody>
+                  <a:tcPr/>
+                </a:tc>
+                <a:tc>
+                  <a:txBody>
+                    <a:bodyPr/>
+                    <a:lstStyle/>
+                    <a:p>
+                      <a:endParaRPr kumimoji="1" lang="ja-JP" altLang="en-US"/>
+                    </a:p>
+                  </a:txBody>
+                  <a:tcPr/>
+                </a:tc>
+                <a:tc>
+                  <a:txBody>
+                    <a:bodyPr/>
+                    <a:lstStyle/>
+                    <a:p>
+                      <a:endParaRPr kumimoji="1" lang="ja-JP" altLang="en-US"/>
+                    </a:p>
+                  </a:txBody>
+                  <a:tcPr/>
+                </a:tc>
+                <a:extLst>
+                  <a:ext uri="{0D108BD9-81ED-4DB2-BD59-A6C34878D82A}">
+                    <a16:rowId xmlns:a16="http://schemas.microsoft.com/office/drawing/2014/main" val="1850039062"/>
+                  </a:ext>
+                </a:extLst>
+              </a:tr>
+              <a:tr h="396000">
+                <a:tc>
+                  <a:txBody>
+                    <a:bodyPr/>
+                    <a:lstStyle/>
+                    <a:p>
+                      <a:endParaRPr kumimoji="1" lang="ja-JP" altLang="en-US"/>
+                    </a:p>
+                  </a:txBody>
+                  <a:tcPr/>
+                </a:tc>
+                <a:tc>
+                  <a:txBody>
+                    <a:bodyPr/>
+                    <a:lstStyle/>
+                    <a:p>
+                      <a:endParaRPr kumimoji="1" lang="ja-JP" altLang="en-US"/>
+                    </a:p>
+                  </a:txBody>
+                  <a:tcPr/>
+                </a:tc>
+                <a:tc>
+                  <a:txBody>
+                    <a:bodyPr/>
+                    <a:lstStyle/>
+                    <a:p>
+                      <a:endParaRPr kumimoji="1" lang="ja-JP" altLang="en-US"/>
+                    </a:p>
+                  </a:txBody>
+                  <a:tcPr/>
+                </a:tc>
+                <a:tc>
+                  <a:txBody>
+                    <a:bodyPr/>
+                    <a:lstStyle/>
+                    <a:p>
+                      <a:endParaRPr kumimoji="1" lang="ja-JP" altLang="en-US"/>
+                    </a:p>
+                  </a:txBody>
+                  <a:tcPr/>
+                </a:tc>
+                <a:tc>
+                  <a:txBody>
+                    <a:bodyPr/>
+                    <a:lstStyle/>
+                    <a:p>
+                      <a:endParaRPr kumimoji="1" lang="ja-JP" altLang="en-US"/>
+                    </a:p>
+                  </a:txBody>
+                  <a:tcPr/>
+                </a:tc>
+                <a:tc>
+                  <a:txBody>
+                    <a:bodyPr/>
+                    <a:lstStyle/>
+                    <a:p>
+                      <a:endParaRPr kumimoji="1" lang="ja-JP" altLang="en-US"/>
+                    </a:p>
+                  </a:txBody>
+                  <a:tcPr/>
+                </a:tc>
+                <a:extLst>
+                  <a:ext uri="{0D108BD9-81ED-4DB2-BD59-A6C34878D82A}">
+                    <a16:rowId xmlns:a16="http://schemas.microsoft.com/office/drawing/2014/main" val="3104381512"/>
+                  </a:ext>
+                </a:extLst>
+              </a:tr>
+              <a:tr h="396000">
+                <a:tc>
+                  <a:txBody>
+                    <a:bodyPr/>
+                    <a:lstStyle/>
+                    <a:p>
+                      <a:endParaRPr kumimoji="1" lang="ja-JP" altLang="en-US"/>
+                    </a:p>
+                  </a:txBody>
+                  <a:tcPr/>
+                </a:tc>
+                <a:tc>
+                  <a:txBody>
+                    <a:bodyPr/>
+                    <a:lstStyle/>
+                    <a:p>
+                      <a:endParaRPr kumimoji="1" lang="ja-JP" altLang="en-US"/>
+                    </a:p>
+                  </a:txBody>
+                  <a:tcPr/>
+                </a:tc>
+                <a:tc>
+                  <a:txBody>
+                    <a:bodyPr/>
+                    <a:lstStyle/>
+                    <a:p>
+                      <a:endParaRPr kumimoji="1" lang="ja-JP" altLang="en-US"/>
+                    </a:p>
+                  </a:txBody>
+                  <a:tcPr/>
+                </a:tc>
+                <a:tc>
+                  <a:txBody>
+                    <a:bodyPr/>
+                    <a:lstStyle/>
+                    <a:p>
+                      <a:endParaRPr kumimoji="1" lang="ja-JP" altLang="en-US"/>
+                    </a:p>
+                  </a:txBody>
+                  <a:tcPr/>
+                </a:tc>
+                <a:tc>
+                  <a:txBody>
+                    <a:bodyPr/>
+                    <a:lstStyle/>
+                    <a:p>
+                      <a:endParaRPr kumimoji="1" lang="ja-JP" altLang="en-US"/>
+                    </a:p>
+                  </a:txBody>
+                  <a:tcPr/>
+                </a:tc>
+                <a:tc>
+                  <a:txBody>
+                    <a:bodyPr/>
+                    <a:lstStyle/>
+                    <a:p>
+                      <a:endParaRPr kumimoji="1" lang="ja-JP" altLang="en-US"/>
+                    </a:p>
+                  </a:txBody>
+                  <a:tcPr/>
+                </a:tc>
+                <a:extLst>
+                  <a:ext uri="{0D108BD9-81ED-4DB2-BD59-A6C34878D82A}">
+                    <a16:rowId xmlns:a16="http://schemas.microsoft.com/office/drawing/2014/main" val="2935057252"/>
+                  </a:ext>
+                </a:extLst>
+              </a:tr>
+            </a:tbl>
+          </a:graphicData>
+        </a:graphic>
+      </p:graphicFrame>
+      <p:sp>
+        <p:nvSpPr>
+          <p:cNvPr id="9" name="テキスト ボックス 8">
+            <a:extLst>
+              <a:ext uri="{FF2B5EF4-FFF2-40B4-BE49-F238E27FC236}">
+                <a16:creationId xmlns:a16="http://schemas.microsoft.com/office/drawing/2014/main" id="{A53CEB4A-9677-CE2C-30AD-7CE07A765E7D}"/>
+              </a:ext>
+            </a:extLst>
+          </p:cNvPr>
+          <p:cNvSpPr txBox="1"/>
+          <p:nvPr/>
+        </p:nvSpPr>
+        <p:spPr>
+          <a:xfrm>
+            <a:off x="3502890" y="6003658"/>
+            <a:ext cx="1107996" cy="369332"/>
+          </a:xfrm>
+          <a:prstGeom prst="rect">
+            <a:avLst/>
+          </a:prstGeom>
+          <a:noFill/>
+        </p:spPr>
+        <p:txBody>
+          <a:bodyPr wrap="none" rtlCol="0">
+            <a:spAutoFit/>
+          </a:bodyPr>
+          <a:lstStyle/>
+          <a:p>
+            <a:r>
+              <a:rPr kumimoji="1" lang="ja-JP" altLang="en-US"/>
+              <a:t>ワールド</a:t>
+            </a:r>
+          </a:p>
+        </p:txBody>
+      </p:sp>
+      <p:graphicFrame>
+        <p:nvGraphicFramePr>
+          <p:cNvPr id="10" name="表 9">
+            <a:extLst>
+              <a:ext uri="{FF2B5EF4-FFF2-40B4-BE49-F238E27FC236}">
+                <a16:creationId xmlns:a16="http://schemas.microsoft.com/office/drawing/2014/main" id="{7909FCB8-A044-CFE1-B277-E400D1D7400D}"/>
+              </a:ext>
+            </a:extLst>
+          </p:cNvPr>
+          <p:cNvGraphicFramePr>
+            <a:graphicFrameLocks noGrp="1"/>
+          </p:cNvGraphicFramePr>
+          <p:nvPr>
+            <p:extLst>
+              <p:ext uri="{D42A27DB-BD31-4B8C-83A1-F6EECF244321}">
+                <p14:modId xmlns:p14="http://schemas.microsoft.com/office/powerpoint/2010/main" val="2279763066"/>
+              </p:ext>
+            </p:extLst>
+          </p:nvPr>
+        </p:nvGraphicFramePr>
+        <p:xfrm>
+          <a:off x="3653991" y="5123876"/>
+          <a:ext cx="806334" cy="671945"/>
+        </p:xfrm>
+        <a:graphic>
+          <a:graphicData uri="http://schemas.openxmlformats.org/drawingml/2006/table">
+            <a:tbl>
+              <a:tblPr firstRow="1" bandRow="1">
+                <a:tableStyleId>{5940675A-B579-460E-94D1-54222C63F5DA}</a:tableStyleId>
+              </a:tblPr>
+              <a:tblGrid>
+                <a:gridCol w="134389">
+                  <a:extLst>
+                    <a:ext uri="{9D8B030D-6E8A-4147-A177-3AD203B41FA5}">
+                      <a16:colId xmlns:a16="http://schemas.microsoft.com/office/drawing/2014/main" val="2075134690"/>
+                    </a:ext>
+                  </a:extLst>
+                </a:gridCol>
+                <a:gridCol w="134389">
+                  <a:extLst>
+                    <a:ext uri="{9D8B030D-6E8A-4147-A177-3AD203B41FA5}">
+                      <a16:colId xmlns:a16="http://schemas.microsoft.com/office/drawing/2014/main" val="427897118"/>
+                    </a:ext>
+                  </a:extLst>
+                </a:gridCol>
+                <a:gridCol w="134389">
+                  <a:extLst>
+                    <a:ext uri="{9D8B030D-6E8A-4147-A177-3AD203B41FA5}">
+                      <a16:colId xmlns:a16="http://schemas.microsoft.com/office/drawing/2014/main" val="2827347061"/>
+                    </a:ext>
+                  </a:extLst>
+                </a:gridCol>
+                <a:gridCol w="134389">
+                  <a:extLst>
+                    <a:ext uri="{9D8B030D-6E8A-4147-A177-3AD203B41FA5}">
+                      <a16:colId xmlns:a16="http://schemas.microsoft.com/office/drawing/2014/main" val="369407080"/>
+                    </a:ext>
+                  </a:extLst>
+                </a:gridCol>
+                <a:gridCol w="134389">
+                  <a:extLst>
+                    <a:ext uri="{9D8B030D-6E8A-4147-A177-3AD203B41FA5}">
+                      <a16:colId xmlns:a16="http://schemas.microsoft.com/office/drawing/2014/main" val="2944887014"/>
+                    </a:ext>
+                  </a:extLst>
+                </a:gridCol>
+                <a:gridCol w="134389">
+                  <a:extLst>
+                    <a:ext uri="{9D8B030D-6E8A-4147-A177-3AD203B41FA5}">
+                      <a16:colId xmlns:a16="http://schemas.microsoft.com/office/drawing/2014/main" val="3502176028"/>
+                    </a:ext>
+                  </a:extLst>
+                </a:gridCol>
+              </a:tblGrid>
+              <a:tr h="134389">
+                <a:tc>
+                  <a:txBody>
+                    <a:bodyPr/>
+                    <a:lstStyle/>
+                    <a:p>
+                      <a:endParaRPr kumimoji="1" lang="ja-JP" altLang="en-US" sz="600"/>
+                    </a:p>
+                  </a:txBody>
+                  <a:tcPr marL="31032" marR="31032" marT="15516" marB="15516"/>
+                </a:tc>
+                <a:tc>
+                  <a:txBody>
+                    <a:bodyPr/>
+                    <a:lstStyle/>
+                    <a:p>
+                      <a:endParaRPr kumimoji="1" lang="ja-JP" altLang="en-US" sz="600"/>
+                    </a:p>
+                  </a:txBody>
+                  <a:tcPr marL="31032" marR="31032" marT="15516" marB="15516"/>
+                </a:tc>
+                <a:tc>
+                  <a:txBody>
+                    <a:bodyPr/>
+                    <a:lstStyle/>
+                    <a:p>
+                      <a:endParaRPr kumimoji="1" lang="ja-JP" altLang="en-US" sz="600"/>
+                    </a:p>
+                  </a:txBody>
+                  <a:tcPr marL="31032" marR="31032" marT="15516" marB="15516"/>
+                </a:tc>
+                <a:tc>
+                  <a:txBody>
+                    <a:bodyPr/>
+                    <a:lstStyle/>
+                    <a:p>
+                      <a:endParaRPr kumimoji="1" lang="ja-JP" altLang="en-US" sz="600"/>
+                    </a:p>
+                  </a:txBody>
+                  <a:tcPr marL="31032" marR="31032" marT="15516" marB="15516"/>
+                </a:tc>
+                <a:tc>
+                  <a:txBody>
+                    <a:bodyPr/>
+                    <a:lstStyle/>
+                    <a:p>
+                      <a:endParaRPr kumimoji="1" lang="ja-JP" altLang="en-US" sz="600"/>
+                    </a:p>
+                  </a:txBody>
+                  <a:tcPr marL="31032" marR="31032" marT="15516" marB="15516"/>
+                </a:tc>
+                <a:tc>
+                  <a:txBody>
+                    <a:bodyPr/>
+                    <a:lstStyle/>
+                    <a:p>
+                      <a:endParaRPr kumimoji="1" lang="ja-JP" altLang="en-US" sz="600"/>
+                    </a:p>
+                  </a:txBody>
+                  <a:tcPr marL="31032" marR="31032" marT="15516" marB="15516"/>
+                </a:tc>
+                <a:extLst>
+                  <a:ext uri="{0D108BD9-81ED-4DB2-BD59-A6C34878D82A}">
+                    <a16:rowId xmlns:a16="http://schemas.microsoft.com/office/drawing/2014/main" val="3077833558"/>
+                  </a:ext>
+                </a:extLst>
+              </a:tr>
+              <a:tr h="134389">
+                <a:tc>
+                  <a:txBody>
+                    <a:bodyPr/>
+                    <a:lstStyle/>
+                    <a:p>
+                      <a:endParaRPr kumimoji="1" lang="ja-JP" altLang="en-US" sz="600"/>
+                    </a:p>
+                  </a:txBody>
+                  <a:tcPr marL="31032" marR="31032" marT="15516" marB="15516"/>
+                </a:tc>
+                <a:tc>
+                  <a:txBody>
+                    <a:bodyPr/>
+                    <a:lstStyle/>
+                    <a:p>
+                      <a:endParaRPr kumimoji="1" lang="ja-JP" altLang="en-US" sz="600"/>
+                    </a:p>
+                  </a:txBody>
+                  <a:tcPr marL="31032" marR="31032" marT="15516" marB="15516"/>
+                </a:tc>
+                <a:tc>
+                  <a:txBody>
+                    <a:bodyPr/>
+                    <a:lstStyle/>
+                    <a:p>
+                      <a:endParaRPr kumimoji="1" lang="ja-JP" altLang="en-US" sz="600"/>
+                    </a:p>
+                  </a:txBody>
+                  <a:tcPr marL="31032" marR="31032" marT="15516" marB="15516"/>
+                </a:tc>
+                <a:tc>
+                  <a:txBody>
+                    <a:bodyPr/>
+                    <a:lstStyle/>
+                    <a:p>
+                      <a:endParaRPr kumimoji="1" lang="ja-JP" altLang="en-US" sz="600"/>
+                    </a:p>
+                  </a:txBody>
+                  <a:tcPr marL="31032" marR="31032" marT="15516" marB="15516"/>
+                </a:tc>
+                <a:tc>
+                  <a:txBody>
+                    <a:bodyPr/>
+                    <a:lstStyle/>
+                    <a:p>
+                      <a:endParaRPr kumimoji="1" lang="ja-JP" altLang="en-US" sz="600"/>
+                    </a:p>
+                  </a:txBody>
+                  <a:tcPr marL="31032" marR="31032" marT="15516" marB="15516"/>
+                </a:tc>
+                <a:tc>
+                  <a:txBody>
+                    <a:bodyPr/>
+                    <a:lstStyle/>
+                    <a:p>
+                      <a:endParaRPr kumimoji="1" lang="ja-JP" altLang="en-US" sz="600"/>
+                    </a:p>
+                  </a:txBody>
+                  <a:tcPr marL="31032" marR="31032" marT="15516" marB="15516"/>
+                </a:tc>
+                <a:extLst>
+                  <a:ext uri="{0D108BD9-81ED-4DB2-BD59-A6C34878D82A}">
+                    <a16:rowId xmlns:a16="http://schemas.microsoft.com/office/drawing/2014/main" val="1990611097"/>
+                  </a:ext>
+                </a:extLst>
+              </a:tr>
+              <a:tr h="134389">
+                <a:tc>
+                  <a:txBody>
+                    <a:bodyPr/>
+                    <a:lstStyle/>
+                    <a:p>
+                      <a:endParaRPr kumimoji="1" lang="ja-JP" altLang="en-US" sz="600"/>
+                    </a:p>
+                  </a:txBody>
+                  <a:tcPr marL="31032" marR="31032" marT="15516" marB="15516"/>
+                </a:tc>
+                <a:tc>
+                  <a:txBody>
+                    <a:bodyPr/>
+                    <a:lstStyle/>
+                    <a:p>
+                      <a:endParaRPr kumimoji="1" lang="ja-JP" altLang="en-US" sz="600"/>
+                    </a:p>
+                  </a:txBody>
+                  <a:tcPr marL="31032" marR="31032" marT="15516" marB="15516"/>
+                </a:tc>
+                <a:tc>
+                  <a:txBody>
+                    <a:bodyPr/>
+                    <a:lstStyle/>
+                    <a:p>
+                      <a:endParaRPr kumimoji="1" lang="ja-JP" altLang="en-US" sz="600"/>
+                    </a:p>
+                  </a:txBody>
+                  <a:tcPr marL="31032" marR="31032" marT="15516" marB="15516"/>
+                </a:tc>
+                <a:tc>
+                  <a:txBody>
+                    <a:bodyPr/>
+                    <a:lstStyle/>
+                    <a:p>
+                      <a:endParaRPr kumimoji="1" lang="ja-JP" altLang="en-US" sz="600"/>
+                    </a:p>
+                  </a:txBody>
+                  <a:tcPr marL="31032" marR="31032" marT="15516" marB="15516"/>
+                </a:tc>
+                <a:tc>
+                  <a:txBody>
+                    <a:bodyPr/>
+                    <a:lstStyle/>
+                    <a:p>
+                      <a:endParaRPr kumimoji="1" lang="ja-JP" altLang="en-US" sz="600"/>
+                    </a:p>
+                  </a:txBody>
+                  <a:tcPr marL="31032" marR="31032" marT="15516" marB="15516"/>
+                </a:tc>
+                <a:tc>
+                  <a:txBody>
+                    <a:bodyPr/>
+                    <a:lstStyle/>
+                    <a:p>
+                      <a:endParaRPr kumimoji="1" lang="ja-JP" altLang="en-US" sz="600"/>
+                    </a:p>
+                  </a:txBody>
+                  <a:tcPr marL="31032" marR="31032" marT="15516" marB="15516"/>
+                </a:tc>
+                <a:extLst>
+                  <a:ext uri="{0D108BD9-81ED-4DB2-BD59-A6C34878D82A}">
+                    <a16:rowId xmlns:a16="http://schemas.microsoft.com/office/drawing/2014/main" val="1850039062"/>
+                  </a:ext>
+                </a:extLst>
+              </a:tr>
+              <a:tr h="134389">
+                <a:tc>
+                  <a:txBody>
+                    <a:bodyPr/>
+                    <a:lstStyle/>
+                    <a:p>
+                      <a:endParaRPr kumimoji="1" lang="ja-JP" altLang="en-US" sz="600"/>
+                    </a:p>
+                  </a:txBody>
+                  <a:tcPr marL="31032" marR="31032" marT="15516" marB="15516"/>
+                </a:tc>
+                <a:tc>
+                  <a:txBody>
+                    <a:bodyPr/>
+                    <a:lstStyle/>
+                    <a:p>
+                      <a:endParaRPr kumimoji="1" lang="ja-JP" altLang="en-US" sz="600"/>
+                    </a:p>
+                  </a:txBody>
+                  <a:tcPr marL="31032" marR="31032" marT="15516" marB="15516"/>
+                </a:tc>
+                <a:tc>
+                  <a:txBody>
+                    <a:bodyPr/>
+                    <a:lstStyle/>
+                    <a:p>
+                      <a:endParaRPr kumimoji="1" lang="ja-JP" altLang="en-US" sz="600"/>
+                    </a:p>
+                  </a:txBody>
+                  <a:tcPr marL="31032" marR="31032" marT="15516" marB="15516"/>
+                </a:tc>
+                <a:tc>
+                  <a:txBody>
+                    <a:bodyPr/>
+                    <a:lstStyle/>
+                    <a:p>
+                      <a:endParaRPr kumimoji="1" lang="ja-JP" altLang="en-US" sz="600"/>
+                    </a:p>
+                  </a:txBody>
+                  <a:tcPr marL="31032" marR="31032" marT="15516" marB="15516"/>
+                </a:tc>
+                <a:tc>
+                  <a:txBody>
+                    <a:bodyPr/>
+                    <a:lstStyle/>
+                    <a:p>
+                      <a:endParaRPr kumimoji="1" lang="ja-JP" altLang="en-US" sz="600"/>
+                    </a:p>
+                  </a:txBody>
+                  <a:tcPr marL="31032" marR="31032" marT="15516" marB="15516"/>
+                </a:tc>
+                <a:tc>
+                  <a:txBody>
+                    <a:bodyPr/>
+                    <a:lstStyle/>
+                    <a:p>
+                      <a:endParaRPr kumimoji="1" lang="ja-JP" altLang="en-US" sz="600"/>
+                    </a:p>
+                  </a:txBody>
+                  <a:tcPr marL="31032" marR="31032" marT="15516" marB="15516"/>
+                </a:tc>
+                <a:extLst>
+                  <a:ext uri="{0D108BD9-81ED-4DB2-BD59-A6C34878D82A}">
+                    <a16:rowId xmlns:a16="http://schemas.microsoft.com/office/drawing/2014/main" val="3104381512"/>
+                  </a:ext>
+                </a:extLst>
+              </a:tr>
+              <a:tr h="134389">
+                <a:tc>
+                  <a:txBody>
+                    <a:bodyPr/>
+                    <a:lstStyle/>
+                    <a:p>
+                      <a:endParaRPr kumimoji="1" lang="ja-JP" altLang="en-US" sz="600"/>
+                    </a:p>
+                  </a:txBody>
+                  <a:tcPr marL="31032" marR="31032" marT="15516" marB="15516"/>
+                </a:tc>
+                <a:tc>
+                  <a:txBody>
+                    <a:bodyPr/>
+                    <a:lstStyle/>
+                    <a:p>
+                      <a:endParaRPr kumimoji="1" lang="ja-JP" altLang="en-US" sz="600"/>
+                    </a:p>
+                  </a:txBody>
+                  <a:tcPr marL="31032" marR="31032" marT="15516" marB="15516"/>
+                </a:tc>
+                <a:tc>
+                  <a:txBody>
+                    <a:bodyPr/>
+                    <a:lstStyle/>
+                    <a:p>
+                      <a:endParaRPr kumimoji="1" lang="ja-JP" altLang="en-US" sz="600"/>
+                    </a:p>
+                  </a:txBody>
+                  <a:tcPr marL="31032" marR="31032" marT="15516" marB="15516"/>
+                </a:tc>
+                <a:tc>
+                  <a:txBody>
+                    <a:bodyPr/>
+                    <a:lstStyle/>
+                    <a:p>
+                      <a:endParaRPr kumimoji="1" lang="ja-JP" altLang="en-US" sz="600"/>
+                    </a:p>
+                  </a:txBody>
+                  <a:tcPr marL="31032" marR="31032" marT="15516" marB="15516"/>
+                </a:tc>
+                <a:tc>
+                  <a:txBody>
+                    <a:bodyPr/>
+                    <a:lstStyle/>
+                    <a:p>
+                      <a:endParaRPr kumimoji="1" lang="ja-JP" altLang="en-US" sz="600"/>
+                    </a:p>
+                  </a:txBody>
+                  <a:tcPr marL="31032" marR="31032" marT="15516" marB="15516"/>
+                </a:tc>
+                <a:tc>
+                  <a:txBody>
+                    <a:bodyPr/>
+                    <a:lstStyle/>
+                    <a:p>
+                      <a:endParaRPr kumimoji="1" lang="ja-JP" altLang="en-US" sz="600"/>
+                    </a:p>
+                  </a:txBody>
+                  <a:tcPr marL="31032" marR="31032" marT="15516" marB="15516"/>
+                </a:tc>
+                <a:extLst>
+                  <a:ext uri="{0D108BD9-81ED-4DB2-BD59-A6C34878D82A}">
+                    <a16:rowId xmlns:a16="http://schemas.microsoft.com/office/drawing/2014/main" val="2935057252"/>
+                  </a:ext>
+                </a:extLst>
+              </a:tr>
+            </a:tbl>
+          </a:graphicData>
+        </a:graphic>
+      </p:graphicFrame>
+      <p:graphicFrame>
+        <p:nvGraphicFramePr>
+          <p:cNvPr id="11" name="表 10">
+            <a:extLst>
+              <a:ext uri="{FF2B5EF4-FFF2-40B4-BE49-F238E27FC236}">
+                <a16:creationId xmlns:a16="http://schemas.microsoft.com/office/drawing/2014/main" id="{7BFDB4FC-A1AE-0BD7-6722-434DDD63E42F}"/>
+              </a:ext>
+            </a:extLst>
+          </p:cNvPr>
+          <p:cNvGraphicFramePr>
+            <a:graphicFrameLocks noGrp="1"/>
+          </p:cNvGraphicFramePr>
+          <p:nvPr>
+            <p:extLst>
+              <p:ext uri="{D42A27DB-BD31-4B8C-83A1-F6EECF244321}">
+                <p14:modId xmlns:p14="http://schemas.microsoft.com/office/powerpoint/2010/main" val="1570772617"/>
+              </p:ext>
+            </p:extLst>
+          </p:nvPr>
+        </p:nvGraphicFramePr>
+        <p:xfrm>
+          <a:off x="3681134" y="3712805"/>
+          <a:ext cx="1074024" cy="716016"/>
+        </p:xfrm>
+        <a:graphic>
+          <a:graphicData uri="http://schemas.openxmlformats.org/drawingml/2006/table">
+            <a:tbl>
+              <a:tblPr firstRow="1" bandRow="1">
+                <a:tableStyleId>{5940675A-B579-460E-94D1-54222C63F5DA}</a:tableStyleId>
+              </a:tblPr>
+              <a:tblGrid>
+                <a:gridCol w="358008">
+                  <a:extLst>
+                    <a:ext uri="{9D8B030D-6E8A-4147-A177-3AD203B41FA5}">
+                      <a16:colId xmlns:a16="http://schemas.microsoft.com/office/drawing/2014/main" val="2075134690"/>
+                    </a:ext>
+                  </a:extLst>
+                </a:gridCol>
+                <a:gridCol w="358008">
+                  <a:extLst>
+                    <a:ext uri="{9D8B030D-6E8A-4147-A177-3AD203B41FA5}">
+                      <a16:colId xmlns:a16="http://schemas.microsoft.com/office/drawing/2014/main" val="427897118"/>
+                    </a:ext>
+                  </a:extLst>
+                </a:gridCol>
+                <a:gridCol w="358008">
+                  <a:extLst>
+                    <a:ext uri="{9D8B030D-6E8A-4147-A177-3AD203B41FA5}">
+                      <a16:colId xmlns:a16="http://schemas.microsoft.com/office/drawing/2014/main" val="2827347061"/>
+                    </a:ext>
+                  </a:extLst>
+                </a:gridCol>
+              </a:tblGrid>
+              <a:tr h="358008">
+                <a:tc>
+                  <a:txBody>
+                    <a:bodyPr/>
+                    <a:lstStyle/>
+                    <a:p>
+                      <a:endParaRPr kumimoji="1" lang="ja-JP" altLang="en-US" sz="1700"/>
+                    </a:p>
+                  </a:txBody>
+                  <a:tcPr marL="82666" marR="82666" marT="41334" marB="41334"/>
+                </a:tc>
+                <a:tc>
+                  <a:txBody>
+                    <a:bodyPr/>
+                    <a:lstStyle/>
+                    <a:p>
+                      <a:endParaRPr kumimoji="1" lang="ja-JP" altLang="en-US" sz="1700"/>
+                    </a:p>
+                  </a:txBody>
+                  <a:tcPr marL="82666" marR="82666" marT="41334" marB="41334"/>
+                </a:tc>
+                <a:tc>
+                  <a:txBody>
+                    <a:bodyPr/>
+                    <a:lstStyle/>
+                    <a:p>
+                      <a:endParaRPr kumimoji="1" lang="ja-JP" altLang="en-US" sz="1700"/>
+                    </a:p>
+                  </a:txBody>
+                  <a:tcPr marL="82666" marR="82666" marT="41334" marB="41334"/>
+                </a:tc>
+                <a:extLst>
+                  <a:ext uri="{0D108BD9-81ED-4DB2-BD59-A6C34878D82A}">
+                    <a16:rowId xmlns:a16="http://schemas.microsoft.com/office/drawing/2014/main" val="4081197956"/>
+                  </a:ext>
+                </a:extLst>
+              </a:tr>
+              <a:tr h="358008">
+                <a:tc>
+                  <a:txBody>
+                    <a:bodyPr/>
+                    <a:lstStyle/>
+                    <a:p>
+                      <a:endParaRPr kumimoji="1" lang="ja-JP" altLang="en-US" sz="1700"/>
+                    </a:p>
+                  </a:txBody>
+                  <a:tcPr marL="82666" marR="82666" marT="41334" marB="41334"/>
+                </a:tc>
+                <a:tc>
+                  <a:txBody>
+                    <a:bodyPr/>
+                    <a:lstStyle/>
+                    <a:p>
+                      <a:endParaRPr kumimoji="1" lang="ja-JP" altLang="en-US" sz="1700"/>
+                    </a:p>
+                  </a:txBody>
+                  <a:tcPr marL="82666" marR="82666" marT="41334" marB="41334"/>
+                </a:tc>
+                <a:tc>
+                  <a:txBody>
+                    <a:bodyPr/>
+                    <a:lstStyle/>
+                    <a:p>
+                      <a:endParaRPr kumimoji="1" lang="ja-JP" altLang="en-US" sz="1700"/>
+                    </a:p>
+                  </a:txBody>
+                  <a:tcPr marL="82666" marR="82666" marT="41334" marB="41334"/>
+                </a:tc>
+                <a:extLst>
+                  <a:ext uri="{0D108BD9-81ED-4DB2-BD59-A6C34878D82A}">
+                    <a16:rowId xmlns:a16="http://schemas.microsoft.com/office/drawing/2014/main" val="3077833558"/>
+                  </a:ext>
+                </a:extLst>
+              </a:tr>
+            </a:tbl>
+          </a:graphicData>
+        </a:graphic>
+      </p:graphicFrame>
+      <p:sp>
+        <p:nvSpPr>
+          <p:cNvPr id="12" name="テキスト ボックス 11">
+            <a:extLst>
+              <a:ext uri="{FF2B5EF4-FFF2-40B4-BE49-F238E27FC236}">
+                <a16:creationId xmlns:a16="http://schemas.microsoft.com/office/drawing/2014/main" id="{285C4CA7-59DD-5E67-6D01-DD33298553C4}"/>
+              </a:ext>
+            </a:extLst>
+          </p:cNvPr>
+          <p:cNvSpPr txBox="1"/>
+          <p:nvPr/>
+        </p:nvSpPr>
+        <p:spPr>
+          <a:xfrm>
+            <a:off x="6986627" y="6123543"/>
+            <a:ext cx="463588" cy="369332"/>
+          </a:xfrm>
+          <a:prstGeom prst="rect">
+            <a:avLst/>
+          </a:prstGeom>
+          <a:noFill/>
+        </p:spPr>
+        <p:txBody>
+          <a:bodyPr wrap="none" rtlCol="0">
+            <a:spAutoFit/>
+          </a:bodyPr>
+          <a:lstStyle/>
+          <a:p>
+            <a:r>
+              <a:rPr kumimoji="1" lang="en-US" altLang="ja-JP"/>
+              <a:t>UV</a:t>
+            </a:r>
+            <a:endParaRPr kumimoji="1" lang="ja-JP" altLang="en-US"/>
+          </a:p>
+        </p:txBody>
+      </p:sp>
+      <p:sp>
+        <p:nvSpPr>
+          <p:cNvPr id="13" name="テキスト ボックス 12">
+            <a:extLst>
+              <a:ext uri="{FF2B5EF4-FFF2-40B4-BE49-F238E27FC236}">
+                <a16:creationId xmlns:a16="http://schemas.microsoft.com/office/drawing/2014/main" id="{E00052E0-66E0-BA6C-CB44-8B00AF5C925A}"/>
+              </a:ext>
+            </a:extLst>
+          </p:cNvPr>
+          <p:cNvSpPr txBox="1"/>
+          <p:nvPr/>
+        </p:nvSpPr>
+        <p:spPr>
+          <a:xfrm>
+            <a:off x="1188720" y="4477545"/>
+            <a:ext cx="1569660" cy="646331"/>
+          </a:xfrm>
+          <a:prstGeom prst="rect">
+            <a:avLst/>
+          </a:prstGeom>
+          <a:noFill/>
+        </p:spPr>
+        <p:txBody>
+          <a:bodyPr wrap="none" rtlCol="0">
+            <a:spAutoFit/>
+          </a:bodyPr>
+          <a:lstStyle/>
+          <a:p>
+            <a:r>
+              <a:rPr kumimoji="1" lang="ja-JP" altLang="en-US"/>
+              <a:t>何もしないと</a:t>
+            </a:r>
+            <a:br>
+              <a:rPr kumimoji="1" lang="en-US" altLang="ja-JP"/>
+            </a:br>
+            <a:r>
+              <a:rPr kumimoji="1" lang="ja-JP" altLang="en-US"/>
+              <a:t>見た目が違う</a:t>
+            </a:r>
+          </a:p>
+        </p:txBody>
+      </p:sp>
+      <p:cxnSp>
+        <p:nvCxnSpPr>
+          <p:cNvPr id="15" name="直線コネクタ 14">
+            <a:extLst>
+              <a:ext uri="{FF2B5EF4-FFF2-40B4-BE49-F238E27FC236}">
+                <a16:creationId xmlns:a16="http://schemas.microsoft.com/office/drawing/2014/main" id="{484B8744-7F7E-9075-A842-FA817B2B79A0}"/>
+              </a:ext>
+            </a:extLst>
+          </p:cNvPr>
+          <p:cNvCxnSpPr/>
+          <p:nvPr/>
+        </p:nvCxnSpPr>
+        <p:spPr>
+          <a:xfrm flipV="1">
+            <a:off x="3042458" y="4337278"/>
+            <a:ext cx="399011" cy="181348"/>
+          </a:xfrm>
+          <a:prstGeom prst="line">
+            <a:avLst/>
+          </a:prstGeom>
+          <a:ln>
+            <a:solidFill>
+              <a:schemeClr val="tx1"/>
+            </a:solidFill>
+          </a:ln>
+        </p:spPr>
+        <p:style>
+          <a:lnRef idx="1">
+            <a:schemeClr val="accent1"/>
+          </a:lnRef>
+          <a:fillRef idx="0">
+            <a:schemeClr val="accent1"/>
+          </a:fillRef>
+          <a:effectRef idx="0">
+            <a:schemeClr val="accent1"/>
+          </a:effectRef>
+          <a:fontRef idx="minor">
+            <a:schemeClr val="tx1"/>
+          </a:fontRef>
+        </p:style>
+      </p:cxnSp>
+      <p:cxnSp>
+        <p:nvCxnSpPr>
+          <p:cNvPr id="16" name="直線コネクタ 15">
+            <a:extLst>
+              <a:ext uri="{FF2B5EF4-FFF2-40B4-BE49-F238E27FC236}">
+                <a16:creationId xmlns:a16="http://schemas.microsoft.com/office/drawing/2014/main" id="{74F0AD8E-D23A-EF79-8F0B-A7C77AF82D42}"/>
+              </a:ext>
+            </a:extLst>
+          </p:cNvPr>
+          <p:cNvCxnSpPr>
+            <a:cxnSpLocks/>
+          </p:cNvCxnSpPr>
+          <p:nvPr/>
+        </p:nvCxnSpPr>
+        <p:spPr>
+          <a:xfrm>
+            <a:off x="3065317" y="4984329"/>
+            <a:ext cx="353291" cy="232752"/>
+          </a:xfrm>
+          <a:prstGeom prst="line">
+            <a:avLst/>
+          </a:prstGeom>
+          <a:ln>
+            <a:solidFill>
+              <a:schemeClr val="tx1"/>
+            </a:solidFill>
+          </a:ln>
+        </p:spPr>
+        <p:style>
+          <a:lnRef idx="1">
+            <a:schemeClr val="accent1"/>
+          </a:lnRef>
+          <a:fillRef idx="0">
+            <a:schemeClr val="accent1"/>
+          </a:fillRef>
+          <a:effectRef idx="0">
+            <a:schemeClr val="accent1"/>
+          </a:effectRef>
+          <a:fontRef idx="minor">
+            <a:schemeClr val="tx1"/>
+          </a:fontRef>
+        </p:style>
+      </p:cxnSp>
+    </p:spTree>
+    <p:extLst>
+      <p:ext uri="{BB962C8B-B14F-4D97-AF65-F5344CB8AC3E}">
+        <p14:creationId xmlns:p14="http://schemas.microsoft.com/office/powerpoint/2010/main" val="3346941142"/>
+      </p:ext>
+    </p:extLst>
+  </p:cSld>
+  <p:clrMapOvr>
+    <a:masterClrMapping/>
+  </p:clrMapOvr>
+</p:sld>
+</file>
+
+<file path=ppt/slides/slide14.xml><?xml version="1.0" encoding="utf-8"?>
+<p:sld xmlns:a="http://schemas.openxmlformats.org/drawingml/2006/main" xmlns:r="http://schemas.openxmlformats.org/officeDocument/2006/relationships" xmlns:p="http://schemas.openxmlformats.org/presentationml/2006/main">
+  <p:cSld>
+    <p:spTree>
+      <p:nvGrpSpPr>
         <p:cNvPr id="1" name=""/>
         <p:cNvGrpSpPr/>
         <p:nvPr/>
@@ -10100,86 +11890,6 @@
 </p:sld>
 </file>
 
-<file path=ppt/slides/slide14.xml><?xml version="1.0" encoding="utf-8"?>
-<p:sld xmlns:a="http://schemas.openxmlformats.org/drawingml/2006/main" xmlns:r="http://schemas.openxmlformats.org/officeDocument/2006/relationships" xmlns:p="http://schemas.openxmlformats.org/presentationml/2006/main">
-  <p:cSld>
-    <p:spTree>
-      <p:nvGrpSpPr>
-        <p:cNvPr id="1" name=""/>
-        <p:cNvGrpSpPr/>
-        <p:nvPr/>
-      </p:nvGrpSpPr>
-      <p:grpSpPr>
-        <a:xfrm>
-          <a:off x="0" y="0"/>
-          <a:ext cx="0" cy="0"/>
-          <a:chOff x="0" y="0"/>
-          <a:chExt cx="0" cy="0"/>
-        </a:xfrm>
-      </p:grpSpPr>
-      <p:sp>
-        <p:nvSpPr>
-          <p:cNvPr id="2" name="タイトル 1">
-            <a:extLst>
-              <a:ext uri="{FF2B5EF4-FFF2-40B4-BE49-F238E27FC236}">
-                <a16:creationId xmlns:a16="http://schemas.microsoft.com/office/drawing/2014/main" id="{F96713DA-F735-E75E-8BDD-1E59223EEB94}"/>
-              </a:ext>
-            </a:extLst>
-          </p:cNvPr>
-          <p:cNvSpPr>
-            <a:spLocks noGrp="1"/>
-          </p:cNvSpPr>
-          <p:nvPr>
-            <p:ph type="title"/>
-          </p:nvPr>
-        </p:nvSpPr>
-        <p:spPr/>
-        <p:txBody>
-          <a:bodyPr/>
-          <a:lstStyle/>
-          <a:p>
-            <a:endParaRPr kumimoji="1" lang="ja-JP" altLang="en-US"/>
-          </a:p>
-        </p:txBody>
-      </p:sp>
-      <p:sp>
-        <p:nvSpPr>
-          <p:cNvPr id="3" name="コンテンツ プレースホルダー 2">
-            <a:extLst>
-              <a:ext uri="{FF2B5EF4-FFF2-40B4-BE49-F238E27FC236}">
-                <a16:creationId xmlns:a16="http://schemas.microsoft.com/office/drawing/2014/main" id="{65CB5940-8902-8C2E-AF4F-F4E943B728D1}"/>
-              </a:ext>
-            </a:extLst>
-          </p:cNvPr>
-          <p:cNvSpPr>
-            <a:spLocks noGrp="1"/>
-          </p:cNvSpPr>
-          <p:nvPr>
-            <p:ph idx="1"/>
-          </p:nvPr>
-        </p:nvSpPr>
-        <p:spPr/>
-        <p:txBody>
-          <a:bodyPr/>
-          <a:lstStyle/>
-          <a:p>
-            <a:endParaRPr kumimoji="1" lang="ja-JP" altLang="en-US"/>
-          </a:p>
-        </p:txBody>
-      </p:sp>
-    </p:spTree>
-    <p:extLst>
-      <p:ext uri="{BB962C8B-B14F-4D97-AF65-F5344CB8AC3E}">
-        <p14:creationId xmlns:p14="http://schemas.microsoft.com/office/powerpoint/2010/main" val="828041881"/>
-      </p:ext>
-    </p:extLst>
-  </p:cSld>
-  <p:clrMapOvr>
-    <a:masterClrMapping/>
-  </p:clrMapOvr>
-</p:sld>
-</file>
-
 <file path=ppt/slides/slide15.xml><?xml version="1.0" encoding="utf-8"?>
 <p:sld xmlns:a="http://schemas.openxmlformats.org/drawingml/2006/main" xmlns:r="http://schemas.openxmlformats.org/officeDocument/2006/relationships" xmlns:p="http://schemas.openxmlformats.org/presentationml/2006/main">
   <p:cSld>
@@ -10229,8 +11939,8 @@
           </a:p>
         </p:txBody>
       </p:sp>
-      <mc:AlternateContent xmlns:mc="http://schemas.openxmlformats.org/markup-compatibility/2006">
-        <mc:Choice xmlns:a14="http://schemas.microsoft.com/office/drawing/2010/main" Requires="a14">
+      <mc:AlternateContent xmlns:mc="http://schemas.openxmlformats.org/markup-compatibility/2006" xmlns:a14="http://schemas.microsoft.com/office/drawing/2010/main">
+        <mc:Choice Requires="a14">
           <p:sp>
             <p:nvSpPr>
               <p:cNvPr id="3" name="コンテンツ プレースホルダー 2">
@@ -10822,7 +12532,7 @@
             </p:txBody>
           </p:sp>
         </mc:Choice>
-        <mc:Fallback>
+        <mc:Fallback xmlns="">
           <p:sp>
             <p:nvSpPr>
               <p:cNvPr id="3" name="コンテンツ プレースホルダー 2">
